--- a/Lectures/ProjPresentationTemplate-1.pptx
+++ b/Lectures/ProjPresentationTemplate-1.pptx
@@ -5,10 +5,10 @@
     <p:sldMasterId id="2147483648" r:id="rId1"/>
   </p:sldMasterIdLst>
   <p:notesMasterIdLst>
-    <p:notesMasterId r:id="rId15"/>
+    <p:notesMasterId r:id="rId17"/>
   </p:notesMasterIdLst>
   <p:handoutMasterIdLst>
-    <p:handoutMasterId r:id="rId16"/>
+    <p:handoutMasterId r:id="rId18"/>
   </p:handoutMasterIdLst>
   <p:sldIdLst>
     <p:sldId id="256" r:id="rId2"/>
@@ -19,11 +19,13 @@
     <p:sldId id="309" r:id="rId7"/>
     <p:sldId id="304" r:id="rId8"/>
     <p:sldId id="290" r:id="rId9"/>
-    <p:sldId id="306" r:id="rId10"/>
-    <p:sldId id="307" r:id="rId11"/>
-    <p:sldId id="308" r:id="rId12"/>
-    <p:sldId id="286" r:id="rId13"/>
-    <p:sldId id="305" r:id="rId14"/>
+    <p:sldId id="919" r:id="rId10"/>
+    <p:sldId id="978" r:id="rId11"/>
+    <p:sldId id="306" r:id="rId12"/>
+    <p:sldId id="307" r:id="rId13"/>
+    <p:sldId id="308" r:id="rId14"/>
+    <p:sldId id="286" r:id="rId15"/>
+    <p:sldId id="305" r:id="rId16"/>
   </p:sldIdLst>
   <p:sldSz cx="9144000" cy="6858000" type="screen4x3"/>
   <p:notesSz cx="7010400" cy="9296400"/>
@@ -253,7 +255,7 @@
           <a:p>
             <a:fld id="{D244F014-9A02-4370-98AF-8A4593A02C65}" type="datetimeFigureOut">
               <a:rPr lang="en-US" smtClean="0"/>
-              <a:t>3/20/19</a:t>
+              <a:t>4/1/26</a:t>
             </a:fld>
             <a:endParaRPr lang="en-US"/>
           </a:p>
@@ -386,14 +388,14 @@
           <a:effectLst/>
           <a:extLst>
             <a:ext uri="{909E8E84-426E-40dd-AFC4-6F175D3DCCD1}">
-              <a14:hiddenFill xmlns="" xmlns:a14="http://schemas.microsoft.com/office/drawing/2010/main">
+              <a14:hiddenFill xmlns:a14="http://schemas.microsoft.com/office/drawing/2010/main" xmlns="">
                 <a:solidFill>
                   <a:schemeClr val="accent1"/>
                 </a:solidFill>
               </a14:hiddenFill>
             </a:ext>
             <a:ext uri="{91240B29-F687-4f45-9708-019B960494DF}">
-              <a14:hiddenLine xmlns="" xmlns:a14="http://schemas.microsoft.com/office/drawing/2010/main" w="9525">
+              <a14:hiddenLine xmlns:a14="http://schemas.microsoft.com/office/drawing/2010/main" xmlns="" w="9525">
                 <a:solidFill>
                   <a:schemeClr val="tx1"/>
                 </a:solidFill>
@@ -403,7 +405,7 @@
               </a14:hiddenLine>
             </a:ext>
             <a:ext uri="{AF507438-7753-43e0-B8FC-AC1667EBCBE1}">
-              <a14:hiddenEffects xmlns="" xmlns:a14="http://schemas.microsoft.com/office/drawing/2010/main">
+              <a14:hiddenEffects xmlns:a14="http://schemas.microsoft.com/office/drawing/2010/main" xmlns="">
                 <a:effectLst>
                   <a:outerShdw dist="35921" dir="2700000" algn="ctr" rotWithShape="0">
                     <a:schemeClr val="bg2"/>
@@ -456,14 +458,14 @@
           <a:effectLst/>
           <a:extLst>
             <a:ext uri="{909E8E84-426E-40dd-AFC4-6F175D3DCCD1}">
-              <a14:hiddenFill xmlns="" xmlns:a14="http://schemas.microsoft.com/office/drawing/2010/main">
+              <a14:hiddenFill xmlns:a14="http://schemas.microsoft.com/office/drawing/2010/main" xmlns="">
                 <a:solidFill>
                   <a:schemeClr val="accent1"/>
                 </a:solidFill>
               </a14:hiddenFill>
             </a:ext>
             <a:ext uri="{91240B29-F687-4f45-9708-019B960494DF}">
-              <a14:hiddenLine xmlns="" xmlns:a14="http://schemas.microsoft.com/office/drawing/2010/main" w="9525">
+              <a14:hiddenLine xmlns:a14="http://schemas.microsoft.com/office/drawing/2010/main" xmlns="" w="9525">
                 <a:solidFill>
                   <a:schemeClr val="tx1"/>
                 </a:solidFill>
@@ -473,7 +475,7 @@
               </a14:hiddenLine>
             </a:ext>
             <a:ext uri="{AF507438-7753-43e0-B8FC-AC1667EBCBE1}">
-              <a14:hiddenEffects xmlns="" xmlns:a14="http://schemas.microsoft.com/office/drawing/2010/main">
+              <a14:hiddenEffects xmlns:a14="http://schemas.microsoft.com/office/drawing/2010/main" xmlns="">
                 <a:effectLst>
                   <a:outerShdw dist="35921" dir="2700000" algn="ctr" rotWithShape="0">
                     <a:schemeClr val="bg2"/>
@@ -531,17 +533,17 @@
           <a:effectLst/>
           <a:extLst>
             <a:ext uri="{FAA26D3D-D897-4be2-8F04-BA451C77F1D7}">
-              <ma14:placeholderFlag xmlns:ma14="http://schemas.microsoft.com/office/mac/drawingml/2011/main" val="1"/>
+              <ma14:placeholderFlag xmlns:ma14="http://schemas.microsoft.com/office/mac/drawingml/2011/main" xmlns="" val="1"/>
             </a:ext>
             <a:ext uri="{909E8E84-426E-40dd-AFC4-6F175D3DCCD1}">
-              <a14:hiddenFill xmlns="" xmlns:a14="http://schemas.microsoft.com/office/drawing/2010/main">
+              <a14:hiddenFill xmlns:a14="http://schemas.microsoft.com/office/drawing/2010/main" xmlns="">
                 <a:solidFill>
                   <a:srgbClr val="FFFFFF"/>
                 </a:solidFill>
               </a14:hiddenFill>
             </a:ext>
             <a:ext uri="{AF507438-7753-43e0-B8FC-AC1667EBCBE1}">
-              <a14:hiddenEffects xmlns="" xmlns:a14="http://schemas.microsoft.com/office/drawing/2010/main">
+              <a14:hiddenEffects xmlns:a14="http://schemas.microsoft.com/office/drawing/2010/main" xmlns="">
                 <a:effectLst>
                   <a:outerShdw blurRad="63500" dist="38099" dir="2700000" algn="ctr" rotWithShape="0">
                     <a:srgbClr val="000000">
@@ -552,7 +554,7 @@
               </a14:hiddenEffects>
             </a:ext>
             <a:ext uri="{53640926-AAD7-44d8-BBD7-CCE9431645EC}">
-              <a14:shadowObscured xmlns="" xmlns:a14="http://schemas.microsoft.com/office/drawing/2010/main" val="1"/>
+              <a14:shadowObscured xmlns:a14="http://schemas.microsoft.com/office/drawing/2010/main" xmlns="" val="1"/>
             </a:ext>
           </a:extLst>
         </p:spPr>
@@ -582,14 +584,14 @@
           <a:effectLst/>
           <a:extLst>
             <a:ext uri="{909E8E84-426E-40dd-AFC4-6F175D3DCCD1}">
-              <a14:hiddenFill xmlns="" xmlns:a14="http://schemas.microsoft.com/office/drawing/2010/main">
+              <a14:hiddenFill xmlns:a14="http://schemas.microsoft.com/office/drawing/2010/main" xmlns="">
                 <a:solidFill>
                   <a:schemeClr val="accent1"/>
                 </a:solidFill>
               </a14:hiddenFill>
             </a:ext>
             <a:ext uri="{91240B29-F687-4f45-9708-019B960494DF}">
-              <a14:hiddenLine xmlns="" xmlns:a14="http://schemas.microsoft.com/office/drawing/2010/main" w="9525">
+              <a14:hiddenLine xmlns:a14="http://schemas.microsoft.com/office/drawing/2010/main" xmlns="" w="9525">
                 <a:solidFill>
                   <a:schemeClr val="tx1"/>
                 </a:solidFill>
@@ -599,7 +601,7 @@
               </a14:hiddenLine>
             </a:ext>
             <a:ext uri="{AF507438-7753-43e0-B8FC-AC1667EBCBE1}">
-              <a14:hiddenEffects xmlns="" xmlns:a14="http://schemas.microsoft.com/office/drawing/2010/main">
+              <a14:hiddenEffects xmlns:a14="http://schemas.microsoft.com/office/drawing/2010/main" xmlns="">
                 <a:effectLst>
                   <a:outerShdw dist="35921" dir="2700000" algn="ctr" rotWithShape="0">
                     <a:schemeClr val="bg2"/>
@@ -619,35 +621,35 @@
           <a:p>
             <a:pPr lvl="0"/>
             <a:r>
-              <a:rPr lang="en-US" altLang="zh-TW" noProof="0" smtClean="0"/>
+              <a:rPr lang="en-US" altLang="zh-TW" noProof="0"/>
               <a:t>Click to edit Master text styles</a:t>
             </a:r>
           </a:p>
           <a:p>
             <a:pPr lvl="1"/>
             <a:r>
-              <a:rPr lang="en-US" altLang="zh-TW" noProof="0" smtClean="0"/>
+              <a:rPr lang="en-US" altLang="zh-TW" noProof="0"/>
               <a:t>Second level</a:t>
             </a:r>
           </a:p>
           <a:p>
             <a:pPr lvl="2"/>
             <a:r>
-              <a:rPr lang="en-US" altLang="zh-TW" noProof="0" smtClean="0"/>
+              <a:rPr lang="en-US" altLang="zh-TW" noProof="0"/>
               <a:t>Third level</a:t>
             </a:r>
           </a:p>
           <a:p>
             <a:pPr lvl="3"/>
             <a:r>
-              <a:rPr lang="en-US" altLang="zh-TW" noProof="0" smtClean="0"/>
+              <a:rPr lang="en-US" altLang="zh-TW" noProof="0"/>
               <a:t>Fourth level</a:t>
             </a:r>
           </a:p>
           <a:p>
             <a:pPr lvl="4"/>
             <a:r>
-              <a:rPr lang="en-US" altLang="zh-TW" noProof="0" smtClean="0"/>
+              <a:rPr lang="en-US" altLang="zh-TW" noProof="0"/>
               <a:t>Fifth level</a:t>
             </a:r>
           </a:p>
@@ -678,14 +680,14 @@
           <a:effectLst/>
           <a:extLst>
             <a:ext uri="{909E8E84-426E-40dd-AFC4-6F175D3DCCD1}">
-              <a14:hiddenFill xmlns="" xmlns:a14="http://schemas.microsoft.com/office/drawing/2010/main">
+              <a14:hiddenFill xmlns:a14="http://schemas.microsoft.com/office/drawing/2010/main" xmlns="">
                 <a:solidFill>
                   <a:schemeClr val="accent1"/>
                 </a:solidFill>
               </a14:hiddenFill>
             </a:ext>
             <a:ext uri="{91240B29-F687-4f45-9708-019B960494DF}">
-              <a14:hiddenLine xmlns="" xmlns:a14="http://schemas.microsoft.com/office/drawing/2010/main" w="9525">
+              <a14:hiddenLine xmlns:a14="http://schemas.microsoft.com/office/drawing/2010/main" xmlns="" w="9525">
                 <a:solidFill>
                   <a:schemeClr val="tx1"/>
                 </a:solidFill>
@@ -695,7 +697,7 @@
               </a14:hiddenLine>
             </a:ext>
             <a:ext uri="{AF507438-7753-43e0-B8FC-AC1667EBCBE1}">
-              <a14:hiddenEffects xmlns="" xmlns:a14="http://schemas.microsoft.com/office/drawing/2010/main">
+              <a14:hiddenEffects xmlns:a14="http://schemas.microsoft.com/office/drawing/2010/main" xmlns="">
                 <a:effectLst>
                   <a:outerShdw dist="35921" dir="2700000" algn="ctr" rotWithShape="0">
                     <a:schemeClr val="bg2"/>
@@ -748,14 +750,14 @@
           <a:effectLst/>
           <a:extLst>
             <a:ext uri="{909E8E84-426E-40dd-AFC4-6F175D3DCCD1}">
-              <a14:hiddenFill xmlns="" xmlns:a14="http://schemas.microsoft.com/office/drawing/2010/main">
+              <a14:hiddenFill xmlns:a14="http://schemas.microsoft.com/office/drawing/2010/main" xmlns="">
                 <a:solidFill>
                   <a:schemeClr val="accent1"/>
                 </a:solidFill>
               </a14:hiddenFill>
             </a:ext>
             <a:ext uri="{91240B29-F687-4f45-9708-019B960494DF}">
-              <a14:hiddenLine xmlns="" xmlns:a14="http://schemas.microsoft.com/office/drawing/2010/main" w="9525">
+              <a14:hiddenLine xmlns:a14="http://schemas.microsoft.com/office/drawing/2010/main" xmlns="" w="9525">
                 <a:solidFill>
                   <a:schemeClr val="tx1"/>
                 </a:solidFill>
@@ -765,7 +767,7 @@
               </a14:hiddenLine>
             </a:ext>
             <a:ext uri="{AF507438-7753-43e0-B8FC-AC1667EBCBE1}">
-              <a14:hiddenEffects xmlns="" xmlns:a14="http://schemas.microsoft.com/office/drawing/2010/main">
+              <a14:hiddenEffects xmlns:a14="http://schemas.microsoft.com/office/drawing/2010/main" xmlns="">
                 <a:effectLst>
                   <a:outerShdw dist="35921" dir="2700000" algn="ctr" rotWithShape="0">
                     <a:schemeClr val="bg2"/>
@@ -962,7 +964,7 @@
           <a:noFill/>
           <a:extLst>
             <a:ext uri="{AF507438-7753-43e0-B8FC-AC1667EBCBE1}">
-              <a14:hiddenEffects xmlns="" xmlns:a14="http://schemas.microsoft.com/office/drawing/2010/main">
+              <a14:hiddenEffects xmlns:a14="http://schemas.microsoft.com/office/drawing/2010/main" xmlns="">
                 <a:effectLst>
                   <a:outerShdw blurRad="63500" dist="38099" dir="2700000" algn="ctr" rotWithShape="0">
                     <a:schemeClr val="bg2">
@@ -1126,7 +1128,7 @@
           <a:noFill/>
           <a:extLst>
             <a:ext uri="{AF507438-7753-43e0-B8FC-AC1667EBCBE1}">
-              <a14:hiddenEffects xmlns="" xmlns:a14="http://schemas.microsoft.com/office/drawing/2010/main">
+              <a14:hiddenEffects xmlns:a14="http://schemas.microsoft.com/office/drawing/2010/main" xmlns="">
                 <a:effectLst>
                   <a:outerShdw blurRad="63500" dist="38099" dir="2700000" algn="ctr" rotWithShape="0">
                     <a:schemeClr val="bg2">
@@ -1143,7 +1145,7 @@
           <a:lstStyle/>
           <a:p>
             <a:pPr eaLnBrk="1" hangingPunct="1"/>
-            <a:endParaRPr lang="zh-TW" altLang="en-US" dirty="0" smtClean="0">
+            <a:endParaRPr lang="zh-TW" altLang="en-US" dirty="0">
               <a:latin typeface="Arial" pitchFamily="34" charset="0"/>
               <a:ea typeface="PMingLiU" pitchFamily="18" charset="-120"/>
             </a:endParaRPr>
@@ -1168,7 +1170,13 @@
   <p:cSld>
     <p:spTree>
       <p:nvGrpSpPr>
-        <p:cNvPr id="1" name=""/>
+        <p:cNvPr id="1" name="">
+          <a:extLst>
+            <a:ext uri="{FF2B5EF4-FFF2-40B4-BE49-F238E27FC236}">
+              <a16:creationId xmlns:a16="http://schemas.microsoft.com/office/drawing/2014/main" id="{345CC6CF-1A8A-2B34-56E8-EBD18BADF82D}"/>
+            </a:ext>
+          </a:extLst>
+        </p:cNvPr>
         <p:cNvGrpSpPr/>
         <p:nvPr/>
       </p:nvGrpSpPr>
@@ -1182,213 +1190,80 @@
       </p:grpSpPr>
       <p:sp>
         <p:nvSpPr>
-          <p:cNvPr id="31746" name="Rectangle 7"/>
-          <p:cNvSpPr>
-            <a:spLocks noGrp="1" noChangeArrowheads="1"/>
+          <p:cNvPr id="2" name="Slide Image Placeholder 1">
+            <a:extLst>
+              <a:ext uri="{FF2B5EF4-FFF2-40B4-BE49-F238E27FC236}">
+                <a16:creationId xmlns:a16="http://schemas.microsoft.com/office/drawing/2014/main" id="{9D0651A8-2C75-920A-BB3C-6C24D330BA86}"/>
+              </a:ext>
+            </a:extLst>
+          </p:cNvPr>
+          <p:cNvSpPr>
+            <a:spLocks noGrp="1" noRot="1" noChangeAspect="1"/>
+          </p:cNvSpPr>
+          <p:nvPr>
+            <p:ph type="sldImg"/>
+          </p:nvPr>
+        </p:nvSpPr>
+        <p:spPr/>
+      </p:sp>
+      <p:sp>
+        <p:nvSpPr>
+          <p:cNvPr id="3" name="Notes Placeholder 2">
+            <a:extLst>
+              <a:ext uri="{FF2B5EF4-FFF2-40B4-BE49-F238E27FC236}">
+                <a16:creationId xmlns:a16="http://schemas.microsoft.com/office/drawing/2014/main" id="{1391C5E6-806F-3D15-9848-32370D5C5AEB}"/>
+              </a:ext>
+            </a:extLst>
+          </p:cNvPr>
+          <p:cNvSpPr>
+            <a:spLocks noGrp="1"/>
+          </p:cNvSpPr>
+          <p:nvPr>
+            <p:ph type="body" idx="1"/>
+          </p:nvPr>
+        </p:nvSpPr>
+        <p:spPr/>
+        <p:txBody>
+          <a:bodyPr/>
+          <a:lstStyle/>
+          <a:p>
+            <a:endParaRPr lang="en-US" dirty="0"/>
+          </a:p>
+        </p:txBody>
+      </p:sp>
+      <p:sp>
+        <p:nvSpPr>
+          <p:cNvPr id="4" name="Slide Number Placeholder 3">
+            <a:extLst>
+              <a:ext uri="{FF2B5EF4-FFF2-40B4-BE49-F238E27FC236}">
+                <a16:creationId xmlns:a16="http://schemas.microsoft.com/office/drawing/2014/main" id="{9CA72231-E9E5-5F17-C55A-22F21A01D0EB}"/>
+              </a:ext>
+            </a:extLst>
+          </p:cNvPr>
+          <p:cNvSpPr>
+            <a:spLocks noGrp="1"/>
           </p:cNvSpPr>
           <p:nvPr>
             <p:ph type="sldNum" sz="quarter" idx="5"/>
           </p:nvPr>
         </p:nvSpPr>
-        <p:spPr>
-          <a:noFill/>
-          <a:extLst>
-            <a:ext uri="{AF507438-7753-43e0-B8FC-AC1667EBCBE1}">
-              <a14:hiddenEffects xmlns="" xmlns:a14="http://schemas.microsoft.com/office/drawing/2010/main">
-                <a:effectLst>
-                  <a:outerShdw blurRad="63500" dist="38099" dir="2700000" algn="ctr" rotWithShape="0">
-                    <a:schemeClr val="bg2">
-                      <a:alpha val="74998"/>
-                    </a:schemeClr>
-                  </a:outerShdw>
-                </a:effectLst>
-              </a14:hiddenEffects>
-            </a:ext>
-          </a:extLst>
-        </p:spPr>
+        <p:spPr/>
         <p:txBody>
           <a:bodyPr/>
-          <a:lstStyle>
-            <a:lvl1pPr eaLnBrk="0" hangingPunct="0">
-              <a:defRPr sz="2400">
-                <a:solidFill>
-                  <a:schemeClr val="tx1"/>
-                </a:solidFill>
-                <a:latin typeface="Arial" pitchFamily="34" charset="0"/>
-                <a:ea typeface="ＭＳ Ｐゴシック" pitchFamily="34" charset="-128"/>
-              </a:defRPr>
-            </a:lvl1pPr>
-            <a:lvl2pPr marL="757066" indent="-291179" eaLnBrk="0" hangingPunct="0">
-              <a:defRPr sz="2400">
-                <a:solidFill>
-                  <a:schemeClr val="tx1"/>
-                </a:solidFill>
-                <a:latin typeface="Arial" pitchFamily="34" charset="0"/>
-                <a:ea typeface="ＭＳ Ｐゴシック" pitchFamily="34" charset="-128"/>
-              </a:defRPr>
-            </a:lvl2pPr>
-            <a:lvl3pPr marL="1164717" indent="-232943" eaLnBrk="0" hangingPunct="0">
-              <a:defRPr sz="2400">
-                <a:solidFill>
-                  <a:schemeClr val="tx1"/>
-                </a:solidFill>
-                <a:latin typeface="Arial" pitchFamily="34" charset="0"/>
-                <a:ea typeface="ＭＳ Ｐゴシック" pitchFamily="34" charset="-128"/>
-              </a:defRPr>
-            </a:lvl3pPr>
-            <a:lvl4pPr marL="1630604" indent="-232943" eaLnBrk="0" hangingPunct="0">
-              <a:defRPr sz="2400">
-                <a:solidFill>
-                  <a:schemeClr val="tx1"/>
-                </a:solidFill>
-                <a:latin typeface="Arial" pitchFamily="34" charset="0"/>
-                <a:ea typeface="ＭＳ Ｐゴシック" pitchFamily="34" charset="-128"/>
-              </a:defRPr>
-            </a:lvl4pPr>
-            <a:lvl5pPr marL="2096491" indent="-232943" eaLnBrk="0" hangingPunct="0">
-              <a:defRPr sz="2400">
-                <a:solidFill>
-                  <a:schemeClr val="tx1"/>
-                </a:solidFill>
-                <a:latin typeface="Arial" pitchFamily="34" charset="0"/>
-                <a:ea typeface="ＭＳ Ｐゴシック" pitchFamily="34" charset="-128"/>
-              </a:defRPr>
-            </a:lvl5pPr>
-            <a:lvl6pPr marL="2562377" indent="-232943" eaLnBrk="0" fontAlgn="base" hangingPunct="0">
-              <a:spcBef>
-                <a:spcPct val="0"/>
-              </a:spcBef>
-              <a:spcAft>
-                <a:spcPct val="0"/>
-              </a:spcAft>
-              <a:defRPr sz="2400">
-                <a:solidFill>
-                  <a:schemeClr val="tx1"/>
-                </a:solidFill>
-                <a:latin typeface="Arial" pitchFamily="34" charset="0"/>
-                <a:ea typeface="ＭＳ Ｐゴシック" pitchFamily="34" charset="-128"/>
-              </a:defRPr>
-            </a:lvl6pPr>
-            <a:lvl7pPr marL="3028264" indent="-232943" eaLnBrk="0" fontAlgn="base" hangingPunct="0">
-              <a:spcBef>
-                <a:spcPct val="0"/>
-              </a:spcBef>
-              <a:spcAft>
-                <a:spcPct val="0"/>
-              </a:spcAft>
-              <a:defRPr sz="2400">
-                <a:solidFill>
-                  <a:schemeClr val="tx1"/>
-                </a:solidFill>
-                <a:latin typeface="Arial" pitchFamily="34" charset="0"/>
-                <a:ea typeface="ＭＳ Ｐゴシック" pitchFamily="34" charset="-128"/>
-              </a:defRPr>
-            </a:lvl7pPr>
-            <a:lvl8pPr marL="3494151" indent="-232943" eaLnBrk="0" fontAlgn="base" hangingPunct="0">
-              <a:spcBef>
-                <a:spcPct val="0"/>
-              </a:spcBef>
-              <a:spcAft>
-                <a:spcPct val="0"/>
-              </a:spcAft>
-              <a:defRPr sz="2400">
-                <a:solidFill>
-                  <a:schemeClr val="tx1"/>
-                </a:solidFill>
-                <a:latin typeface="Arial" pitchFamily="34" charset="0"/>
-                <a:ea typeface="ＭＳ Ｐゴシック" pitchFamily="34" charset="-128"/>
-              </a:defRPr>
-            </a:lvl8pPr>
-            <a:lvl9pPr marL="3960038" indent="-232943" eaLnBrk="0" fontAlgn="base" hangingPunct="0">
-              <a:spcBef>
-                <a:spcPct val="0"/>
-              </a:spcBef>
-              <a:spcAft>
-                <a:spcPct val="0"/>
-              </a:spcAft>
-              <a:defRPr sz="2400">
-                <a:solidFill>
-                  <a:schemeClr val="tx1"/>
-                </a:solidFill>
-                <a:latin typeface="Arial" pitchFamily="34" charset="0"/>
-                <a:ea typeface="ＭＳ Ｐゴシック" pitchFamily="34" charset="-128"/>
-              </a:defRPr>
-            </a:lvl9pPr>
-          </a:lstStyle>
-          <a:p>
-            <a:pPr eaLnBrk="1" hangingPunct="1"/>
-            <a:fld id="{61AE4675-46EC-4EDF-89E2-3C4CC1C64A21}" type="slidenum">
-              <a:rPr lang="zh-TW" altLang="en-US" sz="1200">
-                <a:ea typeface="PMingLiU" pitchFamily="18" charset="-120"/>
-              </a:rPr>
-              <a:pPr eaLnBrk="1" hangingPunct="1"/>
+          <a:lstStyle/>
+          <a:p>
+            <a:fld id="{A7454B5F-9003-4AF7-8090-8A6CBDFE1AE6}" type="slidenum">
+              <a:rPr lang="en-US" smtClean="0"/>
               <a:t>10</a:t>
             </a:fld>
-            <a:endParaRPr lang="en-US" altLang="zh-TW" sz="1200">
-              <a:ea typeface="PMingLiU" pitchFamily="18" charset="-120"/>
-            </a:endParaRPr>
-          </a:p>
-        </p:txBody>
-      </p:sp>
-      <p:sp>
-        <p:nvSpPr>
-          <p:cNvPr id="31747" name="Rectangle 2"/>
-          <p:cNvSpPr>
-            <a:spLocks noGrp="1" noRot="1" noChangeAspect="1" noChangeArrowheads="1" noTextEdit="1"/>
-          </p:cNvSpPr>
-          <p:nvPr>
-            <p:ph type="sldImg"/>
-          </p:nvPr>
-        </p:nvSpPr>
-        <p:spPr>
-          <a:ln/>
-        </p:spPr>
-      </p:sp>
-      <p:sp>
-        <p:nvSpPr>
-          <p:cNvPr id="31748" name="Rectangle 3"/>
-          <p:cNvSpPr>
-            <a:spLocks noGrp="1" noChangeArrowheads="1"/>
-          </p:cNvSpPr>
-          <p:nvPr>
-            <p:ph type="body" idx="1"/>
-          </p:nvPr>
-        </p:nvSpPr>
-        <p:spPr>
-          <a:noFill/>
-          <a:extLst>
-            <a:ext uri="{AF507438-7753-43e0-B8FC-AC1667EBCBE1}">
-              <a14:hiddenEffects xmlns="" xmlns:a14="http://schemas.microsoft.com/office/drawing/2010/main">
-                <a:effectLst>
-                  <a:outerShdw blurRad="63500" dist="38099" dir="2700000" algn="ctr" rotWithShape="0">
-                    <a:schemeClr val="bg2">
-                      <a:alpha val="74997"/>
-                    </a:schemeClr>
-                  </a:outerShdw>
-                </a:effectLst>
-              </a14:hiddenEffects>
-            </a:ext>
-          </a:extLst>
-        </p:spPr>
-        <p:txBody>
-          <a:bodyPr/>
-          <a:lstStyle/>
-          <a:p>
-            <a:pPr eaLnBrk="1" hangingPunct="1"/>
-            <a:r>
-              <a:rPr lang="en-US" altLang="zh-TW" baseline="0" dirty="0" smtClean="0">
-                <a:latin typeface="Arial" pitchFamily="34" charset="0"/>
-                <a:ea typeface="PMingLiU" pitchFamily="18" charset="-120"/>
-              </a:rPr>
-              <a:t>In the rest of this presentation, I’m going to talk about following contents:</a:t>
-            </a:r>
+            <a:endParaRPr lang="en-US"/>
           </a:p>
         </p:txBody>
       </p:sp>
     </p:spTree>
     <p:extLst>
       <p:ext uri="{BB962C8B-B14F-4D97-AF65-F5344CB8AC3E}">
-        <p14:creationId xmlns:p14="http://schemas.microsoft.com/office/powerpoint/2010/main" val="163925635"/>
+        <p14:creationId xmlns:p14="http://schemas.microsoft.com/office/powerpoint/2010/main" val="3294541605"/>
       </p:ext>
     </p:extLst>
   </p:cSld>
@@ -1429,7 +1304,7 @@
           <a:noFill/>
           <a:extLst>
             <a:ext uri="{AF507438-7753-43e0-B8FC-AC1667EBCBE1}">
-              <a14:hiddenEffects xmlns="" xmlns:a14="http://schemas.microsoft.com/office/drawing/2010/main">
+              <a14:hiddenEffects xmlns:a14="http://schemas.microsoft.com/office/drawing/2010/main" xmlns="">
                 <a:effectLst>
                   <a:outerShdw blurRad="63500" dist="38099" dir="2700000" algn="ctr" rotWithShape="0">
                     <a:schemeClr val="bg2">
@@ -1593,7 +1468,7 @@
           <a:noFill/>
           <a:extLst>
             <a:ext uri="{AF507438-7753-43e0-B8FC-AC1667EBCBE1}">
-              <a14:hiddenEffects xmlns="" xmlns:a14="http://schemas.microsoft.com/office/drawing/2010/main">
+              <a14:hiddenEffects xmlns:a14="http://schemas.microsoft.com/office/drawing/2010/main" xmlns="">
                 <a:effectLst>
                   <a:outerShdw blurRad="63500" dist="38099" dir="2700000" algn="ctr" rotWithShape="0">
                     <a:schemeClr val="bg2">
@@ -1611,7 +1486,477 @@
           <a:p>
             <a:pPr eaLnBrk="1" hangingPunct="1"/>
             <a:r>
-              <a:rPr lang="en-US" altLang="zh-TW" baseline="0" dirty="0" smtClean="0">
+              <a:rPr lang="en-US" altLang="zh-TW" baseline="0" dirty="0">
+                <a:latin typeface="Arial" pitchFamily="34" charset="0"/>
+                <a:ea typeface="PMingLiU" pitchFamily="18" charset="-120"/>
+              </a:rPr>
+              <a:t>In the rest of this presentation, I’m going to talk about following contents:</a:t>
+            </a:r>
+          </a:p>
+        </p:txBody>
+      </p:sp>
+    </p:spTree>
+    <p:extLst>
+      <p:ext uri="{BB962C8B-B14F-4D97-AF65-F5344CB8AC3E}">
+        <p14:creationId xmlns:p14="http://schemas.microsoft.com/office/powerpoint/2010/main" val="1947272845"/>
+      </p:ext>
+    </p:extLst>
+  </p:cSld>
+  <p:clrMapOvr>
+    <a:masterClrMapping/>
+  </p:clrMapOvr>
+</p:notes>
+</file>
+
+<file path=ppt/notesSlides/notesSlide12.xml><?xml version="1.0" encoding="utf-8"?>
+<p:notes xmlns:a="http://schemas.openxmlformats.org/drawingml/2006/main" xmlns:r="http://schemas.openxmlformats.org/officeDocument/2006/relationships" xmlns:p="http://schemas.openxmlformats.org/presentationml/2006/main">
+  <p:cSld>
+    <p:spTree>
+      <p:nvGrpSpPr>
+        <p:cNvPr id="1" name=""/>
+        <p:cNvGrpSpPr/>
+        <p:nvPr/>
+      </p:nvGrpSpPr>
+      <p:grpSpPr>
+        <a:xfrm>
+          <a:off x="0" y="0"/>
+          <a:ext cx="0" cy="0"/>
+          <a:chOff x="0" y="0"/>
+          <a:chExt cx="0" cy="0"/>
+        </a:xfrm>
+      </p:grpSpPr>
+      <p:sp>
+        <p:nvSpPr>
+          <p:cNvPr id="31746" name="Rectangle 7"/>
+          <p:cNvSpPr>
+            <a:spLocks noGrp="1" noChangeArrowheads="1"/>
+          </p:cNvSpPr>
+          <p:nvPr>
+            <p:ph type="sldNum" sz="quarter" idx="5"/>
+          </p:nvPr>
+        </p:nvSpPr>
+        <p:spPr>
+          <a:noFill/>
+          <a:extLst>
+            <a:ext uri="{AF507438-7753-43e0-B8FC-AC1667EBCBE1}">
+              <a14:hiddenEffects xmlns:a14="http://schemas.microsoft.com/office/drawing/2010/main" xmlns="">
+                <a:effectLst>
+                  <a:outerShdw blurRad="63500" dist="38099" dir="2700000" algn="ctr" rotWithShape="0">
+                    <a:schemeClr val="bg2">
+                      <a:alpha val="74998"/>
+                    </a:schemeClr>
+                  </a:outerShdw>
+                </a:effectLst>
+              </a14:hiddenEffects>
+            </a:ext>
+          </a:extLst>
+        </p:spPr>
+        <p:txBody>
+          <a:bodyPr/>
+          <a:lstStyle>
+            <a:lvl1pPr eaLnBrk="0" hangingPunct="0">
+              <a:defRPr sz="2400">
+                <a:solidFill>
+                  <a:schemeClr val="tx1"/>
+                </a:solidFill>
+                <a:latin typeface="Arial" pitchFamily="34" charset="0"/>
+                <a:ea typeface="ＭＳ Ｐゴシック" pitchFamily="34" charset="-128"/>
+              </a:defRPr>
+            </a:lvl1pPr>
+            <a:lvl2pPr marL="757066" indent="-291179" eaLnBrk="0" hangingPunct="0">
+              <a:defRPr sz="2400">
+                <a:solidFill>
+                  <a:schemeClr val="tx1"/>
+                </a:solidFill>
+                <a:latin typeface="Arial" pitchFamily="34" charset="0"/>
+                <a:ea typeface="ＭＳ Ｐゴシック" pitchFamily="34" charset="-128"/>
+              </a:defRPr>
+            </a:lvl2pPr>
+            <a:lvl3pPr marL="1164717" indent="-232943" eaLnBrk="0" hangingPunct="0">
+              <a:defRPr sz="2400">
+                <a:solidFill>
+                  <a:schemeClr val="tx1"/>
+                </a:solidFill>
+                <a:latin typeface="Arial" pitchFamily="34" charset="0"/>
+                <a:ea typeface="ＭＳ Ｐゴシック" pitchFamily="34" charset="-128"/>
+              </a:defRPr>
+            </a:lvl3pPr>
+            <a:lvl4pPr marL="1630604" indent="-232943" eaLnBrk="0" hangingPunct="0">
+              <a:defRPr sz="2400">
+                <a:solidFill>
+                  <a:schemeClr val="tx1"/>
+                </a:solidFill>
+                <a:latin typeface="Arial" pitchFamily="34" charset="0"/>
+                <a:ea typeface="ＭＳ Ｐゴシック" pitchFamily="34" charset="-128"/>
+              </a:defRPr>
+            </a:lvl4pPr>
+            <a:lvl5pPr marL="2096491" indent="-232943" eaLnBrk="0" hangingPunct="0">
+              <a:defRPr sz="2400">
+                <a:solidFill>
+                  <a:schemeClr val="tx1"/>
+                </a:solidFill>
+                <a:latin typeface="Arial" pitchFamily="34" charset="0"/>
+                <a:ea typeface="ＭＳ Ｐゴシック" pitchFamily="34" charset="-128"/>
+              </a:defRPr>
+            </a:lvl5pPr>
+            <a:lvl6pPr marL="2562377" indent="-232943" eaLnBrk="0" fontAlgn="base" hangingPunct="0">
+              <a:spcBef>
+                <a:spcPct val="0"/>
+              </a:spcBef>
+              <a:spcAft>
+                <a:spcPct val="0"/>
+              </a:spcAft>
+              <a:defRPr sz="2400">
+                <a:solidFill>
+                  <a:schemeClr val="tx1"/>
+                </a:solidFill>
+                <a:latin typeface="Arial" pitchFamily="34" charset="0"/>
+                <a:ea typeface="ＭＳ Ｐゴシック" pitchFamily="34" charset="-128"/>
+              </a:defRPr>
+            </a:lvl6pPr>
+            <a:lvl7pPr marL="3028264" indent="-232943" eaLnBrk="0" fontAlgn="base" hangingPunct="0">
+              <a:spcBef>
+                <a:spcPct val="0"/>
+              </a:spcBef>
+              <a:spcAft>
+                <a:spcPct val="0"/>
+              </a:spcAft>
+              <a:defRPr sz="2400">
+                <a:solidFill>
+                  <a:schemeClr val="tx1"/>
+                </a:solidFill>
+                <a:latin typeface="Arial" pitchFamily="34" charset="0"/>
+                <a:ea typeface="ＭＳ Ｐゴシック" pitchFamily="34" charset="-128"/>
+              </a:defRPr>
+            </a:lvl7pPr>
+            <a:lvl8pPr marL="3494151" indent="-232943" eaLnBrk="0" fontAlgn="base" hangingPunct="0">
+              <a:spcBef>
+                <a:spcPct val="0"/>
+              </a:spcBef>
+              <a:spcAft>
+                <a:spcPct val="0"/>
+              </a:spcAft>
+              <a:defRPr sz="2400">
+                <a:solidFill>
+                  <a:schemeClr val="tx1"/>
+                </a:solidFill>
+                <a:latin typeface="Arial" pitchFamily="34" charset="0"/>
+                <a:ea typeface="ＭＳ Ｐゴシック" pitchFamily="34" charset="-128"/>
+              </a:defRPr>
+            </a:lvl8pPr>
+            <a:lvl9pPr marL="3960038" indent="-232943" eaLnBrk="0" fontAlgn="base" hangingPunct="0">
+              <a:spcBef>
+                <a:spcPct val="0"/>
+              </a:spcBef>
+              <a:spcAft>
+                <a:spcPct val="0"/>
+              </a:spcAft>
+              <a:defRPr sz="2400">
+                <a:solidFill>
+                  <a:schemeClr val="tx1"/>
+                </a:solidFill>
+                <a:latin typeface="Arial" pitchFamily="34" charset="0"/>
+                <a:ea typeface="ＭＳ Ｐゴシック" pitchFamily="34" charset="-128"/>
+              </a:defRPr>
+            </a:lvl9pPr>
+          </a:lstStyle>
+          <a:p>
+            <a:pPr eaLnBrk="1" hangingPunct="1"/>
+            <a:fld id="{61AE4675-46EC-4EDF-89E2-3C4CC1C64A21}" type="slidenum">
+              <a:rPr lang="zh-TW" altLang="en-US" sz="1200">
+                <a:ea typeface="PMingLiU" pitchFamily="18" charset="-120"/>
+              </a:rPr>
+              <a:pPr eaLnBrk="1" hangingPunct="1"/>
+              <a:t>12</a:t>
+            </a:fld>
+            <a:endParaRPr lang="en-US" altLang="zh-TW" sz="1200">
+              <a:ea typeface="PMingLiU" pitchFamily="18" charset="-120"/>
+            </a:endParaRPr>
+          </a:p>
+        </p:txBody>
+      </p:sp>
+      <p:sp>
+        <p:nvSpPr>
+          <p:cNvPr id="31747" name="Rectangle 2"/>
+          <p:cNvSpPr>
+            <a:spLocks noGrp="1" noRot="1" noChangeAspect="1" noChangeArrowheads="1" noTextEdit="1"/>
+          </p:cNvSpPr>
+          <p:nvPr>
+            <p:ph type="sldImg"/>
+          </p:nvPr>
+        </p:nvSpPr>
+        <p:spPr>
+          <a:ln/>
+        </p:spPr>
+      </p:sp>
+      <p:sp>
+        <p:nvSpPr>
+          <p:cNvPr id="31748" name="Rectangle 3"/>
+          <p:cNvSpPr>
+            <a:spLocks noGrp="1" noChangeArrowheads="1"/>
+          </p:cNvSpPr>
+          <p:nvPr>
+            <p:ph type="body" idx="1"/>
+          </p:nvPr>
+        </p:nvSpPr>
+        <p:spPr>
+          <a:noFill/>
+          <a:extLst>
+            <a:ext uri="{AF507438-7753-43e0-B8FC-AC1667EBCBE1}">
+              <a14:hiddenEffects xmlns:a14="http://schemas.microsoft.com/office/drawing/2010/main" xmlns="">
+                <a:effectLst>
+                  <a:outerShdw blurRad="63500" dist="38099" dir="2700000" algn="ctr" rotWithShape="0">
+                    <a:schemeClr val="bg2">
+                      <a:alpha val="74997"/>
+                    </a:schemeClr>
+                  </a:outerShdw>
+                </a:effectLst>
+              </a14:hiddenEffects>
+            </a:ext>
+          </a:extLst>
+        </p:spPr>
+        <p:txBody>
+          <a:bodyPr/>
+          <a:lstStyle/>
+          <a:p>
+            <a:pPr eaLnBrk="1" hangingPunct="1"/>
+            <a:r>
+              <a:rPr lang="en-US" altLang="zh-TW" baseline="0" dirty="0">
+                <a:latin typeface="Arial" pitchFamily="34" charset="0"/>
+                <a:ea typeface="PMingLiU" pitchFamily="18" charset="-120"/>
+              </a:rPr>
+              <a:t>In the rest of this presentation, I’m going to talk about following contents:</a:t>
+            </a:r>
+          </a:p>
+        </p:txBody>
+      </p:sp>
+    </p:spTree>
+    <p:extLst>
+      <p:ext uri="{BB962C8B-B14F-4D97-AF65-F5344CB8AC3E}">
+        <p14:creationId xmlns:p14="http://schemas.microsoft.com/office/powerpoint/2010/main" val="163925635"/>
+      </p:ext>
+    </p:extLst>
+  </p:cSld>
+  <p:clrMapOvr>
+    <a:masterClrMapping/>
+  </p:clrMapOvr>
+</p:notes>
+</file>
+
+<file path=ppt/notesSlides/notesSlide13.xml><?xml version="1.0" encoding="utf-8"?>
+<p:notes xmlns:a="http://schemas.openxmlformats.org/drawingml/2006/main" xmlns:r="http://schemas.openxmlformats.org/officeDocument/2006/relationships" xmlns:p="http://schemas.openxmlformats.org/presentationml/2006/main">
+  <p:cSld>
+    <p:spTree>
+      <p:nvGrpSpPr>
+        <p:cNvPr id="1" name=""/>
+        <p:cNvGrpSpPr/>
+        <p:nvPr/>
+      </p:nvGrpSpPr>
+      <p:grpSpPr>
+        <a:xfrm>
+          <a:off x="0" y="0"/>
+          <a:ext cx="0" cy="0"/>
+          <a:chOff x="0" y="0"/>
+          <a:chExt cx="0" cy="0"/>
+        </a:xfrm>
+      </p:grpSpPr>
+      <p:sp>
+        <p:nvSpPr>
+          <p:cNvPr id="31746" name="Rectangle 7"/>
+          <p:cNvSpPr>
+            <a:spLocks noGrp="1" noChangeArrowheads="1"/>
+          </p:cNvSpPr>
+          <p:nvPr>
+            <p:ph type="sldNum" sz="quarter" idx="5"/>
+          </p:nvPr>
+        </p:nvSpPr>
+        <p:spPr>
+          <a:noFill/>
+          <a:extLst>
+            <a:ext uri="{AF507438-7753-43e0-B8FC-AC1667EBCBE1}">
+              <a14:hiddenEffects xmlns:a14="http://schemas.microsoft.com/office/drawing/2010/main" xmlns="">
+                <a:effectLst>
+                  <a:outerShdw blurRad="63500" dist="38099" dir="2700000" algn="ctr" rotWithShape="0">
+                    <a:schemeClr val="bg2">
+                      <a:alpha val="74998"/>
+                    </a:schemeClr>
+                  </a:outerShdw>
+                </a:effectLst>
+              </a14:hiddenEffects>
+            </a:ext>
+          </a:extLst>
+        </p:spPr>
+        <p:txBody>
+          <a:bodyPr/>
+          <a:lstStyle>
+            <a:lvl1pPr eaLnBrk="0" hangingPunct="0">
+              <a:defRPr sz="2400">
+                <a:solidFill>
+                  <a:schemeClr val="tx1"/>
+                </a:solidFill>
+                <a:latin typeface="Arial" pitchFamily="34" charset="0"/>
+                <a:ea typeface="ＭＳ Ｐゴシック" pitchFamily="34" charset="-128"/>
+              </a:defRPr>
+            </a:lvl1pPr>
+            <a:lvl2pPr marL="757066" indent="-291179" eaLnBrk="0" hangingPunct="0">
+              <a:defRPr sz="2400">
+                <a:solidFill>
+                  <a:schemeClr val="tx1"/>
+                </a:solidFill>
+                <a:latin typeface="Arial" pitchFamily="34" charset="0"/>
+                <a:ea typeface="ＭＳ Ｐゴシック" pitchFamily="34" charset="-128"/>
+              </a:defRPr>
+            </a:lvl2pPr>
+            <a:lvl3pPr marL="1164717" indent="-232943" eaLnBrk="0" hangingPunct="0">
+              <a:defRPr sz="2400">
+                <a:solidFill>
+                  <a:schemeClr val="tx1"/>
+                </a:solidFill>
+                <a:latin typeface="Arial" pitchFamily="34" charset="0"/>
+                <a:ea typeface="ＭＳ Ｐゴシック" pitchFamily="34" charset="-128"/>
+              </a:defRPr>
+            </a:lvl3pPr>
+            <a:lvl4pPr marL="1630604" indent="-232943" eaLnBrk="0" hangingPunct="0">
+              <a:defRPr sz="2400">
+                <a:solidFill>
+                  <a:schemeClr val="tx1"/>
+                </a:solidFill>
+                <a:latin typeface="Arial" pitchFamily="34" charset="0"/>
+                <a:ea typeface="ＭＳ Ｐゴシック" pitchFamily="34" charset="-128"/>
+              </a:defRPr>
+            </a:lvl4pPr>
+            <a:lvl5pPr marL="2096491" indent="-232943" eaLnBrk="0" hangingPunct="0">
+              <a:defRPr sz="2400">
+                <a:solidFill>
+                  <a:schemeClr val="tx1"/>
+                </a:solidFill>
+                <a:latin typeface="Arial" pitchFamily="34" charset="0"/>
+                <a:ea typeface="ＭＳ Ｐゴシック" pitchFamily="34" charset="-128"/>
+              </a:defRPr>
+            </a:lvl5pPr>
+            <a:lvl6pPr marL="2562377" indent="-232943" eaLnBrk="0" fontAlgn="base" hangingPunct="0">
+              <a:spcBef>
+                <a:spcPct val="0"/>
+              </a:spcBef>
+              <a:spcAft>
+                <a:spcPct val="0"/>
+              </a:spcAft>
+              <a:defRPr sz="2400">
+                <a:solidFill>
+                  <a:schemeClr val="tx1"/>
+                </a:solidFill>
+                <a:latin typeface="Arial" pitchFamily="34" charset="0"/>
+                <a:ea typeface="ＭＳ Ｐゴシック" pitchFamily="34" charset="-128"/>
+              </a:defRPr>
+            </a:lvl6pPr>
+            <a:lvl7pPr marL="3028264" indent="-232943" eaLnBrk="0" fontAlgn="base" hangingPunct="0">
+              <a:spcBef>
+                <a:spcPct val="0"/>
+              </a:spcBef>
+              <a:spcAft>
+                <a:spcPct val="0"/>
+              </a:spcAft>
+              <a:defRPr sz="2400">
+                <a:solidFill>
+                  <a:schemeClr val="tx1"/>
+                </a:solidFill>
+                <a:latin typeface="Arial" pitchFamily="34" charset="0"/>
+                <a:ea typeface="ＭＳ Ｐゴシック" pitchFamily="34" charset="-128"/>
+              </a:defRPr>
+            </a:lvl7pPr>
+            <a:lvl8pPr marL="3494151" indent="-232943" eaLnBrk="0" fontAlgn="base" hangingPunct="0">
+              <a:spcBef>
+                <a:spcPct val="0"/>
+              </a:spcBef>
+              <a:spcAft>
+                <a:spcPct val="0"/>
+              </a:spcAft>
+              <a:defRPr sz="2400">
+                <a:solidFill>
+                  <a:schemeClr val="tx1"/>
+                </a:solidFill>
+                <a:latin typeface="Arial" pitchFamily="34" charset="0"/>
+                <a:ea typeface="ＭＳ Ｐゴシック" pitchFamily="34" charset="-128"/>
+              </a:defRPr>
+            </a:lvl8pPr>
+            <a:lvl9pPr marL="3960038" indent="-232943" eaLnBrk="0" fontAlgn="base" hangingPunct="0">
+              <a:spcBef>
+                <a:spcPct val="0"/>
+              </a:spcBef>
+              <a:spcAft>
+                <a:spcPct val="0"/>
+              </a:spcAft>
+              <a:defRPr sz="2400">
+                <a:solidFill>
+                  <a:schemeClr val="tx1"/>
+                </a:solidFill>
+                <a:latin typeface="Arial" pitchFamily="34" charset="0"/>
+                <a:ea typeface="ＭＳ Ｐゴシック" pitchFamily="34" charset="-128"/>
+              </a:defRPr>
+            </a:lvl9pPr>
+          </a:lstStyle>
+          <a:p>
+            <a:pPr eaLnBrk="1" hangingPunct="1"/>
+            <a:fld id="{61AE4675-46EC-4EDF-89E2-3C4CC1C64A21}" type="slidenum">
+              <a:rPr lang="zh-TW" altLang="en-US" sz="1200">
+                <a:ea typeface="PMingLiU" pitchFamily="18" charset="-120"/>
+              </a:rPr>
+              <a:pPr eaLnBrk="1" hangingPunct="1"/>
+              <a:t>13</a:t>
+            </a:fld>
+            <a:endParaRPr lang="en-US" altLang="zh-TW" sz="1200">
+              <a:ea typeface="PMingLiU" pitchFamily="18" charset="-120"/>
+            </a:endParaRPr>
+          </a:p>
+        </p:txBody>
+      </p:sp>
+      <p:sp>
+        <p:nvSpPr>
+          <p:cNvPr id="31747" name="Rectangle 2"/>
+          <p:cNvSpPr>
+            <a:spLocks noGrp="1" noRot="1" noChangeAspect="1" noChangeArrowheads="1" noTextEdit="1"/>
+          </p:cNvSpPr>
+          <p:nvPr>
+            <p:ph type="sldImg"/>
+          </p:nvPr>
+        </p:nvSpPr>
+        <p:spPr>
+          <a:ln/>
+        </p:spPr>
+      </p:sp>
+      <p:sp>
+        <p:nvSpPr>
+          <p:cNvPr id="31748" name="Rectangle 3"/>
+          <p:cNvSpPr>
+            <a:spLocks noGrp="1" noChangeArrowheads="1"/>
+          </p:cNvSpPr>
+          <p:nvPr>
+            <p:ph type="body" idx="1"/>
+          </p:nvPr>
+        </p:nvSpPr>
+        <p:spPr>
+          <a:noFill/>
+          <a:extLst>
+            <a:ext uri="{AF507438-7753-43e0-B8FC-AC1667EBCBE1}">
+              <a14:hiddenEffects xmlns:a14="http://schemas.microsoft.com/office/drawing/2010/main" xmlns="">
+                <a:effectLst>
+                  <a:outerShdw blurRad="63500" dist="38099" dir="2700000" algn="ctr" rotWithShape="0">
+                    <a:schemeClr val="bg2">
+                      <a:alpha val="74997"/>
+                    </a:schemeClr>
+                  </a:outerShdw>
+                </a:effectLst>
+              </a14:hiddenEffects>
+            </a:ext>
+          </a:extLst>
+        </p:spPr>
+        <p:txBody>
+          <a:bodyPr/>
+          <a:lstStyle/>
+          <a:p>
+            <a:pPr eaLnBrk="1" hangingPunct="1"/>
+            <a:r>
+              <a:rPr lang="en-US" altLang="zh-TW" baseline="0" dirty="0">
                 <a:latin typeface="Arial" pitchFamily="34" charset="0"/>
                 <a:ea typeface="PMingLiU" pitchFamily="18" charset="-120"/>
               </a:rPr>
@@ -1664,7 +2009,7 @@
           <a:noFill/>
           <a:extLst>
             <a:ext uri="{AF507438-7753-43e0-B8FC-AC1667EBCBE1}">
-              <a14:hiddenEffects xmlns="" xmlns:a14="http://schemas.microsoft.com/office/drawing/2010/main">
+              <a14:hiddenEffects xmlns:a14="http://schemas.microsoft.com/office/drawing/2010/main" xmlns="">
                 <a:effectLst>
                   <a:outerShdw blurRad="63500" dist="38099" dir="2700000" algn="ctr" rotWithShape="0">
                     <a:schemeClr val="bg2">
@@ -1828,7 +2173,7 @@
           <a:noFill/>
           <a:extLst>
             <a:ext uri="{AF507438-7753-43e0-B8FC-AC1667EBCBE1}">
-              <a14:hiddenEffects xmlns="" xmlns:a14="http://schemas.microsoft.com/office/drawing/2010/main">
+              <a14:hiddenEffects xmlns:a14="http://schemas.microsoft.com/office/drawing/2010/main" xmlns="">
                 <a:effectLst>
                   <a:outerShdw blurRad="63500" dist="38099" dir="2700000" algn="ctr" rotWithShape="0">
                     <a:schemeClr val="bg2">
@@ -1846,20 +2191,20 @@
           <a:p>
             <a:pPr eaLnBrk="1" hangingPunct="1"/>
             <a:r>
-              <a:rPr lang="en-US" altLang="zh-CN" noProof="0" dirty="0" smtClean="0">
+              <a:rPr lang="en-US" altLang="zh-CN" noProof="0" dirty="0">
                 <a:latin typeface="Arial" pitchFamily="34" charset="0"/>
                 <a:ea typeface="PMingLiU" pitchFamily="18" charset="-120"/>
               </a:rPr>
               <a:t>The motivation of this</a:t>
             </a:r>
             <a:r>
-              <a:rPr lang="en-US" altLang="zh-CN" baseline="0" noProof="0" dirty="0" smtClean="0">
+              <a:rPr lang="en-US" altLang="zh-CN" baseline="0" noProof="0" dirty="0">
                 <a:latin typeface="Arial" pitchFamily="34" charset="0"/>
                 <a:ea typeface="PMingLiU" pitchFamily="18" charset="-120"/>
               </a:rPr>
               <a:t> project</a:t>
             </a:r>
-            <a:endParaRPr lang="zh-CN" altLang="en-US" noProof="0" dirty="0" smtClean="0">
+            <a:endParaRPr lang="zh-CN" altLang="en-US" noProof="0" dirty="0">
               <a:latin typeface="Arial" pitchFamily="34" charset="0"/>
               <a:ea typeface="PMingLiU" pitchFamily="18" charset="-120"/>
             </a:endParaRPr>
@@ -1923,7 +2268,7 @@
           <a:bodyPr/>
           <a:lstStyle/>
           <a:p>
-            <a:endParaRPr lang="en-US" baseline="0" dirty="0" smtClean="0"/>
+            <a:endParaRPr lang="en-US" baseline="0" dirty="0"/>
           </a:p>
         </p:txBody>
       </p:sp>
@@ -2008,7 +2353,7 @@
           <a:bodyPr/>
           <a:lstStyle/>
           <a:p>
-            <a:endParaRPr lang="en-US" baseline="0" dirty="0" smtClean="0"/>
+            <a:endParaRPr lang="en-US" baseline="0" dirty="0"/>
           </a:p>
         </p:txBody>
       </p:sp>
@@ -2080,7 +2425,7 @@
           <a:noFill/>
           <a:extLst>
             <a:ext uri="{AF507438-7753-43e0-B8FC-AC1667EBCBE1}">
-              <a14:hiddenEffects xmlns="" xmlns:a14="http://schemas.microsoft.com/office/drawing/2010/main">
+              <a14:hiddenEffects xmlns:a14="http://schemas.microsoft.com/office/drawing/2010/main" xmlns="">
                 <a:effectLst>
                   <a:outerShdw blurRad="63500" dist="38099" dir="2700000" algn="ctr" rotWithShape="0">
                     <a:schemeClr val="bg2">
@@ -2244,7 +2589,7 @@
           <a:noFill/>
           <a:extLst>
             <a:ext uri="{AF507438-7753-43e0-B8FC-AC1667EBCBE1}">
-              <a14:hiddenEffects xmlns="" xmlns:a14="http://schemas.microsoft.com/office/drawing/2010/main">
+              <a14:hiddenEffects xmlns:a14="http://schemas.microsoft.com/office/drawing/2010/main" xmlns="">
                 <a:effectLst>
                   <a:outerShdw blurRad="63500" dist="38099" dir="2700000" algn="ctr" rotWithShape="0">
                     <a:schemeClr val="bg2">
@@ -2262,13 +2607,13 @@
           <a:p>
             <a:pPr eaLnBrk="1" hangingPunct="1"/>
             <a:r>
-              <a:rPr lang="en-US" altLang="zh-TW" dirty="0" smtClean="0">
+              <a:rPr lang="en-US" altLang="zh-TW" dirty="0">
                 <a:latin typeface="Arial" pitchFamily="34" charset="0"/>
                 <a:ea typeface="PMingLiU" pitchFamily="18" charset="-120"/>
               </a:rPr>
               <a:t>Here, we make the claim of this project.</a:t>
             </a:r>
-            <a:endParaRPr lang="zh-TW" altLang="en-US" dirty="0" smtClean="0">
+            <a:endParaRPr lang="zh-TW" altLang="en-US" dirty="0">
               <a:latin typeface="Arial" pitchFamily="34" charset="0"/>
               <a:ea typeface="PMingLiU" pitchFamily="18" charset="-120"/>
             </a:endParaRPr>
@@ -2319,7 +2664,7 @@
           <a:noFill/>
           <a:extLst>
             <a:ext uri="{AF507438-7753-43e0-B8FC-AC1667EBCBE1}">
-              <a14:hiddenEffects xmlns="" xmlns:a14="http://schemas.microsoft.com/office/drawing/2010/main">
+              <a14:hiddenEffects xmlns:a14="http://schemas.microsoft.com/office/drawing/2010/main" xmlns="">
                 <a:effectLst>
                   <a:outerShdw blurRad="63500" dist="38099" dir="2700000" algn="ctr" rotWithShape="0">
                     <a:schemeClr val="bg2">
@@ -2483,7 +2828,7 @@
           <a:noFill/>
           <a:extLst>
             <a:ext uri="{AF507438-7753-43e0-B8FC-AC1667EBCBE1}">
-              <a14:hiddenEffects xmlns="" xmlns:a14="http://schemas.microsoft.com/office/drawing/2010/main">
+              <a14:hiddenEffects xmlns:a14="http://schemas.microsoft.com/office/drawing/2010/main" xmlns="">
                 <a:effectLst>
                   <a:outerShdw blurRad="63500" dist="38099" dir="2700000" algn="ctr" rotWithShape="0">
                     <a:schemeClr val="bg2">
@@ -2501,13 +2846,13 @@
           <a:p>
             <a:pPr eaLnBrk="1" hangingPunct="1"/>
             <a:r>
-              <a:rPr lang="en-US" altLang="zh-TW" dirty="0" smtClean="0">
+              <a:rPr lang="en-US" altLang="zh-TW" dirty="0">
                 <a:latin typeface="Arial" pitchFamily="34" charset="0"/>
                 <a:ea typeface="PMingLiU" pitchFamily="18" charset="-120"/>
               </a:rPr>
               <a:t>Here, we make the claim of this project.</a:t>
             </a:r>
-            <a:endParaRPr lang="zh-TW" altLang="en-US" dirty="0" smtClean="0">
+            <a:endParaRPr lang="zh-TW" altLang="en-US" dirty="0">
               <a:latin typeface="Arial" pitchFamily="34" charset="0"/>
               <a:ea typeface="PMingLiU" pitchFamily="18" charset="-120"/>
             </a:endParaRPr>
@@ -2575,11 +2920,11 @@
               <a:defRPr/>
             </a:pPr>
             <a:r>
-              <a:rPr lang="en-US" dirty="0" smtClean="0"/>
+              <a:rPr lang="en-US" dirty="0"/>
               <a:t>Here</a:t>
             </a:r>
             <a:r>
-              <a:rPr lang="en-US" baseline="0" dirty="0" smtClean="0"/>
+              <a:rPr lang="en-US" baseline="0" dirty="0"/>
               <a:t> is our proposed solution. </a:t>
             </a:r>
             <a:endParaRPr lang="en-US" dirty="0"/>
@@ -2654,7 +2999,7 @@
           <a:noFill/>
           <a:extLst>
             <a:ext uri="{AF507438-7753-43e0-B8FC-AC1667EBCBE1}">
-              <a14:hiddenEffects xmlns="" xmlns:a14="http://schemas.microsoft.com/office/drawing/2010/main">
+              <a14:hiddenEffects xmlns:a14="http://schemas.microsoft.com/office/drawing/2010/main" xmlns="">
                 <a:effectLst>
                   <a:outerShdw blurRad="63500" dist="38099" dir="2700000" algn="ctr" rotWithShape="0">
                     <a:schemeClr val="bg2">
@@ -2818,7 +3163,7 @@
           <a:noFill/>
           <a:extLst>
             <a:ext uri="{AF507438-7753-43e0-B8FC-AC1667EBCBE1}">
-              <a14:hiddenEffects xmlns="" xmlns:a14="http://schemas.microsoft.com/office/drawing/2010/main">
+              <a14:hiddenEffects xmlns:a14="http://schemas.microsoft.com/office/drawing/2010/main" xmlns="">
                 <a:effectLst>
                   <a:outerShdw blurRad="63500" dist="38099" dir="2700000" algn="ctr" rotWithShape="0">
                     <a:schemeClr val="bg2">
@@ -2836,7 +3181,7 @@
           <a:p>
             <a:pPr eaLnBrk="1" hangingPunct="1"/>
             <a:r>
-              <a:rPr lang="en-US" altLang="zh-TW" baseline="0" dirty="0" smtClean="0">
+              <a:rPr lang="en-US" altLang="zh-TW" baseline="0" dirty="0">
                 <a:latin typeface="Arial" pitchFamily="34" charset="0"/>
                 <a:ea typeface="PMingLiU" pitchFamily="18" charset="-120"/>
               </a:rPr>
@@ -2863,7 +3208,13 @@
   <p:cSld>
     <p:spTree>
       <p:nvGrpSpPr>
-        <p:cNvPr id="1" name=""/>
+        <p:cNvPr id="1" name="">
+          <a:extLst>
+            <a:ext uri="{FF2B5EF4-FFF2-40B4-BE49-F238E27FC236}">
+              <a16:creationId xmlns:a16="http://schemas.microsoft.com/office/drawing/2014/main" id="{73F14534-D7C9-CC8D-EE09-133C2F45CB53}"/>
+            </a:ext>
+          </a:extLst>
+        </p:cNvPr>
         <p:cNvGrpSpPr/>
         <p:nvPr/>
       </p:nvGrpSpPr>
@@ -2877,213 +3228,80 @@
       </p:grpSpPr>
       <p:sp>
         <p:nvSpPr>
-          <p:cNvPr id="31746" name="Rectangle 7"/>
-          <p:cNvSpPr>
-            <a:spLocks noGrp="1" noChangeArrowheads="1"/>
+          <p:cNvPr id="2" name="Slide Image Placeholder 1">
+            <a:extLst>
+              <a:ext uri="{FF2B5EF4-FFF2-40B4-BE49-F238E27FC236}">
+                <a16:creationId xmlns:a16="http://schemas.microsoft.com/office/drawing/2014/main" id="{6A60EAD3-59E5-19CD-F3D2-B6E6062AE10C}"/>
+              </a:ext>
+            </a:extLst>
+          </p:cNvPr>
+          <p:cNvSpPr>
+            <a:spLocks noGrp="1" noRot="1" noChangeAspect="1"/>
+          </p:cNvSpPr>
+          <p:nvPr>
+            <p:ph type="sldImg"/>
+          </p:nvPr>
+        </p:nvSpPr>
+        <p:spPr/>
+      </p:sp>
+      <p:sp>
+        <p:nvSpPr>
+          <p:cNvPr id="3" name="Notes Placeholder 2">
+            <a:extLst>
+              <a:ext uri="{FF2B5EF4-FFF2-40B4-BE49-F238E27FC236}">
+                <a16:creationId xmlns:a16="http://schemas.microsoft.com/office/drawing/2014/main" id="{AF5CACD6-F463-CAA1-C2A5-83763E6C02CE}"/>
+              </a:ext>
+            </a:extLst>
+          </p:cNvPr>
+          <p:cNvSpPr>
+            <a:spLocks noGrp="1"/>
+          </p:cNvSpPr>
+          <p:nvPr>
+            <p:ph type="body" idx="1"/>
+          </p:nvPr>
+        </p:nvSpPr>
+        <p:spPr/>
+        <p:txBody>
+          <a:bodyPr/>
+          <a:lstStyle/>
+          <a:p>
+            <a:endParaRPr lang="en-US" dirty="0"/>
+          </a:p>
+        </p:txBody>
+      </p:sp>
+      <p:sp>
+        <p:nvSpPr>
+          <p:cNvPr id="4" name="Slide Number Placeholder 3">
+            <a:extLst>
+              <a:ext uri="{FF2B5EF4-FFF2-40B4-BE49-F238E27FC236}">
+                <a16:creationId xmlns:a16="http://schemas.microsoft.com/office/drawing/2014/main" id="{C7A88D64-9095-FE7F-A2C8-021AFB5FED69}"/>
+              </a:ext>
+            </a:extLst>
+          </p:cNvPr>
+          <p:cNvSpPr>
+            <a:spLocks noGrp="1"/>
           </p:cNvSpPr>
           <p:nvPr>
             <p:ph type="sldNum" sz="quarter" idx="5"/>
           </p:nvPr>
         </p:nvSpPr>
-        <p:spPr>
-          <a:noFill/>
-          <a:extLst>
-            <a:ext uri="{AF507438-7753-43e0-B8FC-AC1667EBCBE1}">
-              <a14:hiddenEffects xmlns="" xmlns:a14="http://schemas.microsoft.com/office/drawing/2010/main">
-                <a:effectLst>
-                  <a:outerShdw blurRad="63500" dist="38099" dir="2700000" algn="ctr" rotWithShape="0">
-                    <a:schemeClr val="bg2">
-                      <a:alpha val="74998"/>
-                    </a:schemeClr>
-                  </a:outerShdw>
-                </a:effectLst>
-              </a14:hiddenEffects>
-            </a:ext>
-          </a:extLst>
-        </p:spPr>
+        <p:spPr/>
         <p:txBody>
           <a:bodyPr/>
-          <a:lstStyle>
-            <a:lvl1pPr eaLnBrk="0" hangingPunct="0">
-              <a:defRPr sz="2400">
-                <a:solidFill>
-                  <a:schemeClr val="tx1"/>
-                </a:solidFill>
-                <a:latin typeface="Arial" pitchFamily="34" charset="0"/>
-                <a:ea typeface="ＭＳ Ｐゴシック" pitchFamily="34" charset="-128"/>
-              </a:defRPr>
-            </a:lvl1pPr>
-            <a:lvl2pPr marL="757066" indent="-291179" eaLnBrk="0" hangingPunct="0">
-              <a:defRPr sz="2400">
-                <a:solidFill>
-                  <a:schemeClr val="tx1"/>
-                </a:solidFill>
-                <a:latin typeface="Arial" pitchFamily="34" charset="0"/>
-                <a:ea typeface="ＭＳ Ｐゴシック" pitchFamily="34" charset="-128"/>
-              </a:defRPr>
-            </a:lvl2pPr>
-            <a:lvl3pPr marL="1164717" indent="-232943" eaLnBrk="0" hangingPunct="0">
-              <a:defRPr sz="2400">
-                <a:solidFill>
-                  <a:schemeClr val="tx1"/>
-                </a:solidFill>
-                <a:latin typeface="Arial" pitchFamily="34" charset="0"/>
-                <a:ea typeface="ＭＳ Ｐゴシック" pitchFamily="34" charset="-128"/>
-              </a:defRPr>
-            </a:lvl3pPr>
-            <a:lvl4pPr marL="1630604" indent="-232943" eaLnBrk="0" hangingPunct="0">
-              <a:defRPr sz="2400">
-                <a:solidFill>
-                  <a:schemeClr val="tx1"/>
-                </a:solidFill>
-                <a:latin typeface="Arial" pitchFamily="34" charset="0"/>
-                <a:ea typeface="ＭＳ Ｐゴシック" pitchFamily="34" charset="-128"/>
-              </a:defRPr>
-            </a:lvl4pPr>
-            <a:lvl5pPr marL="2096491" indent="-232943" eaLnBrk="0" hangingPunct="0">
-              <a:defRPr sz="2400">
-                <a:solidFill>
-                  <a:schemeClr val="tx1"/>
-                </a:solidFill>
-                <a:latin typeface="Arial" pitchFamily="34" charset="0"/>
-                <a:ea typeface="ＭＳ Ｐゴシック" pitchFamily="34" charset="-128"/>
-              </a:defRPr>
-            </a:lvl5pPr>
-            <a:lvl6pPr marL="2562377" indent="-232943" eaLnBrk="0" fontAlgn="base" hangingPunct="0">
-              <a:spcBef>
-                <a:spcPct val="0"/>
-              </a:spcBef>
-              <a:spcAft>
-                <a:spcPct val="0"/>
-              </a:spcAft>
-              <a:defRPr sz="2400">
-                <a:solidFill>
-                  <a:schemeClr val="tx1"/>
-                </a:solidFill>
-                <a:latin typeface="Arial" pitchFamily="34" charset="0"/>
-                <a:ea typeface="ＭＳ Ｐゴシック" pitchFamily="34" charset="-128"/>
-              </a:defRPr>
-            </a:lvl6pPr>
-            <a:lvl7pPr marL="3028264" indent="-232943" eaLnBrk="0" fontAlgn="base" hangingPunct="0">
-              <a:spcBef>
-                <a:spcPct val="0"/>
-              </a:spcBef>
-              <a:spcAft>
-                <a:spcPct val="0"/>
-              </a:spcAft>
-              <a:defRPr sz="2400">
-                <a:solidFill>
-                  <a:schemeClr val="tx1"/>
-                </a:solidFill>
-                <a:latin typeface="Arial" pitchFamily="34" charset="0"/>
-                <a:ea typeface="ＭＳ Ｐゴシック" pitchFamily="34" charset="-128"/>
-              </a:defRPr>
-            </a:lvl7pPr>
-            <a:lvl8pPr marL="3494151" indent="-232943" eaLnBrk="0" fontAlgn="base" hangingPunct="0">
-              <a:spcBef>
-                <a:spcPct val="0"/>
-              </a:spcBef>
-              <a:spcAft>
-                <a:spcPct val="0"/>
-              </a:spcAft>
-              <a:defRPr sz="2400">
-                <a:solidFill>
-                  <a:schemeClr val="tx1"/>
-                </a:solidFill>
-                <a:latin typeface="Arial" pitchFamily="34" charset="0"/>
-                <a:ea typeface="ＭＳ Ｐゴシック" pitchFamily="34" charset="-128"/>
-              </a:defRPr>
-            </a:lvl8pPr>
-            <a:lvl9pPr marL="3960038" indent="-232943" eaLnBrk="0" fontAlgn="base" hangingPunct="0">
-              <a:spcBef>
-                <a:spcPct val="0"/>
-              </a:spcBef>
-              <a:spcAft>
-                <a:spcPct val="0"/>
-              </a:spcAft>
-              <a:defRPr sz="2400">
-                <a:solidFill>
-                  <a:schemeClr val="tx1"/>
-                </a:solidFill>
-                <a:latin typeface="Arial" pitchFamily="34" charset="0"/>
-                <a:ea typeface="ＭＳ Ｐゴシック" pitchFamily="34" charset="-128"/>
-              </a:defRPr>
-            </a:lvl9pPr>
-          </a:lstStyle>
-          <a:p>
-            <a:pPr eaLnBrk="1" hangingPunct="1"/>
-            <a:fld id="{61AE4675-46EC-4EDF-89E2-3C4CC1C64A21}" type="slidenum">
-              <a:rPr lang="zh-TW" altLang="en-US" sz="1200">
-                <a:ea typeface="PMingLiU" pitchFamily="18" charset="-120"/>
-              </a:rPr>
-              <a:pPr eaLnBrk="1" hangingPunct="1"/>
+          <a:lstStyle/>
+          <a:p>
+            <a:fld id="{A7454B5F-9003-4AF7-8090-8A6CBDFE1AE6}" type="slidenum">
+              <a:rPr lang="en-US" smtClean="0"/>
               <a:t>9</a:t>
             </a:fld>
-            <a:endParaRPr lang="en-US" altLang="zh-TW" sz="1200">
-              <a:ea typeface="PMingLiU" pitchFamily="18" charset="-120"/>
-            </a:endParaRPr>
-          </a:p>
-        </p:txBody>
-      </p:sp>
-      <p:sp>
-        <p:nvSpPr>
-          <p:cNvPr id="31747" name="Rectangle 2"/>
-          <p:cNvSpPr>
-            <a:spLocks noGrp="1" noRot="1" noChangeAspect="1" noChangeArrowheads="1" noTextEdit="1"/>
-          </p:cNvSpPr>
-          <p:nvPr>
-            <p:ph type="sldImg"/>
-          </p:nvPr>
-        </p:nvSpPr>
-        <p:spPr>
-          <a:ln/>
-        </p:spPr>
-      </p:sp>
-      <p:sp>
-        <p:nvSpPr>
-          <p:cNvPr id="31748" name="Rectangle 3"/>
-          <p:cNvSpPr>
-            <a:spLocks noGrp="1" noChangeArrowheads="1"/>
-          </p:cNvSpPr>
-          <p:nvPr>
-            <p:ph type="body" idx="1"/>
-          </p:nvPr>
-        </p:nvSpPr>
-        <p:spPr>
-          <a:noFill/>
-          <a:extLst>
-            <a:ext uri="{AF507438-7753-43e0-B8FC-AC1667EBCBE1}">
-              <a14:hiddenEffects xmlns="" xmlns:a14="http://schemas.microsoft.com/office/drawing/2010/main">
-                <a:effectLst>
-                  <a:outerShdw blurRad="63500" dist="38099" dir="2700000" algn="ctr" rotWithShape="0">
-                    <a:schemeClr val="bg2">
-                      <a:alpha val="74997"/>
-                    </a:schemeClr>
-                  </a:outerShdw>
-                </a:effectLst>
-              </a14:hiddenEffects>
-            </a:ext>
-          </a:extLst>
-        </p:spPr>
-        <p:txBody>
-          <a:bodyPr/>
-          <a:lstStyle/>
-          <a:p>
-            <a:pPr eaLnBrk="1" hangingPunct="1"/>
-            <a:r>
-              <a:rPr lang="en-US" altLang="zh-TW" baseline="0" dirty="0" smtClean="0">
-                <a:latin typeface="Arial" pitchFamily="34" charset="0"/>
-                <a:ea typeface="PMingLiU" pitchFamily="18" charset="-120"/>
-              </a:rPr>
-              <a:t>In the rest of this presentation, I’m going to talk about following contents:</a:t>
-            </a:r>
+            <a:endParaRPr lang="en-US"/>
           </a:p>
         </p:txBody>
       </p:sp>
     </p:spTree>
     <p:extLst>
       <p:ext uri="{BB962C8B-B14F-4D97-AF65-F5344CB8AC3E}">
-        <p14:creationId xmlns:p14="http://schemas.microsoft.com/office/powerpoint/2010/main" val="1947272845"/>
+        <p14:creationId xmlns:p14="http://schemas.microsoft.com/office/powerpoint/2010/main" val="457642434"/>
       </p:ext>
     </p:extLst>
   </p:cSld>
@@ -3131,10 +3349,9 @@
           <a:lstStyle/>
           <a:p>
             <a:r>
-              <a:rPr lang="en-US" smtClean="0"/>
+              <a:rPr lang="en-US"/>
               <a:t>Click to edit Master title style</a:t>
             </a:r>
-            <a:endParaRPr lang="en-US"/>
           </a:p>
         </p:txBody>
       </p:sp>
@@ -3196,10 +3413,9 @@
           </a:lstStyle>
           <a:p>
             <a:r>
-              <a:rPr lang="en-US" smtClean="0"/>
+              <a:rPr lang="en-US"/>
               <a:t>Click to edit Master subtitle style</a:t>
             </a:r>
-            <a:endParaRPr lang="en-US"/>
           </a:p>
         </p:txBody>
       </p:sp>
@@ -3329,10 +3545,9 @@
           <a:lstStyle/>
           <a:p>
             <a:r>
-              <a:rPr lang="en-US" smtClean="0"/>
+              <a:rPr lang="en-US"/>
               <a:t>Click to edit Master title style</a:t>
             </a:r>
-            <a:endParaRPr lang="en-US"/>
           </a:p>
         </p:txBody>
       </p:sp>
@@ -3353,38 +3568,37 @@
           <a:p>
             <a:pPr lvl="0"/>
             <a:r>
-              <a:rPr lang="en-US" smtClean="0"/>
+              <a:rPr lang="en-US"/>
               <a:t>Click to edit Master text styles</a:t>
             </a:r>
           </a:p>
           <a:p>
             <a:pPr lvl="1"/>
             <a:r>
-              <a:rPr lang="en-US" smtClean="0"/>
+              <a:rPr lang="en-US"/>
               <a:t>Second level</a:t>
             </a:r>
           </a:p>
           <a:p>
             <a:pPr lvl="2"/>
             <a:r>
-              <a:rPr lang="en-US" smtClean="0"/>
+              <a:rPr lang="en-US"/>
               <a:t>Third level</a:t>
             </a:r>
           </a:p>
           <a:p>
             <a:pPr lvl="3"/>
             <a:r>
-              <a:rPr lang="en-US" smtClean="0"/>
+              <a:rPr lang="en-US"/>
               <a:t>Fourth level</a:t>
             </a:r>
           </a:p>
           <a:p>
             <a:pPr lvl="4"/>
             <a:r>
-              <a:rPr lang="en-US" smtClean="0"/>
+              <a:rPr lang="en-US"/>
               <a:t>Fifth level</a:t>
             </a:r>
-            <a:endParaRPr lang="en-US"/>
           </a:p>
         </p:txBody>
       </p:sp>
@@ -3519,10 +3733,9 @@
           <a:lstStyle/>
           <a:p>
             <a:r>
-              <a:rPr lang="en-US" smtClean="0"/>
+              <a:rPr lang="en-US"/>
               <a:t>Click to edit Master title style</a:t>
             </a:r>
-            <a:endParaRPr lang="en-US"/>
           </a:p>
         </p:txBody>
       </p:sp>
@@ -3548,38 +3761,37 @@
           <a:p>
             <a:pPr lvl="0"/>
             <a:r>
-              <a:rPr lang="en-US" smtClean="0"/>
+              <a:rPr lang="en-US"/>
               <a:t>Click to edit Master text styles</a:t>
             </a:r>
           </a:p>
           <a:p>
             <a:pPr lvl="1"/>
             <a:r>
-              <a:rPr lang="en-US" smtClean="0"/>
+              <a:rPr lang="en-US"/>
               <a:t>Second level</a:t>
             </a:r>
           </a:p>
           <a:p>
             <a:pPr lvl="2"/>
             <a:r>
-              <a:rPr lang="en-US" smtClean="0"/>
+              <a:rPr lang="en-US"/>
               <a:t>Third level</a:t>
             </a:r>
           </a:p>
           <a:p>
             <a:pPr lvl="3"/>
             <a:r>
-              <a:rPr lang="en-US" smtClean="0"/>
+              <a:rPr lang="en-US"/>
               <a:t>Fourth level</a:t>
             </a:r>
           </a:p>
           <a:p>
             <a:pPr lvl="4"/>
             <a:r>
-              <a:rPr lang="en-US" smtClean="0"/>
+              <a:rPr lang="en-US"/>
               <a:t>Fifth level</a:t>
             </a:r>
-            <a:endParaRPr lang="en-US"/>
           </a:p>
         </p:txBody>
       </p:sp>
@@ -3715,38 +3927,37 @@
           <a:p>
             <a:pPr lvl="0"/>
             <a:r>
-              <a:rPr lang="en-US" smtClean="0"/>
+              <a:rPr lang="en-US"/>
               <a:t>Click to edit Master text styles</a:t>
             </a:r>
           </a:p>
           <a:p>
             <a:pPr lvl="1"/>
             <a:r>
-              <a:rPr lang="en-US" smtClean="0"/>
+              <a:rPr lang="en-US"/>
               <a:t>Second level</a:t>
             </a:r>
           </a:p>
           <a:p>
             <a:pPr lvl="2"/>
             <a:r>
-              <a:rPr lang="en-US" smtClean="0"/>
+              <a:rPr lang="en-US"/>
               <a:t>Third level</a:t>
             </a:r>
           </a:p>
           <a:p>
             <a:pPr lvl="3"/>
             <a:r>
-              <a:rPr lang="en-US" smtClean="0"/>
+              <a:rPr lang="en-US"/>
               <a:t>Fourth level</a:t>
             </a:r>
           </a:p>
           <a:p>
             <a:pPr lvl="4"/>
             <a:r>
-              <a:rPr lang="en-US" smtClean="0"/>
+              <a:rPr lang="en-US"/>
               <a:t>Fifth level</a:t>
             </a:r>
-            <a:endParaRPr lang="en-US"/>
           </a:p>
         </p:txBody>
       </p:sp>
@@ -3876,10 +4087,9 @@
           <a:lstStyle/>
           <a:p>
             <a:r>
-              <a:rPr lang="en-US" smtClean="0"/>
+              <a:rPr lang="en-US"/>
               <a:t>Click to edit Master title style</a:t>
             </a:r>
-            <a:endParaRPr lang="en-US"/>
           </a:p>
         </p:txBody>
       </p:sp>
@@ -3900,38 +4110,37 @@
           <a:p>
             <a:pPr lvl="0"/>
             <a:r>
-              <a:rPr lang="en-US" smtClean="0"/>
+              <a:rPr lang="en-US"/>
               <a:t>Click to edit Master text styles</a:t>
             </a:r>
           </a:p>
           <a:p>
             <a:pPr lvl="1"/>
             <a:r>
-              <a:rPr lang="en-US" smtClean="0"/>
+              <a:rPr lang="en-US"/>
               <a:t>Second level</a:t>
             </a:r>
           </a:p>
           <a:p>
             <a:pPr lvl="2"/>
             <a:r>
-              <a:rPr lang="en-US" smtClean="0"/>
+              <a:rPr lang="en-US"/>
               <a:t>Third level</a:t>
             </a:r>
           </a:p>
           <a:p>
             <a:pPr lvl="3"/>
             <a:r>
-              <a:rPr lang="en-US" smtClean="0"/>
+              <a:rPr lang="en-US"/>
               <a:t>Fourth level</a:t>
             </a:r>
           </a:p>
           <a:p>
             <a:pPr lvl="4"/>
             <a:r>
-              <a:rPr lang="en-US" smtClean="0"/>
+              <a:rPr lang="en-US"/>
               <a:t>Fifth level</a:t>
             </a:r>
-            <a:endParaRPr lang="en-US"/>
           </a:p>
         </p:txBody>
       </p:sp>
@@ -4070,10 +4279,9 @@
           </a:lstStyle>
           <a:p>
             <a:r>
-              <a:rPr lang="en-US" smtClean="0"/>
+              <a:rPr lang="en-US"/>
               <a:t>Click to edit Master title style</a:t>
             </a:r>
-            <a:endParaRPr lang="en-US"/>
           </a:p>
         </p:txBody>
       </p:sp>
@@ -4136,7 +4344,7 @@
           <a:p>
             <a:pPr lvl="0"/>
             <a:r>
-              <a:rPr lang="en-US" smtClean="0"/>
+              <a:rPr lang="en-US"/>
               <a:t>Click to edit Master text styles</a:t>
             </a:r>
           </a:p>
@@ -4268,10 +4476,9 @@
           <a:lstStyle/>
           <a:p>
             <a:r>
-              <a:rPr lang="en-US" smtClean="0"/>
+              <a:rPr lang="en-US"/>
               <a:t>Click to edit Master title style</a:t>
             </a:r>
-            <a:endParaRPr lang="en-US"/>
           </a:p>
         </p:txBody>
       </p:sp>
@@ -4325,38 +4532,37 @@
           <a:p>
             <a:pPr lvl="0"/>
             <a:r>
-              <a:rPr lang="en-US" smtClean="0"/>
+              <a:rPr lang="en-US"/>
               <a:t>Click to edit Master text styles</a:t>
             </a:r>
           </a:p>
           <a:p>
             <a:pPr lvl="1"/>
             <a:r>
-              <a:rPr lang="en-US" smtClean="0"/>
+              <a:rPr lang="en-US"/>
               <a:t>Second level</a:t>
             </a:r>
           </a:p>
           <a:p>
             <a:pPr lvl="2"/>
             <a:r>
-              <a:rPr lang="en-US" smtClean="0"/>
+              <a:rPr lang="en-US"/>
               <a:t>Third level</a:t>
             </a:r>
           </a:p>
           <a:p>
             <a:pPr lvl="3"/>
             <a:r>
-              <a:rPr lang="en-US" smtClean="0"/>
+              <a:rPr lang="en-US"/>
               <a:t>Fourth level</a:t>
             </a:r>
           </a:p>
           <a:p>
             <a:pPr lvl="4"/>
             <a:r>
-              <a:rPr lang="en-US" smtClean="0"/>
+              <a:rPr lang="en-US"/>
               <a:t>Fifth level</a:t>
             </a:r>
-            <a:endParaRPr lang="en-US"/>
           </a:p>
         </p:txBody>
       </p:sp>
@@ -4410,38 +4616,37 @@
           <a:p>
             <a:pPr lvl="0"/>
             <a:r>
-              <a:rPr lang="en-US" smtClean="0"/>
+              <a:rPr lang="en-US"/>
               <a:t>Click to edit Master text styles</a:t>
             </a:r>
           </a:p>
           <a:p>
             <a:pPr lvl="1"/>
             <a:r>
-              <a:rPr lang="en-US" smtClean="0"/>
+              <a:rPr lang="en-US"/>
               <a:t>Second level</a:t>
             </a:r>
           </a:p>
           <a:p>
             <a:pPr lvl="2"/>
             <a:r>
-              <a:rPr lang="en-US" smtClean="0"/>
+              <a:rPr lang="en-US"/>
               <a:t>Third level</a:t>
             </a:r>
           </a:p>
           <a:p>
             <a:pPr lvl="3"/>
             <a:r>
-              <a:rPr lang="en-US" smtClean="0"/>
+              <a:rPr lang="en-US"/>
               <a:t>Fourth level</a:t>
             </a:r>
           </a:p>
           <a:p>
             <a:pPr lvl="4"/>
             <a:r>
-              <a:rPr lang="en-US" smtClean="0"/>
+              <a:rPr lang="en-US"/>
               <a:t>Fifth level</a:t>
             </a:r>
-            <a:endParaRPr lang="en-US"/>
           </a:p>
         </p:txBody>
       </p:sp>
@@ -4575,10 +4780,9 @@
           </a:lstStyle>
           <a:p>
             <a:r>
-              <a:rPr lang="en-US" smtClean="0"/>
+              <a:rPr lang="en-US"/>
               <a:t>Click to edit Master title style</a:t>
             </a:r>
-            <a:endParaRPr lang="en-US"/>
           </a:p>
         </p:txBody>
       </p:sp>
@@ -4641,7 +4845,7 @@
           <a:p>
             <a:pPr lvl="0"/>
             <a:r>
-              <a:rPr lang="en-US" smtClean="0"/>
+              <a:rPr lang="en-US"/>
               <a:t>Click to edit Master text styles</a:t>
             </a:r>
           </a:p>
@@ -4697,38 +4901,37 @@
           <a:p>
             <a:pPr lvl="0"/>
             <a:r>
-              <a:rPr lang="en-US" smtClean="0"/>
+              <a:rPr lang="en-US"/>
               <a:t>Click to edit Master text styles</a:t>
             </a:r>
           </a:p>
           <a:p>
             <a:pPr lvl="1"/>
             <a:r>
-              <a:rPr lang="en-US" smtClean="0"/>
+              <a:rPr lang="en-US"/>
               <a:t>Second level</a:t>
             </a:r>
           </a:p>
           <a:p>
             <a:pPr lvl="2"/>
             <a:r>
-              <a:rPr lang="en-US" smtClean="0"/>
+              <a:rPr lang="en-US"/>
               <a:t>Third level</a:t>
             </a:r>
           </a:p>
           <a:p>
             <a:pPr lvl="3"/>
             <a:r>
-              <a:rPr lang="en-US" smtClean="0"/>
+              <a:rPr lang="en-US"/>
               <a:t>Fourth level</a:t>
             </a:r>
           </a:p>
           <a:p>
             <a:pPr lvl="4"/>
             <a:r>
-              <a:rPr lang="en-US" smtClean="0"/>
+              <a:rPr lang="en-US"/>
               <a:t>Fifth level</a:t>
             </a:r>
-            <a:endParaRPr lang="en-US"/>
           </a:p>
         </p:txBody>
       </p:sp>
@@ -4791,7 +4994,7 @@
           <a:p>
             <a:pPr lvl="0"/>
             <a:r>
-              <a:rPr lang="en-US" smtClean="0"/>
+              <a:rPr lang="en-US"/>
               <a:t>Click to edit Master text styles</a:t>
             </a:r>
           </a:p>
@@ -4847,38 +5050,37 @@
           <a:p>
             <a:pPr lvl="0"/>
             <a:r>
-              <a:rPr lang="en-US" smtClean="0"/>
+              <a:rPr lang="en-US"/>
               <a:t>Click to edit Master text styles</a:t>
             </a:r>
           </a:p>
           <a:p>
             <a:pPr lvl="1"/>
             <a:r>
-              <a:rPr lang="en-US" smtClean="0"/>
+              <a:rPr lang="en-US"/>
               <a:t>Second level</a:t>
             </a:r>
           </a:p>
           <a:p>
             <a:pPr lvl="2"/>
             <a:r>
-              <a:rPr lang="en-US" smtClean="0"/>
+              <a:rPr lang="en-US"/>
               <a:t>Third level</a:t>
             </a:r>
           </a:p>
           <a:p>
             <a:pPr lvl="3"/>
             <a:r>
-              <a:rPr lang="en-US" smtClean="0"/>
+              <a:rPr lang="en-US"/>
               <a:t>Fourth level</a:t>
             </a:r>
           </a:p>
           <a:p>
             <a:pPr lvl="4"/>
             <a:r>
-              <a:rPr lang="en-US" smtClean="0"/>
+              <a:rPr lang="en-US"/>
               <a:t>Fifth level</a:t>
             </a:r>
-            <a:endParaRPr lang="en-US"/>
           </a:p>
         </p:txBody>
       </p:sp>
@@ -5008,10 +5210,9 @@
           <a:lstStyle/>
           <a:p>
             <a:r>
-              <a:rPr lang="en-US" smtClean="0"/>
+              <a:rPr lang="en-US"/>
               <a:t>Click to edit Master title style</a:t>
             </a:r>
-            <a:endParaRPr lang="en-US"/>
           </a:p>
         </p:txBody>
       </p:sp>
@@ -5260,10 +5461,9 @@
           </a:lstStyle>
           <a:p>
             <a:r>
-              <a:rPr lang="en-US" smtClean="0"/>
+              <a:rPr lang="en-US"/>
               <a:t>Click to edit Master title style</a:t>
             </a:r>
-            <a:endParaRPr lang="en-US"/>
           </a:p>
         </p:txBody>
       </p:sp>
@@ -5317,38 +5517,37 @@
           <a:p>
             <a:pPr lvl="0"/>
             <a:r>
-              <a:rPr lang="en-US" smtClean="0"/>
+              <a:rPr lang="en-US"/>
               <a:t>Click to edit Master text styles</a:t>
             </a:r>
           </a:p>
           <a:p>
             <a:pPr lvl="1"/>
             <a:r>
-              <a:rPr lang="en-US" smtClean="0"/>
+              <a:rPr lang="en-US"/>
               <a:t>Second level</a:t>
             </a:r>
           </a:p>
           <a:p>
             <a:pPr lvl="2"/>
             <a:r>
-              <a:rPr lang="en-US" smtClean="0"/>
+              <a:rPr lang="en-US"/>
               <a:t>Third level</a:t>
             </a:r>
           </a:p>
           <a:p>
             <a:pPr lvl="3"/>
             <a:r>
-              <a:rPr lang="en-US" smtClean="0"/>
+              <a:rPr lang="en-US"/>
               <a:t>Fourth level</a:t>
             </a:r>
           </a:p>
           <a:p>
             <a:pPr lvl="4"/>
             <a:r>
-              <a:rPr lang="en-US" smtClean="0"/>
+              <a:rPr lang="en-US"/>
               <a:t>Fifth level</a:t>
             </a:r>
-            <a:endParaRPr lang="en-US"/>
           </a:p>
         </p:txBody>
       </p:sp>
@@ -5411,7 +5610,7 @@
           <a:p>
             <a:pPr lvl="0"/>
             <a:r>
-              <a:rPr lang="en-US" smtClean="0"/>
+              <a:rPr lang="en-US"/>
               <a:t>Click to edit Master text styles</a:t>
             </a:r>
           </a:p>
@@ -5552,10 +5751,9 @@
           </a:lstStyle>
           <a:p>
             <a:r>
-              <a:rPr lang="en-US" smtClean="0"/>
+              <a:rPr lang="en-US"/>
               <a:t>Click to edit Master title style</a:t>
             </a:r>
-            <a:endParaRPr lang="en-US"/>
           </a:p>
         </p:txBody>
       </p:sp>
@@ -5617,7 +5815,7 @@
           </a:lstStyle>
           <a:p>
             <a:pPr lvl="0"/>
-            <a:endParaRPr lang="en-US" noProof="0" smtClean="0"/>
+            <a:endParaRPr lang="en-US" noProof="0"/>
           </a:p>
         </p:txBody>
       </p:sp>
@@ -5680,7 +5878,7 @@
           <a:p>
             <a:pPr lvl="0"/>
             <a:r>
-              <a:rPr lang="en-US" smtClean="0"/>
+              <a:rPr lang="en-US"/>
               <a:t>Click to edit Master text styles</a:t>
             </a:r>
           </a:p>
@@ -5833,17 +6031,17 @@
           <a:effectLst/>
           <a:extLst>
             <a:ext uri="{FAA26D3D-D897-4be2-8F04-BA451C77F1D7}">
-              <ma14:placeholderFlag xmlns:ma14="http://schemas.microsoft.com/office/mac/drawingml/2011/main" val="1"/>
+              <ma14:placeholderFlag xmlns:ma14="http://schemas.microsoft.com/office/mac/drawingml/2011/main" xmlns="" val="1"/>
             </a:ext>
             <a:ext uri="{909E8E84-426E-40dd-AFC4-6F175D3DCCD1}">
-              <a14:hiddenFill xmlns="" xmlns:a14="http://schemas.microsoft.com/office/drawing/2010/main">
+              <a14:hiddenFill xmlns:a14="http://schemas.microsoft.com/office/drawing/2010/main" xmlns="">
                 <a:solidFill>
                   <a:schemeClr val="accent1"/>
                 </a:solidFill>
               </a14:hiddenFill>
             </a:ext>
             <a:ext uri="{91240B29-F687-4f45-9708-019B960494DF}">
-              <a14:hiddenLine xmlns="" xmlns:a14="http://schemas.microsoft.com/office/drawing/2010/main" w="9525">
+              <a14:hiddenLine xmlns:a14="http://schemas.microsoft.com/office/drawing/2010/main" xmlns="" w="9525">
                 <a:solidFill>
                   <a:schemeClr val="tx1"/>
                 </a:solidFill>
@@ -5853,7 +6051,7 @@
               </a14:hiddenLine>
             </a:ext>
             <a:ext uri="{AF507438-7753-43e0-B8FC-AC1667EBCBE1}">
-              <a14:hiddenEffects xmlns="" xmlns:a14="http://schemas.microsoft.com/office/drawing/2010/main">
+              <a14:hiddenEffects xmlns:a14="http://schemas.microsoft.com/office/drawing/2010/main" xmlns="">
                 <a:effectLst>
                   <a:outerShdw blurRad="63500" dist="38099" dir="2700000" algn="ctr" rotWithShape="0">
                     <a:schemeClr val="bg2">
@@ -5906,17 +6104,17 @@
           <a:effectLst/>
           <a:extLst>
             <a:ext uri="{FAA26D3D-D897-4be2-8F04-BA451C77F1D7}">
-              <ma14:placeholderFlag xmlns:ma14="http://schemas.microsoft.com/office/mac/drawingml/2011/main" val="1"/>
+              <ma14:placeholderFlag xmlns:ma14="http://schemas.microsoft.com/office/mac/drawingml/2011/main" xmlns="" val="1"/>
             </a:ext>
             <a:ext uri="{909E8E84-426E-40dd-AFC4-6F175D3DCCD1}">
-              <a14:hiddenFill xmlns="" xmlns:a14="http://schemas.microsoft.com/office/drawing/2010/main">
+              <a14:hiddenFill xmlns:a14="http://schemas.microsoft.com/office/drawing/2010/main" xmlns="">
                 <a:solidFill>
                   <a:schemeClr val="accent1"/>
                 </a:solidFill>
               </a14:hiddenFill>
             </a:ext>
             <a:ext uri="{91240B29-F687-4f45-9708-019B960494DF}">
-              <a14:hiddenLine xmlns="" xmlns:a14="http://schemas.microsoft.com/office/drawing/2010/main" w="9525">
+              <a14:hiddenLine xmlns:a14="http://schemas.microsoft.com/office/drawing/2010/main" xmlns="" w="9525">
                 <a:solidFill>
                   <a:schemeClr val="tx1"/>
                 </a:solidFill>
@@ -5926,7 +6124,7 @@
               </a14:hiddenLine>
             </a:ext>
             <a:ext uri="{AF507438-7753-43e0-B8FC-AC1667EBCBE1}">
-              <a14:hiddenEffects xmlns="" xmlns:a14="http://schemas.microsoft.com/office/drawing/2010/main">
+              <a14:hiddenEffects xmlns:a14="http://schemas.microsoft.com/office/drawing/2010/main" xmlns="">
                 <a:effectLst>
                   <a:outerShdw blurRad="63500" dist="38099" dir="2700000" algn="ctr" rotWithShape="0">
                     <a:schemeClr val="bg2">
@@ -6007,14 +6205,14 @@
           <a:effectLst/>
           <a:extLst>
             <a:ext uri="{909E8E84-426E-40dd-AFC4-6F175D3DCCD1}">
-              <a14:hiddenFill xmlns="" xmlns:a14="http://schemas.microsoft.com/office/drawing/2010/main">
+              <a14:hiddenFill xmlns:a14="http://schemas.microsoft.com/office/drawing/2010/main" xmlns="">
                 <a:solidFill>
                   <a:schemeClr val="accent1"/>
                 </a:solidFill>
               </a14:hiddenFill>
             </a:ext>
             <a:ext uri="{91240B29-F687-4f45-9708-019B960494DF}">
-              <a14:hiddenLine xmlns="" xmlns:a14="http://schemas.microsoft.com/office/drawing/2010/main" w="9525">
+              <a14:hiddenLine xmlns:a14="http://schemas.microsoft.com/office/drawing/2010/main" xmlns="" w="9525">
                 <a:solidFill>
                   <a:schemeClr val="tx1"/>
                 </a:solidFill>
@@ -6024,7 +6222,7 @@
               </a14:hiddenLine>
             </a:ext>
             <a:ext uri="{AF507438-7753-43e0-B8FC-AC1667EBCBE1}">
-              <a14:hiddenEffects xmlns="" xmlns:a14="http://schemas.microsoft.com/office/drawing/2010/main">
+              <a14:hiddenEffects xmlns:a14="http://schemas.microsoft.com/office/drawing/2010/main" xmlns="">
                 <a:effectLst>
                   <a:outerShdw dist="35921" dir="2700000" algn="ctr" rotWithShape="0">
                     <a:schemeClr val="bg2"/>
@@ -6077,14 +6275,14 @@
           <a:effectLst/>
           <a:extLst>
             <a:ext uri="{909E8E84-426E-40dd-AFC4-6F175D3DCCD1}">
-              <a14:hiddenFill xmlns="" xmlns:a14="http://schemas.microsoft.com/office/drawing/2010/main">
+              <a14:hiddenFill xmlns:a14="http://schemas.microsoft.com/office/drawing/2010/main" xmlns="">
                 <a:solidFill>
                   <a:schemeClr val="accent1"/>
                 </a:solidFill>
               </a14:hiddenFill>
             </a:ext>
             <a:ext uri="{91240B29-F687-4f45-9708-019B960494DF}">
-              <a14:hiddenLine xmlns="" xmlns:a14="http://schemas.microsoft.com/office/drawing/2010/main" w="9525">
+              <a14:hiddenLine xmlns:a14="http://schemas.microsoft.com/office/drawing/2010/main" xmlns="" w="9525">
                 <a:solidFill>
                   <a:schemeClr val="tx1"/>
                 </a:solidFill>
@@ -6094,7 +6292,7 @@
               </a14:hiddenLine>
             </a:ext>
             <a:ext uri="{AF507438-7753-43e0-B8FC-AC1667EBCBE1}">
-              <a14:hiddenEffects xmlns="" xmlns:a14="http://schemas.microsoft.com/office/drawing/2010/main">
+              <a14:hiddenEffects xmlns:a14="http://schemas.microsoft.com/office/drawing/2010/main" xmlns="">
                 <a:effectLst>
                   <a:outerShdw dist="35921" dir="2700000" algn="ctr" rotWithShape="0">
                     <a:schemeClr val="bg2"/>
@@ -6147,14 +6345,14 @@
           <a:effectLst/>
           <a:extLst>
             <a:ext uri="{909E8E84-426E-40dd-AFC4-6F175D3DCCD1}">
-              <a14:hiddenFill xmlns="" xmlns:a14="http://schemas.microsoft.com/office/drawing/2010/main">
+              <a14:hiddenFill xmlns:a14="http://schemas.microsoft.com/office/drawing/2010/main" xmlns="">
                 <a:solidFill>
                   <a:schemeClr val="accent1"/>
                 </a:solidFill>
               </a14:hiddenFill>
             </a:ext>
             <a:ext uri="{91240B29-F687-4f45-9708-019B960494DF}">
-              <a14:hiddenLine xmlns="" xmlns:a14="http://schemas.microsoft.com/office/drawing/2010/main" w="9525">
+              <a14:hiddenLine xmlns:a14="http://schemas.microsoft.com/office/drawing/2010/main" xmlns="" w="9525">
                 <a:solidFill>
                   <a:schemeClr val="tx1"/>
                 </a:solidFill>
@@ -6164,7 +6362,7 @@
               </a14:hiddenLine>
             </a:ext>
             <a:ext uri="{AF507438-7753-43e0-B8FC-AC1667EBCBE1}">
-              <a14:hiddenEffects xmlns="" xmlns:a14="http://schemas.microsoft.com/office/drawing/2010/main">
+              <a14:hiddenEffects xmlns:a14="http://schemas.microsoft.com/office/drawing/2010/main" xmlns="">
                 <a:effectLst>
                   <a:outerShdw dist="35921" dir="2700000" algn="ctr" rotWithShape="0">
                     <a:schemeClr val="bg2"/>
@@ -6644,14 +6842,14 @@
           <a:effectLst/>
           <a:extLst>
             <a:ext uri="{909E8E84-426E-40dd-AFC4-6F175D3DCCD1}">
-              <a14:hiddenFill xmlns="" xmlns:a14="http://schemas.microsoft.com/office/drawing/2010/main">
+              <a14:hiddenFill xmlns:a14="http://schemas.microsoft.com/office/drawing/2010/main" xmlns="">
                 <a:solidFill>
                   <a:schemeClr val="accent1"/>
                 </a:solidFill>
               </a14:hiddenFill>
             </a:ext>
             <a:ext uri="{91240B29-F687-4f45-9708-019B960494DF}">
-              <a14:hiddenLine xmlns="" xmlns:a14="http://schemas.microsoft.com/office/drawing/2010/main" w="9525">
+              <a14:hiddenLine xmlns:a14="http://schemas.microsoft.com/office/drawing/2010/main" xmlns="" w="9525">
                 <a:solidFill>
                   <a:schemeClr val="tx1"/>
                 </a:solidFill>
@@ -6661,7 +6859,7 @@
               </a14:hiddenLine>
             </a:ext>
             <a:ext uri="{AF507438-7753-43e0-B8FC-AC1667EBCBE1}">
-              <a14:hiddenEffects xmlns="" xmlns:a14="http://schemas.microsoft.com/office/drawing/2010/main">
+              <a14:hiddenEffects xmlns:a14="http://schemas.microsoft.com/office/drawing/2010/main" xmlns="">
                 <a:effectLst>
                   <a:outerShdw blurRad="63500" dist="38099" dir="2700000" algn="ctr" rotWithShape="0">
                     <a:schemeClr val="bg2">
@@ -6768,7 +6966,7 @@
               <a:defRPr/>
             </a:pPr>
             <a:r>
-              <a:rPr lang="en-US" altLang="zh-TW" sz="3600" dirty="0" smtClean="0">
+              <a:rPr lang="en-US" altLang="zh-TW" sz="3600" dirty="0">
                 <a:solidFill>
                   <a:srgbClr val="4D4D4D"/>
                 </a:solidFill>
@@ -6804,14 +7002,14 @@
           <a:effectLst/>
           <a:extLst>
             <a:ext uri="{909E8E84-426E-40dd-AFC4-6F175D3DCCD1}">
-              <a14:hiddenFill xmlns="" xmlns:a14="http://schemas.microsoft.com/office/drawing/2010/main">
+              <a14:hiddenFill xmlns:a14="http://schemas.microsoft.com/office/drawing/2010/main" xmlns="">
                 <a:solidFill>
                   <a:schemeClr val="accent1"/>
                 </a:solidFill>
               </a14:hiddenFill>
             </a:ext>
             <a:ext uri="{91240B29-F687-4f45-9708-019B960494DF}">
-              <a14:hiddenLine xmlns="" xmlns:a14="http://schemas.microsoft.com/office/drawing/2010/main" w="9525">
+              <a14:hiddenLine xmlns:a14="http://schemas.microsoft.com/office/drawing/2010/main" xmlns="" w="9525">
                 <a:solidFill>
                   <a:schemeClr val="tx1"/>
                 </a:solidFill>
@@ -6821,7 +7019,7 @@
               </a14:hiddenLine>
             </a:ext>
             <a:ext uri="{AF507438-7753-43e0-B8FC-AC1667EBCBE1}">
-              <a14:hiddenEffects xmlns="" xmlns:a14="http://schemas.microsoft.com/office/drawing/2010/main">
+              <a14:hiddenEffects xmlns:a14="http://schemas.microsoft.com/office/drawing/2010/main" xmlns="">
                 <a:effectLst>
                   <a:outerShdw blurRad="63500" dist="38099" dir="2700000" algn="ctr" rotWithShape="0">
                     <a:schemeClr val="bg2">
@@ -6928,7 +7126,7 @@
               <a:defRPr/>
             </a:pPr>
             <a:r>
-              <a:rPr lang="en-US" altLang="zh-TW" sz="2200" dirty="0" smtClean="0">
+              <a:rPr lang="en-US" altLang="zh-TW" sz="2200" dirty="0">
                 <a:solidFill>
                   <a:srgbClr val="4D4D4D"/>
                 </a:solidFill>
@@ -6964,14 +7162,14 @@
           <a:effectLst/>
           <a:extLst>
             <a:ext uri="{909E8E84-426E-40dd-AFC4-6F175D3DCCD1}">
-              <a14:hiddenFill xmlns="" xmlns:a14="http://schemas.microsoft.com/office/drawing/2010/main">
+              <a14:hiddenFill xmlns:a14="http://schemas.microsoft.com/office/drawing/2010/main" xmlns="">
                 <a:solidFill>
                   <a:schemeClr val="accent1"/>
                 </a:solidFill>
               </a14:hiddenFill>
             </a:ext>
             <a:ext uri="{91240B29-F687-4f45-9708-019B960494DF}">
-              <a14:hiddenLine xmlns="" xmlns:a14="http://schemas.microsoft.com/office/drawing/2010/main" w="9525">
+              <a14:hiddenLine xmlns:a14="http://schemas.microsoft.com/office/drawing/2010/main" xmlns="" w="9525">
                 <a:solidFill>
                   <a:schemeClr val="tx1"/>
                 </a:solidFill>
@@ -6981,7 +7179,7 @@
               </a14:hiddenLine>
             </a:ext>
             <a:ext uri="{AF507438-7753-43e0-B8FC-AC1667EBCBE1}">
-              <a14:hiddenEffects xmlns="" xmlns:a14="http://schemas.microsoft.com/office/drawing/2010/main">
+              <a14:hiddenEffects xmlns:a14="http://schemas.microsoft.com/office/drawing/2010/main" xmlns="">
                 <a:effectLst>
                   <a:outerShdw blurRad="63500" dist="38099" dir="2700000" algn="ctr" rotWithShape="0">
                     <a:schemeClr val="bg2">
@@ -7088,7 +7286,7 @@
               <a:defRPr/>
             </a:pPr>
             <a:r>
-              <a:rPr lang="en-US" altLang="zh-TW" sz="2200" dirty="0" smtClean="0">
+              <a:rPr lang="en-US" altLang="zh-TW" sz="2200" dirty="0">
                 <a:solidFill>
                   <a:srgbClr val="4D4D4D"/>
                 </a:solidFill>
@@ -7130,13 +7328,6 @@
   <p:clrMapOvr>
     <a:masterClrMapping/>
   </p:clrMapOvr>
-  <p:timing>
-    <p:tnLst>
-      <p:par>
-        <p:cTn id="1" dur="indefinite" restart="never" nodeType="tmRoot"/>
-      </p:par>
-    </p:tnLst>
-  </p:timing>
 </p:sld>
 </file>
 
@@ -7145,7 +7336,13 @@
   <p:cSld>
     <p:spTree>
       <p:nvGrpSpPr>
-        <p:cNvPr id="1" name=""/>
+        <p:cNvPr id="1" name="">
+          <a:extLst>
+            <a:ext uri="{FF2B5EF4-FFF2-40B4-BE49-F238E27FC236}">
+              <a16:creationId xmlns:a16="http://schemas.microsoft.com/office/drawing/2014/main" id="{5499A2E3-25AE-BD71-F4EF-ED17662523DB}"/>
+            </a:ext>
+          </a:extLst>
+        </p:cNvPr>
         <p:cNvGrpSpPr/>
         <p:nvPr/>
       </p:nvGrpSpPr>
@@ -7159,272 +7356,695 @@
       </p:grpSpPr>
       <p:sp>
         <p:nvSpPr>
-          <p:cNvPr id="3074" name="Rectangle 19"/>
-          <p:cNvSpPr>
-            <a:spLocks noChangeArrowheads="1"/>
+          <p:cNvPr id="8" name="Title 1">
+            <a:extLst>
+              <a:ext uri="{FF2B5EF4-FFF2-40B4-BE49-F238E27FC236}">
+                <a16:creationId xmlns:a16="http://schemas.microsoft.com/office/drawing/2014/main" id="{2C0A39C8-5E71-07B0-8490-3DAA0F0806E3}"/>
+              </a:ext>
+            </a:extLst>
+          </p:cNvPr>
+          <p:cNvSpPr txBox="1">
+            <a:spLocks/>
           </p:cNvSpPr>
           <p:nvPr/>
         </p:nvSpPr>
-        <p:spPr bwMode="auto">
+        <p:spPr>
           <a:xfrm>
-            <a:off x="373063" y="152400"/>
-            <a:ext cx="6853237" cy="1143000"/>
+            <a:off x="166969" y="964435"/>
+            <a:ext cx="8794933" cy="468008"/>
+          </a:xfrm>
+          <a:prstGeom prst="rect">
+            <a:avLst/>
+          </a:prstGeom>
+        </p:spPr>
+        <p:txBody>
+          <a:bodyPr vert="horz" lIns="68580" tIns="34290" rIns="68580" bIns="34290" rtlCol="0" anchor="ctr">
+            <a:normAutofit/>
+          </a:bodyPr>
+          <a:lstStyle>
+            <a:lvl1pPr algn="l" defTabSz="914400" rtl="0" eaLnBrk="1" latinLnBrk="0" hangingPunct="1">
+              <a:lnSpc>
+                <a:spcPct val="90000"/>
+              </a:lnSpc>
+              <a:spcBef>
+                <a:spcPct val="0"/>
+              </a:spcBef>
+              <a:buNone/>
+              <a:defRPr sz="4400" kern="1200">
+                <a:solidFill>
+                  <a:schemeClr val="tx1"/>
+                </a:solidFill>
+                <a:latin typeface="+mj-lt"/>
+                <a:ea typeface="+mj-ea"/>
+                <a:cs typeface="+mj-cs"/>
+              </a:defRPr>
+            </a:lvl1pPr>
+          </a:lstStyle>
+          <a:p>
+            <a:r>
+              <a:rPr lang="en-US" sz="2100" dirty="0">
+                <a:latin typeface="Arial" panose="020B0604020202020204" pitchFamily="34" charset="0"/>
+                <a:cs typeface="Arial" panose="020B0604020202020204" pitchFamily="34" charset="0"/>
+              </a:rPr>
+              <a:t>What to evaluate for Agentic AI System? </a:t>
+            </a:r>
+          </a:p>
+        </p:txBody>
+      </p:sp>
+      <p:sp>
+        <p:nvSpPr>
+          <p:cNvPr id="4" name="Rounded Rectangle 3">
+            <a:extLst>
+              <a:ext uri="{FF2B5EF4-FFF2-40B4-BE49-F238E27FC236}">
+                <a16:creationId xmlns:a16="http://schemas.microsoft.com/office/drawing/2014/main" id="{D8C6EE88-79EC-9D22-1F2E-317D32B9E63A}"/>
+              </a:ext>
+            </a:extLst>
+          </p:cNvPr>
+          <p:cNvSpPr/>
+          <p:nvPr/>
+        </p:nvSpPr>
+        <p:spPr>
+          <a:xfrm>
+            <a:off x="4772394" y="2181674"/>
+            <a:ext cx="1898495" cy="1877519"/>
+          </a:xfrm>
+          <a:prstGeom prst="roundRect">
+            <a:avLst>
+              <a:gd name="adj" fmla="val 3892"/>
+            </a:avLst>
+          </a:prstGeom>
+          <a:solidFill>
+            <a:srgbClr val="0470F3"/>
+          </a:solidFill>
+          <a:ln>
+            <a:noFill/>
+          </a:ln>
+        </p:spPr>
+        <p:style>
+          <a:lnRef idx="2">
+            <a:schemeClr val="accent1">
+              <a:shade val="15000"/>
+            </a:schemeClr>
+          </a:lnRef>
+          <a:fillRef idx="1">
+            <a:schemeClr val="accent1"/>
+          </a:fillRef>
+          <a:effectRef idx="0">
+            <a:schemeClr val="accent1"/>
+          </a:effectRef>
+          <a:fontRef idx="minor">
+            <a:schemeClr val="lt1"/>
+          </a:fontRef>
+        </p:style>
+        <p:txBody>
+          <a:bodyPr rtlCol="0" anchor="ctr"/>
+          <a:lstStyle/>
+          <a:p>
+            <a:pPr algn="ctr"/>
+            <a:endParaRPr lang="en-US" dirty="0"/>
+          </a:p>
+        </p:txBody>
+      </p:sp>
+      <p:sp>
+        <p:nvSpPr>
+          <p:cNvPr id="5" name="TextBox 4">
+            <a:extLst>
+              <a:ext uri="{FF2B5EF4-FFF2-40B4-BE49-F238E27FC236}">
+                <a16:creationId xmlns:a16="http://schemas.microsoft.com/office/drawing/2014/main" id="{2227C14D-B381-6E9A-977E-FBBC482D767B}"/>
+              </a:ext>
+            </a:extLst>
+          </p:cNvPr>
+          <p:cNvSpPr txBox="1"/>
+          <p:nvPr/>
+        </p:nvSpPr>
+        <p:spPr>
+          <a:xfrm>
+            <a:off x="4893597" y="2963290"/>
+            <a:ext cx="1723549" cy="369332"/>
           </a:xfrm>
           <a:prstGeom prst="rect">
             <a:avLst/>
           </a:prstGeom>
           <a:noFill/>
+        </p:spPr>
+        <p:txBody>
+          <a:bodyPr wrap="none" rtlCol="0">
+            <a:spAutoFit/>
+          </a:bodyPr>
+          <a:lstStyle/>
+          <a:p>
+            <a:pPr algn="ctr"/>
+            <a:r>
+              <a:rPr lang="en-US" b="1" dirty="0">
+                <a:solidFill>
+                  <a:schemeClr val="bg1"/>
+                </a:solidFill>
+                <a:cs typeface="Arial" panose="020B0604020202020204" pitchFamily="34" charset="0"/>
+              </a:rPr>
+              <a:t>Self-reflection</a:t>
+            </a:r>
+          </a:p>
+        </p:txBody>
+      </p:sp>
+      <p:sp>
+        <p:nvSpPr>
+          <p:cNvPr id="9" name="Rounded Rectangle 8">
+            <a:extLst>
+              <a:ext uri="{FF2B5EF4-FFF2-40B4-BE49-F238E27FC236}">
+                <a16:creationId xmlns:a16="http://schemas.microsoft.com/office/drawing/2014/main" id="{4DB5C0F6-2CBF-893F-740B-CF793DD38A07}"/>
+              </a:ext>
+            </a:extLst>
+          </p:cNvPr>
+          <p:cNvSpPr/>
+          <p:nvPr/>
+        </p:nvSpPr>
+        <p:spPr>
+          <a:xfrm>
+            <a:off x="6936765" y="2181674"/>
+            <a:ext cx="1898495" cy="1877519"/>
+          </a:xfrm>
+          <a:prstGeom prst="roundRect">
+            <a:avLst>
+              <a:gd name="adj" fmla="val 3892"/>
+            </a:avLst>
+          </a:prstGeom>
+          <a:solidFill>
+            <a:srgbClr val="0470F3"/>
+          </a:solidFill>
           <a:ln>
             <a:noFill/>
           </a:ln>
-          <a:effectLst/>
-          <a:extLst>
-            <a:ext uri="{909E8E84-426E-40dd-AFC4-6F175D3DCCD1}">
-              <a14:hiddenFill xmlns="" xmlns:a14="http://schemas.microsoft.com/office/drawing/2010/main">
-                <a:solidFill>
-                  <a:schemeClr val="accent1"/>
-                </a:solidFill>
-              </a14:hiddenFill>
-            </a:ext>
-            <a:ext uri="{91240B29-F687-4f45-9708-019B960494DF}">
-              <a14:hiddenLine xmlns="" xmlns:a14="http://schemas.microsoft.com/office/drawing/2010/main" w="9525">
-                <a:solidFill>
-                  <a:schemeClr val="tx1"/>
-                </a:solidFill>
-                <a:miter lim="800000"/>
-                <a:headEnd/>
-                <a:tailEnd/>
-              </a14:hiddenLine>
-            </a:ext>
-            <a:ext uri="{AF507438-7753-43e0-B8FC-AC1667EBCBE1}">
-              <a14:hiddenEffects xmlns="" xmlns:a14="http://schemas.microsoft.com/office/drawing/2010/main">
-                <a:effectLst>
-                  <a:outerShdw blurRad="63500" dist="38099" dir="2700000" algn="ctr" rotWithShape="0">
-                    <a:schemeClr val="bg2">
-                      <a:alpha val="74998"/>
-                    </a:schemeClr>
-                  </a:outerShdw>
-                </a:effectLst>
-              </a14:hiddenEffects>
-            </a:ext>
-          </a:extLst>
-        </p:spPr>
-        <p:txBody>
-          <a:bodyPr anchor="ctr"/>
-          <a:lstStyle>
-            <a:lvl1pPr eaLnBrk="0" hangingPunct="0">
-              <a:defRPr sz="2400">
-                <a:solidFill>
-                  <a:schemeClr val="tx1"/>
-                </a:solidFill>
-                <a:latin typeface="Arial" pitchFamily="34" charset="0"/>
-                <a:ea typeface="ＭＳ Ｐゴシック" pitchFamily="34" charset="-128"/>
-              </a:defRPr>
-            </a:lvl1pPr>
-            <a:lvl2pPr marL="742950" indent="-285750" eaLnBrk="0" hangingPunct="0">
-              <a:defRPr sz="2400">
-                <a:solidFill>
-                  <a:schemeClr val="tx1"/>
-                </a:solidFill>
-                <a:latin typeface="Arial" pitchFamily="34" charset="0"/>
-                <a:ea typeface="ＭＳ Ｐゴシック" pitchFamily="34" charset="-128"/>
-              </a:defRPr>
-            </a:lvl2pPr>
-            <a:lvl3pPr marL="1143000" indent="-228600" eaLnBrk="0" hangingPunct="0">
-              <a:defRPr sz="2400">
-                <a:solidFill>
-                  <a:schemeClr val="tx1"/>
-                </a:solidFill>
-                <a:latin typeface="Arial" pitchFamily="34" charset="0"/>
-                <a:ea typeface="ＭＳ Ｐゴシック" pitchFamily="34" charset="-128"/>
-              </a:defRPr>
-            </a:lvl3pPr>
-            <a:lvl4pPr marL="1600200" indent="-228600" eaLnBrk="0" hangingPunct="0">
-              <a:defRPr sz="2400">
-                <a:solidFill>
-                  <a:schemeClr val="tx1"/>
-                </a:solidFill>
-                <a:latin typeface="Arial" pitchFamily="34" charset="0"/>
-                <a:ea typeface="ＭＳ Ｐゴシック" pitchFamily="34" charset="-128"/>
-              </a:defRPr>
-            </a:lvl4pPr>
-            <a:lvl5pPr marL="2057400" indent="-228600" eaLnBrk="0" hangingPunct="0">
-              <a:defRPr sz="2400">
-                <a:solidFill>
-                  <a:schemeClr val="tx1"/>
-                </a:solidFill>
-                <a:latin typeface="Arial" pitchFamily="34" charset="0"/>
-                <a:ea typeface="ＭＳ Ｐゴシック" pitchFamily="34" charset="-128"/>
-              </a:defRPr>
-            </a:lvl5pPr>
-            <a:lvl6pPr marL="2514600" indent="-228600" eaLnBrk="0" fontAlgn="base" hangingPunct="0">
-              <a:spcBef>
-                <a:spcPct val="0"/>
-              </a:spcBef>
-              <a:spcAft>
-                <a:spcPct val="0"/>
-              </a:spcAft>
-              <a:defRPr sz="2400">
-                <a:solidFill>
-                  <a:schemeClr val="tx1"/>
-                </a:solidFill>
-                <a:latin typeface="Arial" pitchFamily="34" charset="0"/>
-                <a:ea typeface="ＭＳ Ｐゴシック" pitchFamily="34" charset="-128"/>
-              </a:defRPr>
-            </a:lvl6pPr>
-            <a:lvl7pPr marL="2971800" indent="-228600" eaLnBrk="0" fontAlgn="base" hangingPunct="0">
-              <a:spcBef>
-                <a:spcPct val="0"/>
-              </a:spcBef>
-              <a:spcAft>
-                <a:spcPct val="0"/>
-              </a:spcAft>
-              <a:defRPr sz="2400">
-                <a:solidFill>
-                  <a:schemeClr val="tx1"/>
-                </a:solidFill>
-                <a:latin typeface="Arial" pitchFamily="34" charset="0"/>
-                <a:ea typeface="ＭＳ Ｐゴシック" pitchFamily="34" charset="-128"/>
-              </a:defRPr>
-            </a:lvl7pPr>
-            <a:lvl8pPr marL="3429000" indent="-228600" eaLnBrk="0" fontAlgn="base" hangingPunct="0">
-              <a:spcBef>
-                <a:spcPct val="0"/>
-              </a:spcBef>
-              <a:spcAft>
-                <a:spcPct val="0"/>
-              </a:spcAft>
-              <a:defRPr sz="2400">
-                <a:solidFill>
-                  <a:schemeClr val="tx1"/>
-                </a:solidFill>
-                <a:latin typeface="Arial" pitchFamily="34" charset="0"/>
-                <a:ea typeface="ＭＳ Ｐゴシック" pitchFamily="34" charset="-128"/>
-              </a:defRPr>
-            </a:lvl8pPr>
-            <a:lvl9pPr marL="3886200" indent="-228600" eaLnBrk="0" fontAlgn="base" hangingPunct="0">
-              <a:spcBef>
-                <a:spcPct val="0"/>
-              </a:spcBef>
-              <a:spcAft>
-                <a:spcPct val="0"/>
-              </a:spcAft>
-              <a:defRPr sz="2400">
-                <a:solidFill>
-                  <a:schemeClr val="tx1"/>
-                </a:solidFill>
-                <a:latin typeface="Arial" pitchFamily="34" charset="0"/>
-                <a:ea typeface="ＭＳ Ｐゴシック" pitchFamily="34" charset="-128"/>
-              </a:defRPr>
-            </a:lvl9pPr>
-          </a:lstStyle>
-          <a:p>
-            <a:pPr eaLnBrk="1" hangingPunct="1">
-              <a:lnSpc>
-                <a:spcPct val="150000"/>
-              </a:lnSpc>
-              <a:defRPr/>
-            </a:pPr>
-            <a:r>
-              <a:rPr lang="en-US" altLang="zh-TW" sz="3600" dirty="0" smtClean="0">
-                <a:solidFill>
-                  <a:srgbClr val="4D4D4D"/>
-                </a:solidFill>
-                <a:latin typeface="Georgia" pitchFamily="18" charset="0"/>
-                <a:ea typeface="PMingLiU" pitchFamily="18" charset="-120"/>
-              </a:rPr>
-              <a:t>Experimental Results</a:t>
-            </a:r>
-            <a:endParaRPr lang="en-US" altLang="zh-TW" sz="3600" dirty="0">
-              <a:solidFill>
-                <a:srgbClr val="4D4D4D"/>
-              </a:solidFill>
-              <a:latin typeface="Georgia" pitchFamily="18" charset="0"/>
-              <a:ea typeface="PMingLiU" pitchFamily="18" charset="-120"/>
-            </a:endParaRPr>
-          </a:p>
-        </p:txBody>
-      </p:sp>
-      <p:sp>
-        <p:nvSpPr>
-          <p:cNvPr id="3075" name="Content Placeholder 1"/>
-          <p:cNvSpPr>
-            <a:spLocks noGrp="1"/>
-          </p:cNvSpPr>
-          <p:nvPr>
-            <p:ph/>
-          </p:nvPr>
+        </p:spPr>
+        <p:style>
+          <a:lnRef idx="2">
+            <a:schemeClr val="accent1">
+              <a:shade val="15000"/>
+            </a:schemeClr>
+          </a:lnRef>
+          <a:fillRef idx="1">
+            <a:schemeClr val="accent1"/>
+          </a:fillRef>
+          <a:effectRef idx="0">
+            <a:schemeClr val="accent1"/>
+          </a:effectRef>
+          <a:fontRef idx="minor">
+            <a:schemeClr val="lt1"/>
+          </a:fontRef>
+        </p:style>
+        <p:txBody>
+          <a:bodyPr rtlCol="0" anchor="ctr"/>
+          <a:lstStyle/>
+          <a:p>
+            <a:pPr algn="ctr"/>
+            <a:endParaRPr lang="en-US" dirty="0"/>
+          </a:p>
+        </p:txBody>
+      </p:sp>
+      <p:sp>
+        <p:nvSpPr>
+          <p:cNvPr id="10" name="Rounded Rectangle 9">
+            <a:extLst>
+              <a:ext uri="{FF2B5EF4-FFF2-40B4-BE49-F238E27FC236}">
+                <a16:creationId xmlns:a16="http://schemas.microsoft.com/office/drawing/2014/main" id="{30530409-E418-BA64-18D7-6812AD6724D8}"/>
+              </a:ext>
+            </a:extLst>
+          </p:cNvPr>
+          <p:cNvSpPr/>
+          <p:nvPr/>
         </p:nvSpPr>
         <p:spPr>
           <a:xfrm>
-            <a:off x="533400" y="1447800"/>
-            <a:ext cx="8229600" cy="4419600"/>
+            <a:off x="2608023" y="2181674"/>
+            <a:ext cx="1898495" cy="1877519"/>
           </a:xfrm>
-        </p:spPr>
+          <a:prstGeom prst="roundRect">
+            <a:avLst>
+              <a:gd name="adj" fmla="val 3892"/>
+            </a:avLst>
+          </a:prstGeom>
+          <a:solidFill>
+            <a:srgbClr val="0470F3"/>
+          </a:solidFill>
+          <a:ln>
+            <a:noFill/>
+          </a:ln>
+        </p:spPr>
+        <p:style>
+          <a:lnRef idx="2">
+            <a:schemeClr val="accent1">
+              <a:shade val="15000"/>
+            </a:schemeClr>
+          </a:lnRef>
+          <a:fillRef idx="1">
+            <a:schemeClr val="accent1"/>
+          </a:fillRef>
+          <a:effectRef idx="0">
+            <a:schemeClr val="accent1"/>
+          </a:effectRef>
+          <a:fontRef idx="minor">
+            <a:schemeClr val="lt1"/>
+          </a:fontRef>
+        </p:style>
+        <p:txBody>
+          <a:bodyPr rtlCol="0" anchor="ctr"/>
+          <a:lstStyle/>
+          <a:p>
+            <a:pPr algn="ctr"/>
+            <a:endParaRPr lang="en-US" dirty="0"/>
+          </a:p>
+        </p:txBody>
+      </p:sp>
+      <p:sp>
+        <p:nvSpPr>
+          <p:cNvPr id="11" name="Rounded Rectangle 10">
+            <a:extLst>
+              <a:ext uri="{FF2B5EF4-FFF2-40B4-BE49-F238E27FC236}">
+                <a16:creationId xmlns:a16="http://schemas.microsoft.com/office/drawing/2014/main" id="{63D2FD33-1012-0BDC-FF63-6A0DAA6A948A}"/>
+              </a:ext>
+            </a:extLst>
+          </p:cNvPr>
+          <p:cNvSpPr/>
+          <p:nvPr/>
+        </p:nvSpPr>
+        <p:spPr>
+          <a:xfrm>
+            <a:off x="443653" y="2181674"/>
+            <a:ext cx="1898495" cy="1877519"/>
+          </a:xfrm>
+          <a:prstGeom prst="roundRect">
+            <a:avLst>
+              <a:gd name="adj" fmla="val 3892"/>
+            </a:avLst>
+          </a:prstGeom>
+          <a:solidFill>
+            <a:srgbClr val="0470F3"/>
+          </a:solidFill>
+          <a:ln>
+            <a:noFill/>
+          </a:ln>
+        </p:spPr>
+        <p:style>
+          <a:lnRef idx="2">
+            <a:schemeClr val="accent1">
+              <a:shade val="15000"/>
+            </a:schemeClr>
+          </a:lnRef>
+          <a:fillRef idx="1">
+            <a:schemeClr val="accent1"/>
+          </a:fillRef>
+          <a:effectRef idx="0">
+            <a:schemeClr val="accent1"/>
+          </a:effectRef>
+          <a:fontRef idx="minor">
+            <a:schemeClr val="lt1"/>
+          </a:fontRef>
+        </p:style>
+        <p:txBody>
+          <a:bodyPr rtlCol="0" anchor="ctr"/>
+          <a:lstStyle/>
+          <a:p>
+            <a:pPr algn="ctr"/>
+            <a:endParaRPr lang="en-US" dirty="0"/>
+          </a:p>
+        </p:txBody>
+      </p:sp>
+      <p:sp>
+        <p:nvSpPr>
+          <p:cNvPr id="12" name="TextBox 11">
+            <a:extLst>
+              <a:ext uri="{FF2B5EF4-FFF2-40B4-BE49-F238E27FC236}">
+                <a16:creationId xmlns:a16="http://schemas.microsoft.com/office/drawing/2014/main" id="{25012CF5-ED61-37A3-7420-A12550AD6E6A}"/>
+              </a:ext>
+            </a:extLst>
+          </p:cNvPr>
+          <p:cNvSpPr txBox="1"/>
+          <p:nvPr/>
+        </p:nvSpPr>
+        <p:spPr>
+          <a:xfrm>
+            <a:off x="7384978" y="2963290"/>
+            <a:ext cx="1069525" cy="369332"/>
+          </a:xfrm>
+          <a:prstGeom prst="rect">
+            <a:avLst/>
+          </a:prstGeom>
+          <a:noFill/>
+        </p:spPr>
+        <p:txBody>
+          <a:bodyPr wrap="none" rtlCol="0">
+            <a:spAutoFit/>
+          </a:bodyPr>
+          <a:lstStyle/>
+          <a:p>
+            <a:pPr algn="ctr"/>
+            <a:r>
+              <a:rPr lang="en-US" b="1" dirty="0">
+                <a:solidFill>
+                  <a:schemeClr val="bg1"/>
+                </a:solidFill>
+                <a:cs typeface="Arial" panose="020B0604020202020204" pitchFamily="34" charset="0"/>
+              </a:rPr>
+              <a:t>Memory</a:t>
+            </a:r>
+          </a:p>
+        </p:txBody>
+      </p:sp>
+      <p:sp>
+        <p:nvSpPr>
+          <p:cNvPr id="14" name="TextBox 13">
+            <a:extLst>
+              <a:ext uri="{FF2B5EF4-FFF2-40B4-BE49-F238E27FC236}">
+                <a16:creationId xmlns:a16="http://schemas.microsoft.com/office/drawing/2014/main" id="{B2520A6D-7A2E-811A-0902-2928F8E6BAB7}"/>
+              </a:ext>
+            </a:extLst>
+          </p:cNvPr>
+          <p:cNvSpPr txBox="1"/>
+          <p:nvPr/>
+        </p:nvSpPr>
+        <p:spPr>
+          <a:xfrm>
+            <a:off x="3231512" y="2824791"/>
+            <a:ext cx="718979" cy="646331"/>
+          </a:xfrm>
+          <a:prstGeom prst="rect">
+            <a:avLst/>
+          </a:prstGeom>
+          <a:noFill/>
+        </p:spPr>
+        <p:txBody>
+          <a:bodyPr wrap="none" rtlCol="0">
+            <a:spAutoFit/>
+          </a:bodyPr>
+          <a:lstStyle/>
+          <a:p>
+            <a:pPr algn="ctr"/>
+            <a:r>
+              <a:rPr lang="en-US" b="1" dirty="0">
+                <a:solidFill>
+                  <a:schemeClr val="bg1"/>
+                </a:solidFill>
+                <a:cs typeface="Arial" panose="020B0604020202020204" pitchFamily="34" charset="0"/>
+              </a:rPr>
+              <a:t>Tool </a:t>
+            </a:r>
+          </a:p>
+          <a:p>
+            <a:pPr algn="ctr"/>
+            <a:r>
+              <a:rPr lang="en-US" b="1" dirty="0">
+                <a:solidFill>
+                  <a:schemeClr val="bg1"/>
+                </a:solidFill>
+                <a:cs typeface="Arial" panose="020B0604020202020204" pitchFamily="34" charset="0"/>
+              </a:rPr>
+              <a:t>use</a:t>
+            </a:r>
+          </a:p>
+        </p:txBody>
+      </p:sp>
+      <p:sp>
+        <p:nvSpPr>
+          <p:cNvPr id="16" name="TextBox 15">
+            <a:extLst>
+              <a:ext uri="{FF2B5EF4-FFF2-40B4-BE49-F238E27FC236}">
+                <a16:creationId xmlns:a16="http://schemas.microsoft.com/office/drawing/2014/main" id="{C1623B22-4705-F53E-7D4F-765E531A344B}"/>
+              </a:ext>
+            </a:extLst>
+          </p:cNvPr>
+          <p:cNvSpPr txBox="1"/>
+          <p:nvPr/>
+        </p:nvSpPr>
+        <p:spPr>
+          <a:xfrm>
+            <a:off x="527178" y="2808810"/>
+            <a:ext cx="1633781" cy="646331"/>
+          </a:xfrm>
+          <a:prstGeom prst="rect">
+            <a:avLst/>
+          </a:prstGeom>
+          <a:noFill/>
+        </p:spPr>
+        <p:txBody>
+          <a:bodyPr wrap="none" rtlCol="0">
+            <a:spAutoFit/>
+          </a:bodyPr>
+          <a:lstStyle/>
+          <a:p>
+            <a:pPr algn="ctr"/>
+            <a:r>
+              <a:rPr lang="en-US" b="1" dirty="0">
+                <a:solidFill>
+                  <a:schemeClr val="bg1"/>
+                </a:solidFill>
+                <a:cs typeface="Arial" panose="020B0604020202020204" pitchFamily="34" charset="0"/>
+              </a:rPr>
+              <a:t>Planning and</a:t>
+            </a:r>
+          </a:p>
+          <a:p>
+            <a:pPr algn="ctr"/>
+            <a:r>
+              <a:rPr lang="en-US" b="1" dirty="0">
+                <a:solidFill>
+                  <a:schemeClr val="bg1"/>
+                </a:solidFill>
+                <a:cs typeface="Arial" panose="020B0604020202020204" pitchFamily="34" charset="0"/>
+              </a:rPr>
+              <a:t>reasoning </a:t>
+            </a:r>
+          </a:p>
+        </p:txBody>
+      </p:sp>
+      <p:sp>
+        <p:nvSpPr>
+          <p:cNvPr id="29" name="Rounded Rectangle 28">
+            <a:extLst>
+              <a:ext uri="{FF2B5EF4-FFF2-40B4-BE49-F238E27FC236}">
+                <a16:creationId xmlns:a16="http://schemas.microsoft.com/office/drawing/2014/main" id="{C933D696-3727-B262-7DC2-4D3E6FCC831D}"/>
+              </a:ext>
+            </a:extLst>
+          </p:cNvPr>
+          <p:cNvSpPr/>
+          <p:nvPr/>
+        </p:nvSpPr>
+        <p:spPr>
+          <a:xfrm>
+            <a:off x="217832" y="1731997"/>
+            <a:ext cx="8794934" cy="2486795"/>
+          </a:xfrm>
+          <a:prstGeom prst="roundRect">
+            <a:avLst>
+              <a:gd name="adj" fmla="val 2498"/>
+            </a:avLst>
+          </a:prstGeom>
+          <a:noFill/>
+          <a:ln w="28575">
+            <a:solidFill>
+              <a:srgbClr val="0470F3"/>
+            </a:solidFill>
+            <a:prstDash val="sysDash"/>
+          </a:ln>
+        </p:spPr>
+        <p:style>
+          <a:lnRef idx="2">
+            <a:schemeClr val="accent1">
+              <a:shade val="15000"/>
+            </a:schemeClr>
+          </a:lnRef>
+          <a:fillRef idx="1">
+            <a:schemeClr val="accent1"/>
+          </a:fillRef>
+          <a:effectRef idx="0">
+            <a:schemeClr val="accent1"/>
+          </a:effectRef>
+          <a:fontRef idx="minor">
+            <a:schemeClr val="lt1"/>
+          </a:fontRef>
+        </p:style>
+        <p:txBody>
+          <a:bodyPr rtlCol="0" anchor="ctr"/>
+          <a:lstStyle/>
+          <a:p>
+            <a:pPr algn="ctr"/>
+            <a:endParaRPr lang="en-US"/>
+          </a:p>
+        </p:txBody>
+      </p:sp>
+      <p:sp>
+        <p:nvSpPr>
+          <p:cNvPr id="33" name="Rounded Rectangle 32">
+            <a:extLst>
+              <a:ext uri="{FF2B5EF4-FFF2-40B4-BE49-F238E27FC236}">
+                <a16:creationId xmlns:a16="http://schemas.microsoft.com/office/drawing/2014/main" id="{A7EF680B-E194-142D-DB29-CFD152203FDD}"/>
+              </a:ext>
+            </a:extLst>
+          </p:cNvPr>
+          <p:cNvSpPr/>
+          <p:nvPr/>
+        </p:nvSpPr>
+        <p:spPr>
+          <a:xfrm>
+            <a:off x="131235" y="1573991"/>
+            <a:ext cx="1898495" cy="467959"/>
+          </a:xfrm>
+          <a:prstGeom prst="roundRect">
+            <a:avLst>
+              <a:gd name="adj" fmla="val 3892"/>
+            </a:avLst>
+          </a:prstGeom>
+          <a:solidFill>
+            <a:srgbClr val="0470F3"/>
+          </a:solidFill>
+          <a:ln>
+            <a:noFill/>
+          </a:ln>
+        </p:spPr>
+        <p:style>
+          <a:lnRef idx="2">
+            <a:schemeClr val="accent1">
+              <a:shade val="15000"/>
+            </a:schemeClr>
+          </a:lnRef>
+          <a:fillRef idx="1">
+            <a:schemeClr val="accent1"/>
+          </a:fillRef>
+          <a:effectRef idx="0">
+            <a:schemeClr val="accent1"/>
+          </a:effectRef>
+          <a:fontRef idx="minor">
+            <a:schemeClr val="lt1"/>
+          </a:fontRef>
+        </p:style>
+        <p:txBody>
+          <a:bodyPr rtlCol="0" anchor="ctr"/>
+          <a:lstStyle/>
+          <a:p>
+            <a:pPr algn="ctr"/>
+            <a:endParaRPr lang="en-US" dirty="0"/>
+          </a:p>
+        </p:txBody>
+      </p:sp>
+      <p:sp>
+        <p:nvSpPr>
+          <p:cNvPr id="30" name="TextBox 29">
+            <a:extLst>
+              <a:ext uri="{FF2B5EF4-FFF2-40B4-BE49-F238E27FC236}">
+                <a16:creationId xmlns:a16="http://schemas.microsoft.com/office/drawing/2014/main" id="{7C21250C-F93A-A27D-69D6-86268A563750}"/>
+              </a:ext>
+            </a:extLst>
+          </p:cNvPr>
+          <p:cNvSpPr txBox="1"/>
+          <p:nvPr/>
+        </p:nvSpPr>
+        <p:spPr>
+          <a:xfrm>
+            <a:off x="173125" y="1629302"/>
+            <a:ext cx="1838966" cy="369332"/>
+          </a:xfrm>
+          <a:prstGeom prst="rect">
+            <a:avLst/>
+          </a:prstGeom>
+          <a:noFill/>
+        </p:spPr>
+        <p:txBody>
+          <a:bodyPr wrap="none" rtlCol="0">
+            <a:spAutoFit/>
+          </a:bodyPr>
+          <a:lstStyle/>
+          <a:p>
+            <a:pPr algn="ctr"/>
+            <a:r>
+              <a:rPr lang="en-US" b="1" dirty="0">
+                <a:solidFill>
+                  <a:schemeClr val="bg1"/>
+                </a:solidFill>
+                <a:cs typeface="Arial" panose="020B0604020202020204" pitchFamily="34" charset="0"/>
+              </a:rPr>
+              <a:t>Core capability</a:t>
+            </a:r>
+          </a:p>
+        </p:txBody>
+      </p:sp>
+      <p:sp>
+        <p:nvSpPr>
+          <p:cNvPr id="32" name="TextBox 31">
+            <a:extLst>
+              <a:ext uri="{FF2B5EF4-FFF2-40B4-BE49-F238E27FC236}">
+                <a16:creationId xmlns:a16="http://schemas.microsoft.com/office/drawing/2014/main" id="{A27F887D-9F82-57E2-A080-B40749A6C2AF}"/>
+              </a:ext>
+            </a:extLst>
+          </p:cNvPr>
+          <p:cNvSpPr txBox="1"/>
+          <p:nvPr/>
+        </p:nvSpPr>
+        <p:spPr>
+          <a:xfrm>
+            <a:off x="194148" y="4518347"/>
+            <a:ext cx="1569661" cy="369332"/>
+          </a:xfrm>
+          <a:prstGeom prst="rect">
+            <a:avLst/>
+          </a:prstGeom>
+          <a:noFill/>
+        </p:spPr>
+        <p:txBody>
+          <a:bodyPr wrap="none" rtlCol="0">
+            <a:spAutoFit/>
+          </a:bodyPr>
+          <a:lstStyle/>
+          <a:p>
+            <a:pPr algn="ctr"/>
+            <a:r>
+              <a:rPr lang="en-US" b="1" dirty="0">
+                <a:solidFill>
+                  <a:schemeClr val="bg1"/>
+                </a:solidFill>
+                <a:cs typeface="Arial" panose="020B0604020202020204" pitchFamily="34" charset="0"/>
+              </a:rPr>
+              <a:t>Applications</a:t>
+            </a:r>
+          </a:p>
+        </p:txBody>
+      </p:sp>
+      <p:sp>
+        <p:nvSpPr>
+          <p:cNvPr id="2" name="Slide Number Placeholder 1">
+            <a:extLst>
+              <a:ext uri="{FF2B5EF4-FFF2-40B4-BE49-F238E27FC236}">
+                <a16:creationId xmlns:a16="http://schemas.microsoft.com/office/drawing/2014/main" id="{4FEB4BC0-A4E5-9A4E-B727-8DE8EFDDECC8}"/>
+              </a:ext>
+            </a:extLst>
+          </p:cNvPr>
+          <p:cNvSpPr>
+            <a:spLocks noGrp="1"/>
+          </p:cNvSpPr>
+          <p:nvPr>
+            <p:ph type="sldNum" sz="quarter" idx="12"/>
+          </p:nvPr>
+        </p:nvSpPr>
+        <p:spPr/>
         <p:txBody>
           <a:bodyPr/>
           <a:lstStyle/>
           <a:p>
-            <a:pPr eaLnBrk="1" hangingPunct="1">
-              <a:lnSpc>
-                <a:spcPct val="150000"/>
-              </a:lnSpc>
-              <a:buFont typeface="Wingdings" charset="0"/>
-              <a:buChar char="§"/>
-              <a:defRPr/>
-            </a:pPr>
-            <a:endParaRPr lang="en-US" altLang="zh-TW" sz="2000" dirty="0" smtClean="0">
-              <a:solidFill>
-                <a:srgbClr val="4D4D4D"/>
-              </a:solidFill>
-              <a:latin typeface="Georgia" charset="0"/>
-              <a:ea typeface="新細明體" charset="0"/>
-              <a:cs typeface="新細明體" charset="0"/>
-            </a:endParaRPr>
-          </a:p>
-        </p:txBody>
-      </p:sp>
-      <p:sp>
-        <p:nvSpPr>
-          <p:cNvPr id="2" name="Slide Number Placeholder 1"/>
-          <p:cNvSpPr>
-            <a:spLocks noGrp="1"/>
-          </p:cNvSpPr>
-          <p:nvPr>
-            <p:ph type="sldNum" sz="quarter" idx="12"/>
-          </p:nvPr>
-        </p:nvSpPr>
-        <p:spPr/>
-        <p:txBody>
-          <a:bodyPr/>
-          <a:lstStyle/>
-          <a:p>
-            <a:fld id="{B95760C2-38E4-496F-933D-2305F303D3F1}" type="slidenum">
-              <a:rPr lang="zh-TW" altLang="en-US" smtClean="0"/>
-              <a:pPr/>
+            <a:fld id="{09775F43-1499-4DA3-AD15-177EAD7511FA}" type="slidenum">
+              <a:rPr lang="en-US" smtClean="0"/>
               <a:t>10</a:t>
             </a:fld>
-            <a:endParaRPr lang="en-US" altLang="zh-TW"/>
+            <a:endParaRPr lang="en-US"/>
           </a:p>
         </p:txBody>
       </p:sp>
     </p:spTree>
     <p:extLst>
       <p:ext uri="{BB962C8B-B14F-4D97-AF65-F5344CB8AC3E}">
-        <p14:creationId xmlns:p14="http://schemas.microsoft.com/office/powerpoint/2010/main" val="649885862"/>
+        <p14:creationId xmlns:p14="http://schemas.microsoft.com/office/powerpoint/2010/main" val="1518754852"/>
       </p:ext>
     </p:extLst>
   </p:cSld>
   <p:clrMapOvr>
     <a:masterClrMapping/>
   </p:clrMapOvr>
-  <p:timing>
-    <p:tnLst>
-      <p:par>
-        <p:cTn id="1" dur="indefinite" restart="never" nodeType="tmRoot"/>
-      </p:par>
-    </p:tnLst>
-  </p:timing>
 </p:sld>
 </file>
 
@@ -7468,14 +8088,14 @@
           <a:effectLst/>
           <a:extLst>
             <a:ext uri="{909E8E84-426E-40dd-AFC4-6F175D3DCCD1}">
-              <a14:hiddenFill xmlns="" xmlns:a14="http://schemas.microsoft.com/office/drawing/2010/main">
+              <a14:hiddenFill xmlns:a14="http://schemas.microsoft.com/office/drawing/2010/main" xmlns="">
                 <a:solidFill>
                   <a:schemeClr val="accent1"/>
                 </a:solidFill>
               </a14:hiddenFill>
             </a:ext>
             <a:ext uri="{91240B29-F687-4f45-9708-019B960494DF}">
-              <a14:hiddenLine xmlns="" xmlns:a14="http://schemas.microsoft.com/office/drawing/2010/main" w="9525">
+              <a14:hiddenLine xmlns:a14="http://schemas.microsoft.com/office/drawing/2010/main" xmlns="" w="9525">
                 <a:solidFill>
                   <a:schemeClr val="tx1"/>
                 </a:solidFill>
@@ -7485,7 +8105,7 @@
               </a14:hiddenLine>
             </a:ext>
             <a:ext uri="{AF507438-7753-43e0-B8FC-AC1667EBCBE1}">
-              <a14:hiddenEffects xmlns="" xmlns:a14="http://schemas.microsoft.com/office/drawing/2010/main">
+              <a14:hiddenEffects xmlns:a14="http://schemas.microsoft.com/office/drawing/2010/main" xmlns="">
                 <a:effectLst>
                   <a:outerShdw blurRad="63500" dist="38099" dir="2700000" algn="ctr" rotWithShape="0">
                     <a:schemeClr val="bg2">
@@ -7614,22 +8234,15 @@
               <a:defRPr/>
             </a:pPr>
             <a:r>
-              <a:rPr lang="en-US" altLang="zh-TW" sz="3600" dirty="0" smtClean="0">
+              <a:rPr lang="en-US" altLang="zh-TW" sz="3600" dirty="0">
                 <a:solidFill>
                   <a:srgbClr val="4D4D4D"/>
                 </a:solidFill>
                 <a:latin typeface="Georgia" pitchFamily="18" charset="0"/>
                 <a:ea typeface="PMingLiU" pitchFamily="18" charset="-120"/>
               </a:rPr>
-              <a:t>Experimental Analysis</a:t>
+              <a:t>Data Summary</a:t>
             </a:r>
-            <a:endParaRPr lang="en-US" altLang="zh-TW" sz="3600" dirty="0">
-              <a:solidFill>
-                <a:srgbClr val="4D4D4D"/>
-              </a:solidFill>
-              <a:latin typeface="Georgia" pitchFamily="18" charset="0"/>
-              <a:ea typeface="PMingLiU" pitchFamily="18" charset="-120"/>
-            </a:endParaRPr>
           </a:p>
         </p:txBody>
       </p:sp>
@@ -7661,7 +8274,7 @@
               <a:buChar char="§"/>
               <a:defRPr/>
             </a:pPr>
-            <a:endParaRPr lang="en-US" altLang="zh-TW" sz="2000" dirty="0" smtClean="0">
+            <a:endParaRPr lang="en-US" altLang="zh-TW" sz="2000" dirty="0">
               <a:solidFill>
                 <a:srgbClr val="4D4D4D"/>
               </a:solidFill>
@@ -7699,20 +8312,13 @@
     </p:spTree>
     <p:extLst>
       <p:ext uri="{BB962C8B-B14F-4D97-AF65-F5344CB8AC3E}">
-        <p14:creationId xmlns:p14="http://schemas.microsoft.com/office/powerpoint/2010/main" val="2279849148"/>
+        <p14:creationId xmlns:p14="http://schemas.microsoft.com/office/powerpoint/2010/main" val="461079532"/>
       </p:ext>
     </p:extLst>
   </p:cSld>
   <p:clrMapOvr>
     <a:masterClrMapping/>
   </p:clrMapOvr>
-  <p:timing>
-    <p:tnLst>
-      <p:par>
-        <p:cTn id="1" dur="indefinite" restart="never" nodeType="tmRoot"/>
-      </p:par>
-    </p:tnLst>
-  </p:timing>
 </p:sld>
 </file>
 
@@ -7735,7 +8341,7 @@
       </p:grpSpPr>
       <p:sp>
         <p:nvSpPr>
-          <p:cNvPr id="27650" name="Rectangle 15"/>
+          <p:cNvPr id="3074" name="Rectangle 19"/>
           <p:cNvSpPr>
             <a:spLocks noChangeArrowheads="1"/>
           </p:cNvSpPr>
@@ -7756,14 +8362,14 @@
           <a:effectLst/>
           <a:extLst>
             <a:ext uri="{909E8E84-426E-40dd-AFC4-6F175D3DCCD1}">
-              <a14:hiddenFill xmlns="" xmlns:a14="http://schemas.microsoft.com/office/drawing/2010/main">
+              <a14:hiddenFill xmlns:a14="http://schemas.microsoft.com/office/drawing/2010/main" xmlns="">
                 <a:solidFill>
                   <a:schemeClr val="accent1"/>
                 </a:solidFill>
               </a14:hiddenFill>
             </a:ext>
             <a:ext uri="{91240B29-F687-4f45-9708-019B960494DF}">
-              <a14:hiddenLine xmlns="" xmlns:a14="http://schemas.microsoft.com/office/drawing/2010/main" w="9525">
+              <a14:hiddenLine xmlns:a14="http://schemas.microsoft.com/office/drawing/2010/main" xmlns="" w="9525">
                 <a:solidFill>
                   <a:schemeClr val="tx1"/>
                 </a:solidFill>
@@ -7773,7 +8379,7 @@
               </a14:hiddenLine>
             </a:ext>
             <a:ext uri="{AF507438-7753-43e0-B8FC-AC1667EBCBE1}">
-              <a14:hiddenEffects xmlns="" xmlns:a14="http://schemas.microsoft.com/office/drawing/2010/main">
+              <a14:hiddenEffects xmlns:a14="http://schemas.microsoft.com/office/drawing/2010/main" xmlns="">
                 <a:effectLst>
                   <a:outerShdw blurRad="63500" dist="38099" dir="2700000" algn="ctr" rotWithShape="0">
                     <a:schemeClr val="bg2">
@@ -7787,9 +8393,118 @@
         </p:spPr>
         <p:txBody>
           <a:bodyPr anchor="ctr"/>
-          <a:lstStyle/>
-          <a:p>
-            <a:pPr>
+          <a:lstStyle>
+            <a:lvl1pPr eaLnBrk="0" hangingPunct="0">
+              <a:defRPr sz="2400">
+                <a:solidFill>
+                  <a:schemeClr val="tx1"/>
+                </a:solidFill>
+                <a:latin typeface="Arial" pitchFamily="34" charset="0"/>
+                <a:ea typeface="ＭＳ Ｐゴシック" pitchFamily="34" charset="-128"/>
+              </a:defRPr>
+            </a:lvl1pPr>
+            <a:lvl2pPr marL="742950" indent="-285750" eaLnBrk="0" hangingPunct="0">
+              <a:defRPr sz="2400">
+                <a:solidFill>
+                  <a:schemeClr val="tx1"/>
+                </a:solidFill>
+                <a:latin typeface="Arial" pitchFamily="34" charset="0"/>
+                <a:ea typeface="ＭＳ Ｐゴシック" pitchFamily="34" charset="-128"/>
+              </a:defRPr>
+            </a:lvl2pPr>
+            <a:lvl3pPr marL="1143000" indent="-228600" eaLnBrk="0" hangingPunct="0">
+              <a:defRPr sz="2400">
+                <a:solidFill>
+                  <a:schemeClr val="tx1"/>
+                </a:solidFill>
+                <a:latin typeface="Arial" pitchFamily="34" charset="0"/>
+                <a:ea typeface="ＭＳ Ｐゴシック" pitchFamily="34" charset="-128"/>
+              </a:defRPr>
+            </a:lvl3pPr>
+            <a:lvl4pPr marL="1600200" indent="-228600" eaLnBrk="0" hangingPunct="0">
+              <a:defRPr sz="2400">
+                <a:solidFill>
+                  <a:schemeClr val="tx1"/>
+                </a:solidFill>
+                <a:latin typeface="Arial" pitchFamily="34" charset="0"/>
+                <a:ea typeface="ＭＳ Ｐゴシック" pitchFamily="34" charset="-128"/>
+              </a:defRPr>
+            </a:lvl4pPr>
+            <a:lvl5pPr marL="2057400" indent="-228600" eaLnBrk="0" hangingPunct="0">
+              <a:defRPr sz="2400">
+                <a:solidFill>
+                  <a:schemeClr val="tx1"/>
+                </a:solidFill>
+                <a:latin typeface="Arial" pitchFamily="34" charset="0"/>
+                <a:ea typeface="ＭＳ Ｐゴシック" pitchFamily="34" charset="-128"/>
+              </a:defRPr>
+            </a:lvl5pPr>
+            <a:lvl6pPr marL="2514600" indent="-228600" eaLnBrk="0" fontAlgn="base" hangingPunct="0">
+              <a:spcBef>
+                <a:spcPct val="0"/>
+              </a:spcBef>
+              <a:spcAft>
+                <a:spcPct val="0"/>
+              </a:spcAft>
+              <a:defRPr sz="2400">
+                <a:solidFill>
+                  <a:schemeClr val="tx1"/>
+                </a:solidFill>
+                <a:latin typeface="Arial" pitchFamily="34" charset="0"/>
+                <a:ea typeface="ＭＳ Ｐゴシック" pitchFamily="34" charset="-128"/>
+              </a:defRPr>
+            </a:lvl6pPr>
+            <a:lvl7pPr marL="2971800" indent="-228600" eaLnBrk="0" fontAlgn="base" hangingPunct="0">
+              <a:spcBef>
+                <a:spcPct val="0"/>
+              </a:spcBef>
+              <a:spcAft>
+                <a:spcPct val="0"/>
+              </a:spcAft>
+              <a:defRPr sz="2400">
+                <a:solidFill>
+                  <a:schemeClr val="tx1"/>
+                </a:solidFill>
+                <a:latin typeface="Arial" pitchFamily="34" charset="0"/>
+                <a:ea typeface="ＭＳ Ｐゴシック" pitchFamily="34" charset="-128"/>
+              </a:defRPr>
+            </a:lvl7pPr>
+            <a:lvl8pPr marL="3429000" indent="-228600" eaLnBrk="0" fontAlgn="base" hangingPunct="0">
+              <a:spcBef>
+                <a:spcPct val="0"/>
+              </a:spcBef>
+              <a:spcAft>
+                <a:spcPct val="0"/>
+              </a:spcAft>
+              <a:defRPr sz="2400">
+                <a:solidFill>
+                  <a:schemeClr val="tx1"/>
+                </a:solidFill>
+                <a:latin typeface="Arial" pitchFamily="34" charset="0"/>
+                <a:ea typeface="ＭＳ Ｐゴシック" pitchFamily="34" charset="-128"/>
+              </a:defRPr>
+            </a:lvl8pPr>
+            <a:lvl9pPr marL="3886200" indent="-228600" eaLnBrk="0" fontAlgn="base" hangingPunct="0">
+              <a:spcBef>
+                <a:spcPct val="0"/>
+              </a:spcBef>
+              <a:spcAft>
+                <a:spcPct val="0"/>
+              </a:spcAft>
+              <a:defRPr sz="2400">
+                <a:solidFill>
+                  <a:schemeClr val="tx1"/>
+                </a:solidFill>
+                <a:latin typeface="Arial" pitchFamily="34" charset="0"/>
+                <a:ea typeface="ＭＳ Ｐゴシック" pitchFamily="34" charset="-128"/>
+              </a:defRPr>
+            </a:lvl9pPr>
+          </a:lstStyle>
+          <a:p>
+            <a:pPr eaLnBrk="1" hangingPunct="1">
+              <a:lnSpc>
+                <a:spcPct val="150000"/>
+              </a:lnSpc>
               <a:defRPr/>
             </a:pPr>
             <a:r>
@@ -7797,24 +8512,43 @@
                 <a:solidFill>
                   <a:srgbClr val="4D4D4D"/>
                 </a:solidFill>
-                <a:latin typeface="Georgia" charset="0"/>
-                <a:ea typeface="新細明體" charset="0"/>
-                <a:cs typeface="新細明體" charset="0"/>
+                <a:latin typeface="Georgia" pitchFamily="18" charset="0"/>
+                <a:ea typeface="PMingLiU" pitchFamily="18" charset="-120"/>
               </a:rPr>
-              <a:t>Conclusion and Future </a:t>
+              <a:t>Experimental Results</a:t>
             </a:r>
-            <a:r>
-              <a:rPr lang="en-US" altLang="zh-TW" sz="3600" dirty="0" smtClean="0">
-                <a:solidFill>
-                  <a:srgbClr val="4D4D4D"/>
-                </a:solidFill>
-                <a:latin typeface="Georgia" charset="0"/>
-                <a:ea typeface="新細明體" charset="0"/>
-                <a:cs typeface="新細明體" charset="0"/>
-              </a:rPr>
-              <a:t>Work</a:t>
-            </a:r>
-            <a:endParaRPr lang="en-US" altLang="zh-TW" sz="3600" dirty="0">
+          </a:p>
+        </p:txBody>
+      </p:sp>
+      <p:sp>
+        <p:nvSpPr>
+          <p:cNvPr id="3075" name="Content Placeholder 1"/>
+          <p:cNvSpPr>
+            <a:spLocks noGrp="1"/>
+          </p:cNvSpPr>
+          <p:nvPr>
+            <p:ph/>
+          </p:nvPr>
+        </p:nvSpPr>
+        <p:spPr>
+          <a:xfrm>
+            <a:off x="533400" y="1447800"/>
+            <a:ext cx="8229600" cy="4419600"/>
+          </a:xfrm>
+        </p:spPr>
+        <p:txBody>
+          <a:bodyPr/>
+          <a:lstStyle/>
+          <a:p>
+            <a:pPr eaLnBrk="1" hangingPunct="1">
+              <a:lnSpc>
+                <a:spcPct val="150000"/>
+              </a:lnSpc>
+              <a:buFont typeface="Wingdings" charset="0"/>
+              <a:buChar char="§"/>
+              <a:defRPr/>
+            </a:pPr>
+            <a:endParaRPr lang="en-US" altLang="zh-TW" sz="2000" dirty="0">
               <a:solidFill>
                 <a:srgbClr val="4D4D4D"/>
               </a:solidFill>
@@ -7827,170 +8561,6 @@
       </p:sp>
       <p:sp>
         <p:nvSpPr>
-          <p:cNvPr id="53250" name="Content Placeholder 2"/>
-          <p:cNvSpPr txBox="1">
-            <a:spLocks/>
-          </p:cNvSpPr>
-          <p:nvPr/>
-        </p:nvSpPr>
-        <p:spPr bwMode="auto">
-          <a:xfrm>
-            <a:off x="9525" y="1752600"/>
-            <a:ext cx="9067800" cy="3810000"/>
-          </a:xfrm>
-          <a:prstGeom prst="rect">
-            <a:avLst/>
-          </a:prstGeom>
-          <a:noFill/>
-          <a:ln>
-            <a:noFill/>
-          </a:ln>
-          <a:extLst>
-            <a:ext uri="{909E8E84-426E-40dd-AFC4-6F175D3DCCD1}">
-              <a14:hiddenFill xmlns="" xmlns:a14="http://schemas.microsoft.com/office/drawing/2010/main">
-                <a:solidFill>
-                  <a:srgbClr val="FFFFFF"/>
-                </a:solidFill>
-              </a14:hiddenFill>
-            </a:ext>
-            <a:ext uri="{91240B29-F687-4f45-9708-019B960494DF}">
-              <a14:hiddenLine xmlns="" xmlns:a14="http://schemas.microsoft.com/office/drawing/2010/main" w="9525">
-                <a:solidFill>
-                  <a:srgbClr val="000000"/>
-                </a:solidFill>
-                <a:miter lim="800000"/>
-                <a:headEnd/>
-                <a:tailEnd/>
-              </a14:hiddenLine>
-            </a:ext>
-          </a:extLst>
-        </p:spPr>
-        <p:txBody>
-          <a:bodyPr/>
-          <a:lstStyle>
-            <a:lvl1pPr marL="342900" indent="-342900" eaLnBrk="0" hangingPunct="0">
-              <a:defRPr sz="2400">
-                <a:solidFill>
-                  <a:schemeClr val="tx1"/>
-                </a:solidFill>
-                <a:latin typeface="Arial" pitchFamily="34" charset="0"/>
-                <a:ea typeface="ＭＳ Ｐゴシック" pitchFamily="34" charset="-128"/>
-              </a:defRPr>
-            </a:lvl1pPr>
-            <a:lvl2pPr marL="742950" indent="-285750" eaLnBrk="0" hangingPunct="0">
-              <a:defRPr sz="2400">
-                <a:solidFill>
-                  <a:schemeClr val="tx1"/>
-                </a:solidFill>
-                <a:latin typeface="Arial" pitchFamily="34" charset="0"/>
-                <a:ea typeface="ＭＳ Ｐゴシック" pitchFamily="34" charset="-128"/>
-              </a:defRPr>
-            </a:lvl2pPr>
-            <a:lvl3pPr marL="1143000" indent="-228600" eaLnBrk="0" hangingPunct="0">
-              <a:defRPr sz="2400">
-                <a:solidFill>
-                  <a:schemeClr val="tx1"/>
-                </a:solidFill>
-                <a:latin typeface="Arial" pitchFamily="34" charset="0"/>
-                <a:ea typeface="ＭＳ Ｐゴシック" pitchFamily="34" charset="-128"/>
-              </a:defRPr>
-            </a:lvl3pPr>
-            <a:lvl4pPr marL="1600200" indent="-228600" eaLnBrk="0" hangingPunct="0">
-              <a:defRPr sz="2400">
-                <a:solidFill>
-                  <a:schemeClr val="tx1"/>
-                </a:solidFill>
-                <a:latin typeface="Arial" pitchFamily="34" charset="0"/>
-                <a:ea typeface="ＭＳ Ｐゴシック" pitchFamily="34" charset="-128"/>
-              </a:defRPr>
-            </a:lvl4pPr>
-            <a:lvl5pPr marL="2057400" indent="-228600" eaLnBrk="0" hangingPunct="0">
-              <a:defRPr sz="2400">
-                <a:solidFill>
-                  <a:schemeClr val="tx1"/>
-                </a:solidFill>
-                <a:latin typeface="Arial" pitchFamily="34" charset="0"/>
-                <a:ea typeface="ＭＳ Ｐゴシック" pitchFamily="34" charset="-128"/>
-              </a:defRPr>
-            </a:lvl5pPr>
-            <a:lvl6pPr marL="2514600" indent="-228600" eaLnBrk="0" fontAlgn="base" hangingPunct="0">
-              <a:spcBef>
-                <a:spcPct val="0"/>
-              </a:spcBef>
-              <a:spcAft>
-                <a:spcPct val="0"/>
-              </a:spcAft>
-              <a:defRPr sz="2400">
-                <a:solidFill>
-                  <a:schemeClr val="tx1"/>
-                </a:solidFill>
-                <a:latin typeface="Arial" pitchFamily="34" charset="0"/>
-                <a:ea typeface="ＭＳ Ｐゴシック" pitchFamily="34" charset="-128"/>
-              </a:defRPr>
-            </a:lvl6pPr>
-            <a:lvl7pPr marL="2971800" indent="-228600" eaLnBrk="0" fontAlgn="base" hangingPunct="0">
-              <a:spcBef>
-                <a:spcPct val="0"/>
-              </a:spcBef>
-              <a:spcAft>
-                <a:spcPct val="0"/>
-              </a:spcAft>
-              <a:defRPr sz="2400">
-                <a:solidFill>
-                  <a:schemeClr val="tx1"/>
-                </a:solidFill>
-                <a:latin typeface="Arial" pitchFamily="34" charset="0"/>
-                <a:ea typeface="ＭＳ Ｐゴシック" pitchFamily="34" charset="-128"/>
-              </a:defRPr>
-            </a:lvl7pPr>
-            <a:lvl8pPr marL="3429000" indent="-228600" eaLnBrk="0" fontAlgn="base" hangingPunct="0">
-              <a:spcBef>
-                <a:spcPct val="0"/>
-              </a:spcBef>
-              <a:spcAft>
-                <a:spcPct val="0"/>
-              </a:spcAft>
-              <a:defRPr sz="2400">
-                <a:solidFill>
-                  <a:schemeClr val="tx1"/>
-                </a:solidFill>
-                <a:latin typeface="Arial" pitchFamily="34" charset="0"/>
-                <a:ea typeface="ＭＳ Ｐゴシック" pitchFamily="34" charset="-128"/>
-              </a:defRPr>
-            </a:lvl8pPr>
-            <a:lvl9pPr marL="3886200" indent="-228600" eaLnBrk="0" fontAlgn="base" hangingPunct="0">
-              <a:spcBef>
-                <a:spcPct val="0"/>
-              </a:spcBef>
-              <a:spcAft>
-                <a:spcPct val="0"/>
-              </a:spcAft>
-              <a:defRPr sz="2400">
-                <a:solidFill>
-                  <a:schemeClr val="tx1"/>
-                </a:solidFill>
-                <a:latin typeface="Arial" pitchFamily="34" charset="0"/>
-                <a:ea typeface="ＭＳ Ｐゴシック" pitchFamily="34" charset="-128"/>
-              </a:defRPr>
-            </a:lvl9pPr>
-          </a:lstStyle>
-          <a:p>
-            <a:pPr eaLnBrk="1" hangingPunct="1">
-              <a:spcBef>
-                <a:spcPct val="20000"/>
-              </a:spcBef>
-            </a:pPr>
-            <a:endParaRPr lang="en-US" altLang="en-US" sz="2000" dirty="0">
-              <a:solidFill>
-                <a:srgbClr val="4D4D4D"/>
-              </a:solidFill>
-              <a:latin typeface="Georgia" pitchFamily="18" charset="0"/>
-            </a:endParaRPr>
-          </a:p>
-        </p:txBody>
-      </p:sp>
-      <p:sp>
-        <p:nvSpPr>
           <p:cNvPr id="2" name="Slide Number Placeholder 1"/>
           <p:cNvSpPr>
             <a:spLocks noGrp="1"/>
@@ -8014,17 +8584,15 @@
         </p:txBody>
       </p:sp>
     </p:spTree>
+    <p:extLst>
+      <p:ext uri="{BB962C8B-B14F-4D97-AF65-F5344CB8AC3E}">
+        <p14:creationId xmlns:p14="http://schemas.microsoft.com/office/powerpoint/2010/main" val="649885862"/>
+      </p:ext>
+    </p:extLst>
   </p:cSld>
   <p:clrMapOvr>
     <a:masterClrMapping/>
   </p:clrMapOvr>
-  <p:timing>
-    <p:tnLst>
-      <p:par>
-        <p:cTn id="1" dur="indefinite" restart="never" nodeType="tmRoot"/>
-      </p:par>
-    </p:tnLst>
-  </p:timing>
 </p:sld>
 </file>
 
@@ -8047,7 +8615,7 @@
       </p:grpSpPr>
       <p:sp>
         <p:nvSpPr>
-          <p:cNvPr id="27650" name="Rectangle 15"/>
+          <p:cNvPr id="3074" name="Rectangle 19"/>
           <p:cNvSpPr>
             <a:spLocks noChangeArrowheads="1"/>
           </p:cNvSpPr>
@@ -8068,14 +8636,14 @@
           <a:effectLst/>
           <a:extLst>
             <a:ext uri="{909E8E84-426E-40dd-AFC4-6F175D3DCCD1}">
-              <a14:hiddenFill xmlns="" xmlns:a14="http://schemas.microsoft.com/office/drawing/2010/main">
+              <a14:hiddenFill xmlns:a14="http://schemas.microsoft.com/office/drawing/2010/main" xmlns="">
                 <a:solidFill>
                   <a:schemeClr val="accent1"/>
                 </a:solidFill>
               </a14:hiddenFill>
             </a:ext>
             <a:ext uri="{91240B29-F687-4f45-9708-019B960494DF}">
-              <a14:hiddenLine xmlns="" xmlns:a14="http://schemas.microsoft.com/office/drawing/2010/main" w="9525">
+              <a14:hiddenLine xmlns:a14="http://schemas.microsoft.com/office/drawing/2010/main" xmlns="" w="9525">
                 <a:solidFill>
                   <a:schemeClr val="tx1"/>
                 </a:solidFill>
@@ -8085,7 +8653,7 @@
               </a14:hiddenLine>
             </a:ext>
             <a:ext uri="{AF507438-7753-43e0-B8FC-AC1667EBCBE1}">
-              <a14:hiddenEffects xmlns="" xmlns:a14="http://schemas.microsoft.com/office/drawing/2010/main">
+              <a14:hiddenEffects xmlns:a14="http://schemas.microsoft.com/office/drawing/2010/main" xmlns="">
                 <a:effectLst>
                   <a:outerShdw blurRad="63500" dist="38099" dir="2700000" algn="ctr" rotWithShape="0">
                     <a:schemeClr val="bg2">
@@ -8099,23 +8667,162 @@
         </p:spPr>
         <p:txBody>
           <a:bodyPr anchor="ctr"/>
-          <a:lstStyle/>
-          <a:p>
-            <a:pPr>
+          <a:lstStyle>
+            <a:lvl1pPr eaLnBrk="0" hangingPunct="0">
+              <a:defRPr sz="2400">
+                <a:solidFill>
+                  <a:schemeClr val="tx1"/>
+                </a:solidFill>
+                <a:latin typeface="Arial" pitchFamily="34" charset="0"/>
+                <a:ea typeface="ＭＳ Ｐゴシック" pitchFamily="34" charset="-128"/>
+              </a:defRPr>
+            </a:lvl1pPr>
+            <a:lvl2pPr marL="742950" indent="-285750" eaLnBrk="0" hangingPunct="0">
+              <a:defRPr sz="2400">
+                <a:solidFill>
+                  <a:schemeClr val="tx1"/>
+                </a:solidFill>
+                <a:latin typeface="Arial" pitchFamily="34" charset="0"/>
+                <a:ea typeface="ＭＳ Ｐゴシック" pitchFamily="34" charset="-128"/>
+              </a:defRPr>
+            </a:lvl2pPr>
+            <a:lvl3pPr marL="1143000" indent="-228600" eaLnBrk="0" hangingPunct="0">
+              <a:defRPr sz="2400">
+                <a:solidFill>
+                  <a:schemeClr val="tx1"/>
+                </a:solidFill>
+                <a:latin typeface="Arial" pitchFamily="34" charset="0"/>
+                <a:ea typeface="ＭＳ Ｐゴシック" pitchFamily="34" charset="-128"/>
+              </a:defRPr>
+            </a:lvl3pPr>
+            <a:lvl4pPr marL="1600200" indent="-228600" eaLnBrk="0" hangingPunct="0">
+              <a:defRPr sz="2400">
+                <a:solidFill>
+                  <a:schemeClr val="tx1"/>
+                </a:solidFill>
+                <a:latin typeface="Arial" pitchFamily="34" charset="0"/>
+                <a:ea typeface="ＭＳ Ｐゴシック" pitchFamily="34" charset="-128"/>
+              </a:defRPr>
+            </a:lvl4pPr>
+            <a:lvl5pPr marL="2057400" indent="-228600" eaLnBrk="0" hangingPunct="0">
+              <a:defRPr sz="2400">
+                <a:solidFill>
+                  <a:schemeClr val="tx1"/>
+                </a:solidFill>
+                <a:latin typeface="Arial" pitchFamily="34" charset="0"/>
+                <a:ea typeface="ＭＳ Ｐゴシック" pitchFamily="34" charset="-128"/>
+              </a:defRPr>
+            </a:lvl5pPr>
+            <a:lvl6pPr marL="2514600" indent="-228600" eaLnBrk="0" fontAlgn="base" hangingPunct="0">
+              <a:spcBef>
+                <a:spcPct val="0"/>
+              </a:spcBef>
+              <a:spcAft>
+                <a:spcPct val="0"/>
+              </a:spcAft>
+              <a:defRPr sz="2400">
+                <a:solidFill>
+                  <a:schemeClr val="tx1"/>
+                </a:solidFill>
+                <a:latin typeface="Arial" pitchFamily="34" charset="0"/>
+                <a:ea typeface="ＭＳ Ｐゴシック" pitchFamily="34" charset="-128"/>
+              </a:defRPr>
+            </a:lvl6pPr>
+            <a:lvl7pPr marL="2971800" indent="-228600" eaLnBrk="0" fontAlgn="base" hangingPunct="0">
+              <a:spcBef>
+                <a:spcPct val="0"/>
+              </a:spcBef>
+              <a:spcAft>
+                <a:spcPct val="0"/>
+              </a:spcAft>
+              <a:defRPr sz="2400">
+                <a:solidFill>
+                  <a:schemeClr val="tx1"/>
+                </a:solidFill>
+                <a:latin typeface="Arial" pitchFamily="34" charset="0"/>
+                <a:ea typeface="ＭＳ Ｐゴシック" pitchFamily="34" charset="-128"/>
+              </a:defRPr>
+            </a:lvl7pPr>
+            <a:lvl8pPr marL="3429000" indent="-228600" eaLnBrk="0" fontAlgn="base" hangingPunct="0">
+              <a:spcBef>
+                <a:spcPct val="0"/>
+              </a:spcBef>
+              <a:spcAft>
+                <a:spcPct val="0"/>
+              </a:spcAft>
+              <a:defRPr sz="2400">
+                <a:solidFill>
+                  <a:schemeClr val="tx1"/>
+                </a:solidFill>
+                <a:latin typeface="Arial" pitchFamily="34" charset="0"/>
+                <a:ea typeface="ＭＳ Ｐゴシック" pitchFamily="34" charset="-128"/>
+              </a:defRPr>
+            </a:lvl8pPr>
+            <a:lvl9pPr marL="3886200" indent="-228600" eaLnBrk="0" fontAlgn="base" hangingPunct="0">
+              <a:spcBef>
+                <a:spcPct val="0"/>
+              </a:spcBef>
+              <a:spcAft>
+                <a:spcPct val="0"/>
+              </a:spcAft>
+              <a:defRPr sz="2400">
+                <a:solidFill>
+                  <a:schemeClr val="tx1"/>
+                </a:solidFill>
+                <a:latin typeface="Arial" pitchFamily="34" charset="0"/>
+                <a:ea typeface="ＭＳ Ｐゴシック" pitchFamily="34" charset="-128"/>
+              </a:defRPr>
+            </a:lvl9pPr>
+          </a:lstStyle>
+          <a:p>
+            <a:pPr eaLnBrk="1" hangingPunct="1">
+              <a:lnSpc>
+                <a:spcPct val="150000"/>
+              </a:lnSpc>
               <a:defRPr/>
             </a:pPr>
             <a:r>
-              <a:rPr lang="en-US" altLang="zh-TW" sz="3600" dirty="0" smtClean="0">
+              <a:rPr lang="en-US" altLang="zh-TW" sz="3600" dirty="0">
                 <a:solidFill>
                   <a:srgbClr val="4D4D4D"/>
                 </a:solidFill>
-                <a:latin typeface="Georgia" charset="0"/>
-                <a:ea typeface="新細明體" charset="0"/>
-                <a:cs typeface="新細明體" charset="0"/>
+                <a:latin typeface="Georgia" pitchFamily="18" charset="0"/>
+                <a:ea typeface="PMingLiU" pitchFamily="18" charset="-120"/>
               </a:rPr>
-              <a:t>References</a:t>
+              <a:t>Experimental Analysis</a:t>
             </a:r>
-            <a:endParaRPr lang="en-US" altLang="zh-TW" sz="3600" dirty="0">
+          </a:p>
+        </p:txBody>
+      </p:sp>
+      <p:sp>
+        <p:nvSpPr>
+          <p:cNvPr id="3075" name="Content Placeholder 1"/>
+          <p:cNvSpPr>
+            <a:spLocks noGrp="1"/>
+          </p:cNvSpPr>
+          <p:nvPr>
+            <p:ph/>
+          </p:nvPr>
+        </p:nvSpPr>
+        <p:spPr>
+          <a:xfrm>
+            <a:off x="533400" y="1447800"/>
+            <a:ext cx="8229600" cy="4419600"/>
+          </a:xfrm>
+        </p:spPr>
+        <p:txBody>
+          <a:bodyPr/>
+          <a:lstStyle/>
+          <a:p>
+            <a:pPr eaLnBrk="1" hangingPunct="1">
+              <a:lnSpc>
+                <a:spcPct val="150000"/>
+              </a:lnSpc>
+              <a:buFont typeface="Wingdings" charset="0"/>
+              <a:buChar char="§"/>
+              <a:defRPr/>
+            </a:pPr>
+            <a:endParaRPr lang="en-US" altLang="zh-TW" sz="2000" dirty="0">
               <a:solidFill>
                 <a:srgbClr val="4D4D4D"/>
               </a:solidFill>
@@ -8123,6 +8830,133 @@
               <a:ea typeface="新細明體" charset="0"/>
               <a:cs typeface="新細明體" charset="0"/>
             </a:endParaRPr>
+          </a:p>
+        </p:txBody>
+      </p:sp>
+      <p:sp>
+        <p:nvSpPr>
+          <p:cNvPr id="2" name="Slide Number Placeholder 1"/>
+          <p:cNvSpPr>
+            <a:spLocks noGrp="1"/>
+          </p:cNvSpPr>
+          <p:nvPr>
+            <p:ph type="sldNum" sz="quarter" idx="12"/>
+          </p:nvPr>
+        </p:nvSpPr>
+        <p:spPr/>
+        <p:txBody>
+          <a:bodyPr/>
+          <a:lstStyle/>
+          <a:p>
+            <a:fld id="{B95760C2-38E4-496F-933D-2305F303D3F1}" type="slidenum">
+              <a:rPr lang="zh-TW" altLang="en-US" smtClean="0"/>
+              <a:pPr/>
+              <a:t>13</a:t>
+            </a:fld>
+            <a:endParaRPr lang="en-US" altLang="zh-TW"/>
+          </a:p>
+        </p:txBody>
+      </p:sp>
+    </p:spTree>
+    <p:extLst>
+      <p:ext uri="{BB962C8B-B14F-4D97-AF65-F5344CB8AC3E}">
+        <p14:creationId xmlns:p14="http://schemas.microsoft.com/office/powerpoint/2010/main" val="2279849148"/>
+      </p:ext>
+    </p:extLst>
+  </p:cSld>
+  <p:clrMapOvr>
+    <a:masterClrMapping/>
+  </p:clrMapOvr>
+</p:sld>
+</file>
+
+<file path=ppt/slides/slide14.xml><?xml version="1.0" encoding="utf-8"?>
+<p:sld xmlns:a="http://schemas.openxmlformats.org/drawingml/2006/main" xmlns:r="http://schemas.openxmlformats.org/officeDocument/2006/relationships" xmlns:p="http://schemas.openxmlformats.org/presentationml/2006/main">
+  <p:cSld>
+    <p:spTree>
+      <p:nvGrpSpPr>
+        <p:cNvPr id="1" name=""/>
+        <p:cNvGrpSpPr/>
+        <p:nvPr/>
+      </p:nvGrpSpPr>
+      <p:grpSpPr>
+        <a:xfrm>
+          <a:off x="0" y="0"/>
+          <a:ext cx="0" cy="0"/>
+          <a:chOff x="0" y="0"/>
+          <a:chExt cx="0" cy="0"/>
+        </a:xfrm>
+      </p:grpSpPr>
+      <p:sp>
+        <p:nvSpPr>
+          <p:cNvPr id="27650" name="Rectangle 15"/>
+          <p:cNvSpPr>
+            <a:spLocks noChangeArrowheads="1"/>
+          </p:cNvSpPr>
+          <p:nvPr/>
+        </p:nvSpPr>
+        <p:spPr bwMode="auto">
+          <a:xfrm>
+            <a:off x="373063" y="152400"/>
+            <a:ext cx="6853237" cy="1143000"/>
+          </a:xfrm>
+          <a:prstGeom prst="rect">
+            <a:avLst/>
+          </a:prstGeom>
+          <a:noFill/>
+          <a:ln>
+            <a:noFill/>
+          </a:ln>
+          <a:effectLst/>
+          <a:extLst>
+            <a:ext uri="{909E8E84-426E-40dd-AFC4-6F175D3DCCD1}">
+              <a14:hiddenFill xmlns:a14="http://schemas.microsoft.com/office/drawing/2010/main" xmlns="">
+                <a:solidFill>
+                  <a:schemeClr val="accent1"/>
+                </a:solidFill>
+              </a14:hiddenFill>
+            </a:ext>
+            <a:ext uri="{91240B29-F687-4f45-9708-019B960494DF}">
+              <a14:hiddenLine xmlns:a14="http://schemas.microsoft.com/office/drawing/2010/main" xmlns="" w="9525">
+                <a:solidFill>
+                  <a:schemeClr val="tx1"/>
+                </a:solidFill>
+                <a:miter lim="800000"/>
+                <a:headEnd/>
+                <a:tailEnd/>
+              </a14:hiddenLine>
+            </a:ext>
+            <a:ext uri="{AF507438-7753-43e0-B8FC-AC1667EBCBE1}">
+              <a14:hiddenEffects xmlns:a14="http://schemas.microsoft.com/office/drawing/2010/main" xmlns="">
+                <a:effectLst>
+                  <a:outerShdw blurRad="63500" dist="38099" dir="2700000" algn="ctr" rotWithShape="0">
+                    <a:schemeClr val="bg2">
+                      <a:alpha val="74998"/>
+                    </a:schemeClr>
+                  </a:outerShdw>
+                </a:effectLst>
+              </a14:hiddenEffects>
+            </a:ext>
+          </a:extLst>
+        </p:spPr>
+        <p:txBody>
+          <a:bodyPr anchor="ctr"/>
+          <a:lstStyle/>
+          <a:p>
+            <a:pPr>
+              <a:defRPr/>
+            </a:pPr>
+            <a:r>
+              <a:rPr lang="en-US" altLang="zh-TW" sz="3600" dirty="0">
+                <a:solidFill>
+                  <a:srgbClr val="4D4D4D"/>
+                </a:solidFill>
+                <a:latin typeface="Georgia" charset="0"/>
+                <a:ea typeface="新細明體" charset="0"/>
+                <a:cs typeface="新細明體" charset="0"/>
+              </a:rPr>
+              <a:t>Conclusion and Future Work</a:t>
+            </a:r>
           </a:p>
         </p:txBody>
       </p:sp>
@@ -8148,14 +8982,14 @@
           </a:ln>
           <a:extLst>
             <a:ext uri="{909E8E84-426E-40dd-AFC4-6F175D3DCCD1}">
-              <a14:hiddenFill xmlns="" xmlns:a14="http://schemas.microsoft.com/office/drawing/2010/main">
+              <a14:hiddenFill xmlns:a14="http://schemas.microsoft.com/office/drawing/2010/main" xmlns="">
                 <a:solidFill>
                   <a:srgbClr val="FFFFFF"/>
                 </a:solidFill>
               </a14:hiddenFill>
             </a:ext>
             <a:ext uri="{91240B29-F687-4f45-9708-019B960494DF}">
-              <a14:hiddenLine xmlns="" xmlns:a14="http://schemas.microsoft.com/office/drawing/2010/main" w="9525">
+              <a14:hiddenLine xmlns:a14="http://schemas.microsoft.com/office/drawing/2010/main" xmlns="" w="9525">
                 <a:solidFill>
                   <a:srgbClr val="000000"/>
                 </a:solidFill>
@@ -8308,7 +9142,293 @@
             <a:fld id="{B95760C2-38E4-496F-933D-2305F303D3F1}" type="slidenum">
               <a:rPr lang="zh-TW" altLang="en-US" smtClean="0"/>
               <a:pPr/>
-              <a:t>13</a:t>
+              <a:t>14</a:t>
+            </a:fld>
+            <a:endParaRPr lang="en-US" altLang="zh-TW"/>
+          </a:p>
+        </p:txBody>
+      </p:sp>
+    </p:spTree>
+  </p:cSld>
+  <p:clrMapOvr>
+    <a:masterClrMapping/>
+  </p:clrMapOvr>
+</p:sld>
+</file>
+
+<file path=ppt/slides/slide15.xml><?xml version="1.0" encoding="utf-8"?>
+<p:sld xmlns:a="http://schemas.openxmlformats.org/drawingml/2006/main" xmlns:r="http://schemas.openxmlformats.org/officeDocument/2006/relationships" xmlns:p="http://schemas.openxmlformats.org/presentationml/2006/main">
+  <p:cSld>
+    <p:spTree>
+      <p:nvGrpSpPr>
+        <p:cNvPr id="1" name=""/>
+        <p:cNvGrpSpPr/>
+        <p:nvPr/>
+      </p:nvGrpSpPr>
+      <p:grpSpPr>
+        <a:xfrm>
+          <a:off x="0" y="0"/>
+          <a:ext cx="0" cy="0"/>
+          <a:chOff x="0" y="0"/>
+          <a:chExt cx="0" cy="0"/>
+        </a:xfrm>
+      </p:grpSpPr>
+      <p:sp>
+        <p:nvSpPr>
+          <p:cNvPr id="27650" name="Rectangle 15"/>
+          <p:cNvSpPr>
+            <a:spLocks noChangeArrowheads="1"/>
+          </p:cNvSpPr>
+          <p:nvPr/>
+        </p:nvSpPr>
+        <p:spPr bwMode="auto">
+          <a:xfrm>
+            <a:off x="373063" y="152400"/>
+            <a:ext cx="6853237" cy="1143000"/>
+          </a:xfrm>
+          <a:prstGeom prst="rect">
+            <a:avLst/>
+          </a:prstGeom>
+          <a:noFill/>
+          <a:ln>
+            <a:noFill/>
+          </a:ln>
+          <a:effectLst/>
+          <a:extLst>
+            <a:ext uri="{909E8E84-426E-40dd-AFC4-6F175D3DCCD1}">
+              <a14:hiddenFill xmlns:a14="http://schemas.microsoft.com/office/drawing/2010/main" xmlns="">
+                <a:solidFill>
+                  <a:schemeClr val="accent1"/>
+                </a:solidFill>
+              </a14:hiddenFill>
+            </a:ext>
+            <a:ext uri="{91240B29-F687-4f45-9708-019B960494DF}">
+              <a14:hiddenLine xmlns:a14="http://schemas.microsoft.com/office/drawing/2010/main" xmlns="" w="9525">
+                <a:solidFill>
+                  <a:schemeClr val="tx1"/>
+                </a:solidFill>
+                <a:miter lim="800000"/>
+                <a:headEnd/>
+                <a:tailEnd/>
+              </a14:hiddenLine>
+            </a:ext>
+            <a:ext uri="{AF507438-7753-43e0-B8FC-AC1667EBCBE1}">
+              <a14:hiddenEffects xmlns:a14="http://schemas.microsoft.com/office/drawing/2010/main" xmlns="">
+                <a:effectLst>
+                  <a:outerShdw blurRad="63500" dist="38099" dir="2700000" algn="ctr" rotWithShape="0">
+                    <a:schemeClr val="bg2">
+                      <a:alpha val="74998"/>
+                    </a:schemeClr>
+                  </a:outerShdw>
+                </a:effectLst>
+              </a14:hiddenEffects>
+            </a:ext>
+          </a:extLst>
+        </p:spPr>
+        <p:txBody>
+          <a:bodyPr anchor="ctr"/>
+          <a:lstStyle/>
+          <a:p>
+            <a:pPr>
+              <a:defRPr/>
+            </a:pPr>
+            <a:r>
+              <a:rPr lang="en-US" altLang="zh-TW" sz="3600" dirty="0">
+                <a:solidFill>
+                  <a:srgbClr val="4D4D4D"/>
+                </a:solidFill>
+                <a:latin typeface="Georgia" charset="0"/>
+                <a:ea typeface="新細明體" charset="0"/>
+                <a:cs typeface="新細明體" charset="0"/>
+              </a:rPr>
+              <a:t>References</a:t>
+            </a:r>
+          </a:p>
+        </p:txBody>
+      </p:sp>
+      <p:sp>
+        <p:nvSpPr>
+          <p:cNvPr id="53250" name="Content Placeholder 2"/>
+          <p:cNvSpPr txBox="1">
+            <a:spLocks/>
+          </p:cNvSpPr>
+          <p:nvPr/>
+        </p:nvSpPr>
+        <p:spPr bwMode="auto">
+          <a:xfrm>
+            <a:off x="9525" y="1752600"/>
+            <a:ext cx="9067800" cy="3810000"/>
+          </a:xfrm>
+          <a:prstGeom prst="rect">
+            <a:avLst/>
+          </a:prstGeom>
+          <a:noFill/>
+          <a:ln>
+            <a:noFill/>
+          </a:ln>
+          <a:extLst>
+            <a:ext uri="{909E8E84-426E-40dd-AFC4-6F175D3DCCD1}">
+              <a14:hiddenFill xmlns:a14="http://schemas.microsoft.com/office/drawing/2010/main" xmlns="">
+                <a:solidFill>
+                  <a:srgbClr val="FFFFFF"/>
+                </a:solidFill>
+              </a14:hiddenFill>
+            </a:ext>
+            <a:ext uri="{91240B29-F687-4f45-9708-019B960494DF}">
+              <a14:hiddenLine xmlns:a14="http://schemas.microsoft.com/office/drawing/2010/main" xmlns="" w="9525">
+                <a:solidFill>
+                  <a:srgbClr val="000000"/>
+                </a:solidFill>
+                <a:miter lim="800000"/>
+                <a:headEnd/>
+                <a:tailEnd/>
+              </a14:hiddenLine>
+            </a:ext>
+          </a:extLst>
+        </p:spPr>
+        <p:txBody>
+          <a:bodyPr/>
+          <a:lstStyle>
+            <a:lvl1pPr marL="342900" indent="-342900" eaLnBrk="0" hangingPunct="0">
+              <a:defRPr sz="2400">
+                <a:solidFill>
+                  <a:schemeClr val="tx1"/>
+                </a:solidFill>
+                <a:latin typeface="Arial" pitchFamily="34" charset="0"/>
+                <a:ea typeface="ＭＳ Ｐゴシック" pitchFamily="34" charset="-128"/>
+              </a:defRPr>
+            </a:lvl1pPr>
+            <a:lvl2pPr marL="742950" indent="-285750" eaLnBrk="0" hangingPunct="0">
+              <a:defRPr sz="2400">
+                <a:solidFill>
+                  <a:schemeClr val="tx1"/>
+                </a:solidFill>
+                <a:latin typeface="Arial" pitchFamily="34" charset="0"/>
+                <a:ea typeface="ＭＳ Ｐゴシック" pitchFamily="34" charset="-128"/>
+              </a:defRPr>
+            </a:lvl2pPr>
+            <a:lvl3pPr marL="1143000" indent="-228600" eaLnBrk="0" hangingPunct="0">
+              <a:defRPr sz="2400">
+                <a:solidFill>
+                  <a:schemeClr val="tx1"/>
+                </a:solidFill>
+                <a:latin typeface="Arial" pitchFamily="34" charset="0"/>
+                <a:ea typeface="ＭＳ Ｐゴシック" pitchFamily="34" charset="-128"/>
+              </a:defRPr>
+            </a:lvl3pPr>
+            <a:lvl4pPr marL="1600200" indent="-228600" eaLnBrk="0" hangingPunct="0">
+              <a:defRPr sz="2400">
+                <a:solidFill>
+                  <a:schemeClr val="tx1"/>
+                </a:solidFill>
+                <a:latin typeface="Arial" pitchFamily="34" charset="0"/>
+                <a:ea typeface="ＭＳ Ｐゴシック" pitchFamily="34" charset="-128"/>
+              </a:defRPr>
+            </a:lvl4pPr>
+            <a:lvl5pPr marL="2057400" indent="-228600" eaLnBrk="0" hangingPunct="0">
+              <a:defRPr sz="2400">
+                <a:solidFill>
+                  <a:schemeClr val="tx1"/>
+                </a:solidFill>
+                <a:latin typeface="Arial" pitchFamily="34" charset="0"/>
+                <a:ea typeface="ＭＳ Ｐゴシック" pitchFamily="34" charset="-128"/>
+              </a:defRPr>
+            </a:lvl5pPr>
+            <a:lvl6pPr marL="2514600" indent="-228600" eaLnBrk="0" fontAlgn="base" hangingPunct="0">
+              <a:spcBef>
+                <a:spcPct val="0"/>
+              </a:spcBef>
+              <a:spcAft>
+                <a:spcPct val="0"/>
+              </a:spcAft>
+              <a:defRPr sz="2400">
+                <a:solidFill>
+                  <a:schemeClr val="tx1"/>
+                </a:solidFill>
+                <a:latin typeface="Arial" pitchFamily="34" charset="0"/>
+                <a:ea typeface="ＭＳ Ｐゴシック" pitchFamily="34" charset="-128"/>
+              </a:defRPr>
+            </a:lvl6pPr>
+            <a:lvl7pPr marL="2971800" indent="-228600" eaLnBrk="0" fontAlgn="base" hangingPunct="0">
+              <a:spcBef>
+                <a:spcPct val="0"/>
+              </a:spcBef>
+              <a:spcAft>
+                <a:spcPct val="0"/>
+              </a:spcAft>
+              <a:defRPr sz="2400">
+                <a:solidFill>
+                  <a:schemeClr val="tx1"/>
+                </a:solidFill>
+                <a:latin typeface="Arial" pitchFamily="34" charset="0"/>
+                <a:ea typeface="ＭＳ Ｐゴシック" pitchFamily="34" charset="-128"/>
+              </a:defRPr>
+            </a:lvl7pPr>
+            <a:lvl8pPr marL="3429000" indent="-228600" eaLnBrk="0" fontAlgn="base" hangingPunct="0">
+              <a:spcBef>
+                <a:spcPct val="0"/>
+              </a:spcBef>
+              <a:spcAft>
+                <a:spcPct val="0"/>
+              </a:spcAft>
+              <a:defRPr sz="2400">
+                <a:solidFill>
+                  <a:schemeClr val="tx1"/>
+                </a:solidFill>
+                <a:latin typeface="Arial" pitchFamily="34" charset="0"/>
+                <a:ea typeface="ＭＳ Ｐゴシック" pitchFamily="34" charset="-128"/>
+              </a:defRPr>
+            </a:lvl8pPr>
+            <a:lvl9pPr marL="3886200" indent="-228600" eaLnBrk="0" fontAlgn="base" hangingPunct="0">
+              <a:spcBef>
+                <a:spcPct val="0"/>
+              </a:spcBef>
+              <a:spcAft>
+                <a:spcPct val="0"/>
+              </a:spcAft>
+              <a:defRPr sz="2400">
+                <a:solidFill>
+                  <a:schemeClr val="tx1"/>
+                </a:solidFill>
+                <a:latin typeface="Arial" pitchFamily="34" charset="0"/>
+                <a:ea typeface="ＭＳ Ｐゴシック" pitchFamily="34" charset="-128"/>
+              </a:defRPr>
+            </a:lvl9pPr>
+          </a:lstStyle>
+          <a:p>
+            <a:pPr eaLnBrk="1" hangingPunct="1">
+              <a:spcBef>
+                <a:spcPct val="20000"/>
+              </a:spcBef>
+            </a:pPr>
+            <a:endParaRPr lang="en-US" altLang="en-US" sz="2000" dirty="0">
+              <a:solidFill>
+                <a:srgbClr val="4D4D4D"/>
+              </a:solidFill>
+              <a:latin typeface="Georgia" pitchFamily="18" charset="0"/>
+            </a:endParaRPr>
+          </a:p>
+        </p:txBody>
+      </p:sp>
+      <p:sp>
+        <p:nvSpPr>
+          <p:cNvPr id="2" name="Slide Number Placeholder 1"/>
+          <p:cNvSpPr>
+            <a:spLocks noGrp="1"/>
+          </p:cNvSpPr>
+          <p:nvPr>
+            <p:ph type="sldNum" sz="quarter" idx="12"/>
+          </p:nvPr>
+        </p:nvSpPr>
+        <p:spPr/>
+        <p:txBody>
+          <a:bodyPr/>
+          <a:lstStyle/>
+          <a:p>
+            <a:fld id="{B95760C2-38E4-496F-933D-2305F303D3F1}" type="slidenum">
+              <a:rPr lang="zh-TW" altLang="en-US" smtClean="0"/>
+              <a:pPr/>
+              <a:t>15</a:t>
             </a:fld>
             <a:endParaRPr lang="en-US" altLang="zh-TW"/>
           </a:p>
@@ -8324,13 +9444,6 @@
   <p:clrMapOvr>
     <a:masterClrMapping/>
   </p:clrMapOvr>
-  <p:timing>
-    <p:tnLst>
-      <p:par>
-        <p:cTn id="1" dur="indefinite" restart="never" nodeType="tmRoot"/>
-      </p:par>
-    </p:tnLst>
-  </p:timing>
 </p:sld>
 </file>
 
@@ -8374,14 +9487,14 @@
           <a:effectLst/>
           <a:extLst>
             <a:ext uri="{909E8E84-426E-40dd-AFC4-6F175D3DCCD1}">
-              <a14:hiddenFill xmlns="" xmlns:a14="http://schemas.microsoft.com/office/drawing/2010/main">
+              <a14:hiddenFill xmlns:a14="http://schemas.microsoft.com/office/drawing/2010/main" xmlns="">
                 <a:solidFill>
                   <a:schemeClr val="accent1"/>
                 </a:solidFill>
               </a14:hiddenFill>
             </a:ext>
             <a:ext uri="{91240B29-F687-4f45-9708-019B960494DF}">
-              <a14:hiddenLine xmlns="" xmlns:a14="http://schemas.microsoft.com/office/drawing/2010/main" w="9525">
+              <a14:hiddenLine xmlns:a14="http://schemas.microsoft.com/office/drawing/2010/main" xmlns="" w="9525">
                 <a:solidFill>
                   <a:schemeClr val="tx1"/>
                 </a:solidFill>
@@ -8391,7 +9504,7 @@
               </a14:hiddenLine>
             </a:ext>
             <a:ext uri="{AF507438-7753-43e0-B8FC-AC1667EBCBE1}">
-              <a14:hiddenEffects xmlns="" xmlns:a14="http://schemas.microsoft.com/office/drawing/2010/main">
+              <a14:hiddenEffects xmlns:a14="http://schemas.microsoft.com/office/drawing/2010/main" xmlns="">
                 <a:effectLst>
                   <a:outerShdw blurRad="63500" dist="38099" dir="2700000" algn="ctr" rotWithShape="0">
                     <a:schemeClr val="bg2">
@@ -8563,13 +9676,6 @@
   <p:clrMapOvr>
     <a:masterClrMapping/>
   </p:clrMapOvr>
-  <p:timing>
-    <p:tnLst>
-      <p:par>
-        <p:cTn id="1" dur="indefinite" restart="never" nodeType="tmRoot"/>
-      </p:par>
-    </p:tnLst>
-  </p:timing>
 </p:sld>
 </file>
 
@@ -8613,14 +9719,14 @@
           <a:effectLst/>
           <a:extLst>
             <a:ext uri="{909E8E84-426E-40dd-AFC4-6F175D3DCCD1}">
-              <a14:hiddenFill xmlns="" xmlns:a14="http://schemas.microsoft.com/office/drawing/2010/main">
+              <a14:hiddenFill xmlns:a14="http://schemas.microsoft.com/office/drawing/2010/main" xmlns="">
                 <a:solidFill>
                   <a:schemeClr val="accent1"/>
                 </a:solidFill>
               </a14:hiddenFill>
             </a:ext>
             <a:ext uri="{91240B29-F687-4f45-9708-019B960494DF}">
-              <a14:hiddenLine xmlns="" xmlns:a14="http://schemas.microsoft.com/office/drawing/2010/main" w="9525">
+              <a14:hiddenLine xmlns:a14="http://schemas.microsoft.com/office/drawing/2010/main" xmlns="" w="9525">
                 <a:solidFill>
                   <a:schemeClr val="tx1"/>
                 </a:solidFill>
@@ -8630,7 +9736,7 @@
               </a14:hiddenLine>
             </a:ext>
             <a:ext uri="{AF507438-7753-43e0-B8FC-AC1667EBCBE1}">
-              <a14:hiddenEffects xmlns="" xmlns:a14="http://schemas.microsoft.com/office/drawing/2010/main">
+              <a14:hiddenEffects xmlns:a14="http://schemas.microsoft.com/office/drawing/2010/main" xmlns="">
                 <a:effectLst>
                   <a:outerShdw blurRad="63500" dist="38099" dir="2700000" algn="ctr" rotWithShape="0">
                     <a:schemeClr val="bg2">
@@ -8778,13 +9884,6 @@
   <p:clrMapOvr>
     <a:masterClrMapping/>
   </p:clrMapOvr>
-  <p:timing>
-    <p:tnLst>
-      <p:par>
-        <p:cTn id="1" dur="indefinite" restart="never" nodeType="tmRoot"/>
-      </p:par>
-    </p:tnLst>
-  </p:timing>
 </p:sld>
 </file>
 
@@ -8828,14 +9927,14 @@
           <a:effectLst/>
           <a:extLst>
             <a:ext uri="{909E8E84-426E-40dd-AFC4-6F175D3DCCD1}">
-              <a14:hiddenFill xmlns="" xmlns:a14="http://schemas.microsoft.com/office/drawing/2010/main">
+              <a14:hiddenFill xmlns:a14="http://schemas.microsoft.com/office/drawing/2010/main" xmlns="">
                 <a:solidFill>
                   <a:schemeClr val="accent1"/>
                 </a:solidFill>
               </a14:hiddenFill>
             </a:ext>
             <a:ext uri="{91240B29-F687-4f45-9708-019B960494DF}">
-              <a14:hiddenLine xmlns="" xmlns:a14="http://schemas.microsoft.com/office/drawing/2010/main" w="9525">
+              <a14:hiddenLine xmlns:a14="http://schemas.microsoft.com/office/drawing/2010/main" xmlns="" w="9525">
                 <a:solidFill>
                   <a:schemeClr val="tx1"/>
                 </a:solidFill>
@@ -8845,7 +9944,7 @@
               </a14:hiddenLine>
             </a:ext>
             <a:ext uri="{AF507438-7753-43e0-B8FC-AC1667EBCBE1}">
-              <a14:hiddenEffects xmlns="" xmlns:a14="http://schemas.microsoft.com/office/drawing/2010/main">
+              <a14:hiddenEffects xmlns:a14="http://schemas.microsoft.com/office/drawing/2010/main" xmlns="">
                 <a:effectLst>
                   <a:outerShdw blurRad="63500" dist="38099" dir="2700000" algn="ctr" rotWithShape="0">
                     <a:schemeClr val="bg2">
@@ -8907,13 +10006,6 @@
   <p:clrMapOvr>
     <a:masterClrMapping/>
   </p:clrMapOvr>
-  <p:timing>
-    <p:tnLst>
-      <p:par>
-        <p:cTn id="1" dur="indefinite" restart="never" nodeType="tmRoot"/>
-      </p:par>
-    </p:tnLst>
-  </p:timing>
 </p:sld>
 </file>
 
@@ -8957,14 +10049,14 @@
           <a:effectLst/>
           <a:extLst>
             <a:ext uri="{909E8E84-426E-40dd-AFC4-6F175D3DCCD1}">
-              <a14:hiddenFill xmlns="" xmlns:a14="http://schemas.microsoft.com/office/drawing/2010/main">
+              <a14:hiddenFill xmlns:a14="http://schemas.microsoft.com/office/drawing/2010/main" xmlns="">
                 <a:solidFill>
                   <a:schemeClr val="accent1"/>
                 </a:solidFill>
               </a14:hiddenFill>
             </a:ext>
             <a:ext uri="{91240B29-F687-4f45-9708-019B960494DF}">
-              <a14:hiddenLine xmlns="" xmlns:a14="http://schemas.microsoft.com/office/drawing/2010/main" w="9525">
+              <a14:hiddenLine xmlns:a14="http://schemas.microsoft.com/office/drawing/2010/main" xmlns="" w="9525">
                 <a:solidFill>
                   <a:schemeClr val="tx1"/>
                 </a:solidFill>
@@ -8974,7 +10066,7 @@
               </a14:hiddenLine>
             </a:ext>
             <a:ext uri="{AF507438-7753-43e0-B8FC-AC1667EBCBE1}">
-              <a14:hiddenEffects xmlns="" xmlns:a14="http://schemas.microsoft.com/office/drawing/2010/main">
+              <a14:hiddenEffects xmlns:a14="http://schemas.microsoft.com/office/drawing/2010/main" xmlns="">
                 <a:effectLst>
                   <a:outerShdw blurRad="63500" dist="38099" dir="2700000" algn="ctr" rotWithShape="0">
                     <a:schemeClr val="bg2">
@@ -9098,7 +10190,7 @@
           <a:p>
             <a:pPr eaLnBrk="1" hangingPunct="1"/>
             <a:r>
-              <a:rPr lang="en-US" altLang="ja-JP" sz="3600" dirty="0" smtClean="0">
+              <a:rPr lang="en-US" altLang="ja-JP" sz="3600" dirty="0">
                 <a:solidFill>
                   <a:srgbClr val="4D4D4D"/>
                 </a:solidFill>
@@ -9146,13 +10238,6 @@
   <p:clrMapOvr>
     <a:masterClrMapping/>
   </p:clrMapOvr>
-  <p:timing>
-    <p:tnLst>
-      <p:par>
-        <p:cTn id="1" dur="indefinite" restart="never" nodeType="tmRoot"/>
-      </p:par>
-    </p:tnLst>
-  </p:timing>
 </p:sld>
 </file>
 
@@ -9196,14 +10281,14 @@
           <a:effectLst/>
           <a:extLst>
             <a:ext uri="{909E8E84-426E-40dd-AFC4-6F175D3DCCD1}">
-              <a14:hiddenFill xmlns="" xmlns:a14="http://schemas.microsoft.com/office/drawing/2010/main">
+              <a14:hiddenFill xmlns:a14="http://schemas.microsoft.com/office/drawing/2010/main" xmlns="">
                 <a:solidFill>
                   <a:schemeClr val="accent1"/>
                 </a:solidFill>
               </a14:hiddenFill>
             </a:ext>
             <a:ext uri="{91240B29-F687-4f45-9708-019B960494DF}">
-              <a14:hiddenLine xmlns="" xmlns:a14="http://schemas.microsoft.com/office/drawing/2010/main" w="9525">
+              <a14:hiddenLine xmlns:a14="http://schemas.microsoft.com/office/drawing/2010/main" xmlns="" w="9525">
                 <a:solidFill>
                   <a:schemeClr val="tx1"/>
                 </a:solidFill>
@@ -9213,7 +10298,7 @@
               </a14:hiddenLine>
             </a:ext>
             <a:ext uri="{AF507438-7753-43e0-B8FC-AC1667EBCBE1}">
-              <a14:hiddenEffects xmlns="" xmlns:a14="http://schemas.microsoft.com/office/drawing/2010/main">
+              <a14:hiddenEffects xmlns:a14="http://schemas.microsoft.com/office/drawing/2010/main" xmlns="">
                 <a:effectLst>
                   <a:outerShdw blurRad="63500" dist="38099" dir="2700000" algn="ctr" rotWithShape="0">
                     <a:schemeClr val="bg2">
@@ -9337,24 +10422,14 @@
           <a:p>
             <a:pPr eaLnBrk="1" hangingPunct="1"/>
             <a:r>
-              <a:rPr lang="en-US" altLang="ja-JP" sz="3600" dirty="0" smtClean="0">
+              <a:rPr lang="en-US" altLang="ja-JP" sz="3600" dirty="0">
                 <a:solidFill>
                   <a:srgbClr val="4D4D4D"/>
                 </a:solidFill>
                 <a:latin typeface="Georgia" pitchFamily="18" charset="0"/>
                 <a:ea typeface="PMingLiU" pitchFamily="18" charset="-120"/>
               </a:rPr>
-              <a:t>An Intuitive Figure Showing WHY </a:t>
-            </a:r>
-            <a:r>
-              <a:rPr lang="en-US" altLang="ja-JP" sz="3600" dirty="0" smtClean="0">
-                <a:solidFill>
-                  <a:srgbClr val="4D4D4D"/>
-                </a:solidFill>
-                <a:latin typeface="Georgia" pitchFamily="18" charset="0"/>
-                <a:ea typeface="PMingLiU" pitchFamily="18" charset="-120"/>
-              </a:rPr>
-              <a:t>Claim</a:t>
+              <a:t>An Intuitive Figure Showing WHY Claim</a:t>
             </a:r>
             <a:endParaRPr lang="en-US" altLang="zh-TW" sz="3600" dirty="0">
               <a:solidFill>
@@ -9400,13 +10475,6 @@
   <p:clrMapOvr>
     <a:masterClrMapping/>
   </p:clrMapOvr>
-  <p:timing>
-    <p:tnLst>
-      <p:par>
-        <p:cTn id="1" dur="indefinite" restart="never" nodeType="tmRoot"/>
-      </p:par>
-    </p:tnLst>
-  </p:timing>
 </p:sld>
 </file>
 
@@ -9450,14 +10518,14 @@
           <a:effectLst/>
           <a:extLst>
             <a:ext uri="{909E8E84-426E-40dd-AFC4-6F175D3DCCD1}">
-              <a14:hiddenFill xmlns="" xmlns:a14="http://schemas.microsoft.com/office/drawing/2010/main">
+              <a14:hiddenFill xmlns:a14="http://schemas.microsoft.com/office/drawing/2010/main" xmlns="">
                 <a:solidFill>
                   <a:schemeClr val="accent1"/>
                 </a:solidFill>
               </a14:hiddenFill>
             </a:ext>
             <a:ext uri="{91240B29-F687-4f45-9708-019B960494DF}">
-              <a14:hiddenLine xmlns="" xmlns:a14="http://schemas.microsoft.com/office/drawing/2010/main" w="9525">
+              <a14:hiddenLine xmlns:a14="http://schemas.microsoft.com/office/drawing/2010/main" xmlns="" w="9525">
                 <a:solidFill>
                   <a:schemeClr val="tx1"/>
                 </a:solidFill>
@@ -9467,7 +10535,7 @@
               </a14:hiddenLine>
             </a:ext>
             <a:ext uri="{AF507438-7753-43e0-B8FC-AC1667EBCBE1}">
-              <a14:hiddenEffects xmlns="" xmlns:a14="http://schemas.microsoft.com/office/drawing/2010/main">
+              <a14:hiddenEffects xmlns:a14="http://schemas.microsoft.com/office/drawing/2010/main" xmlns="">
                 <a:effectLst>
                   <a:outerShdw blurRad="63500" dist="38099" dir="2700000" algn="ctr" rotWithShape="0">
                     <a:schemeClr val="bg2">
@@ -9629,7 +10697,7 @@
           <a:noFill/>
           <a:extLst>
             <a:ext uri="{909E8E84-426E-40dd-AFC4-6F175D3DCCD1}">
-              <a14:hiddenFill xmlns="" xmlns:a14="http://schemas.microsoft.com/office/drawing/2010/main">
+              <a14:hiddenFill xmlns:a14="http://schemas.microsoft.com/office/drawing/2010/main" xmlns="">
                 <a:solidFill>
                   <a:srgbClr val="FFFFFF"/>
                 </a:solidFill>
@@ -9668,7 +10736,7 @@
           <a:noFill/>
           <a:extLst>
             <a:ext uri="{909E8E84-426E-40dd-AFC4-6F175D3DCCD1}">
-              <a14:hiddenFill xmlns="" xmlns:a14="http://schemas.microsoft.com/office/drawing/2010/main">
+              <a14:hiddenFill xmlns:a14="http://schemas.microsoft.com/office/drawing/2010/main" xmlns="">
                 <a:solidFill>
                   <a:srgbClr val="FFFFFF"/>
                 </a:solidFill>
@@ -9698,13 +10766,6 @@
   <p:clrMapOvr>
     <a:masterClrMapping/>
   </p:clrMapOvr>
-  <p:timing>
-    <p:tnLst>
-      <p:par>
-        <p:cTn id="1" dur="indefinite" restart="never" nodeType="tmRoot"/>
-      </p:par>
-    </p:tnLst>
-  </p:timing>
 </p:sld>
 </file>
 
@@ -9748,14 +10809,14 @@
           <a:effectLst/>
           <a:extLst>
             <a:ext uri="{909E8E84-426E-40dd-AFC4-6F175D3DCCD1}">
-              <a14:hiddenFill xmlns="" xmlns:a14="http://schemas.microsoft.com/office/drawing/2010/main">
+              <a14:hiddenFill xmlns:a14="http://schemas.microsoft.com/office/drawing/2010/main" xmlns="">
                 <a:solidFill>
                   <a:schemeClr val="accent1"/>
                 </a:solidFill>
               </a14:hiddenFill>
             </a:ext>
             <a:ext uri="{91240B29-F687-4f45-9708-019B960494DF}">
-              <a14:hiddenLine xmlns="" xmlns:a14="http://schemas.microsoft.com/office/drawing/2010/main" w="9525">
+              <a14:hiddenLine xmlns:a14="http://schemas.microsoft.com/office/drawing/2010/main" xmlns="" w="9525">
                 <a:solidFill>
                   <a:schemeClr val="tx1"/>
                 </a:solidFill>
@@ -9765,7 +10826,7 @@
               </a14:hiddenLine>
             </a:ext>
             <a:ext uri="{AF507438-7753-43e0-B8FC-AC1667EBCBE1}">
-              <a14:hiddenEffects xmlns="" xmlns:a14="http://schemas.microsoft.com/office/drawing/2010/main">
+              <a14:hiddenEffects xmlns:a14="http://schemas.microsoft.com/office/drawing/2010/main" xmlns="">
                 <a:effectLst>
                   <a:outerShdw blurRad="63500" dist="38099" dir="2700000" algn="ctr" rotWithShape="0">
                     <a:schemeClr val="bg2">
@@ -9934,7 +10995,7 @@
               <a:buChar char="§"/>
               <a:defRPr/>
             </a:pPr>
-            <a:endParaRPr lang="en-US" altLang="zh-TW" sz="2000" dirty="0" smtClean="0">
+            <a:endParaRPr lang="en-US" altLang="zh-TW" sz="2000" dirty="0">
               <a:solidFill>
                 <a:srgbClr val="4D4D4D"/>
               </a:solidFill>
@@ -9974,13 +11035,6 @@
   <p:clrMapOvr>
     <a:masterClrMapping/>
   </p:clrMapOvr>
-  <p:timing>
-    <p:tnLst>
-      <p:par>
-        <p:cTn id="1" dur="indefinite" restart="never" nodeType="tmRoot"/>
-      </p:par>
-    </p:tnLst>
-  </p:timing>
 </p:sld>
 </file>
 
@@ -9989,7 +11043,13 @@
   <p:cSld>
     <p:spTree>
       <p:nvGrpSpPr>
-        <p:cNvPr id="1" name=""/>
+        <p:cNvPr id="1" name="">
+          <a:extLst>
+            <a:ext uri="{FF2B5EF4-FFF2-40B4-BE49-F238E27FC236}">
+              <a16:creationId xmlns:a16="http://schemas.microsoft.com/office/drawing/2014/main" id="{82E1AC76-228C-37DF-322B-B34441DAC44B}"/>
+            </a:ext>
+          </a:extLst>
+        </p:cNvPr>
         <p:cNvGrpSpPr/>
         <p:nvPr/>
       </p:nvGrpSpPr>
@@ -10003,259 +11063,124 @@
       </p:grpSpPr>
       <p:sp>
         <p:nvSpPr>
-          <p:cNvPr id="3074" name="Rectangle 19"/>
-          <p:cNvSpPr>
-            <a:spLocks noChangeArrowheads="1"/>
+          <p:cNvPr id="8" name="Title 1">
+            <a:extLst>
+              <a:ext uri="{FF2B5EF4-FFF2-40B4-BE49-F238E27FC236}">
+                <a16:creationId xmlns:a16="http://schemas.microsoft.com/office/drawing/2014/main" id="{7DB95224-E81F-C398-2C49-14A353E454AB}"/>
+              </a:ext>
+            </a:extLst>
+          </p:cNvPr>
+          <p:cNvSpPr txBox="1">
+            <a:spLocks/>
           </p:cNvSpPr>
           <p:nvPr/>
         </p:nvSpPr>
-        <p:spPr bwMode="auto">
+        <p:spPr>
           <a:xfrm>
-            <a:off x="373063" y="152400"/>
-            <a:ext cx="6853237" cy="1143000"/>
+            <a:off x="166969" y="964435"/>
+            <a:ext cx="8794933" cy="468008"/>
           </a:xfrm>
           <a:prstGeom prst="rect">
             <a:avLst/>
           </a:prstGeom>
-          <a:noFill/>
-          <a:ln>
-            <a:noFill/>
-          </a:ln>
-          <a:effectLst/>
-          <a:extLst>
-            <a:ext uri="{909E8E84-426E-40dd-AFC4-6F175D3DCCD1}">
-              <a14:hiddenFill xmlns="" xmlns:a14="http://schemas.microsoft.com/office/drawing/2010/main">
-                <a:solidFill>
-                  <a:schemeClr val="accent1"/>
-                </a:solidFill>
-              </a14:hiddenFill>
-            </a:ext>
-            <a:ext uri="{91240B29-F687-4f45-9708-019B960494DF}">
-              <a14:hiddenLine xmlns="" xmlns:a14="http://schemas.microsoft.com/office/drawing/2010/main" w="9525">
-                <a:solidFill>
-                  <a:schemeClr val="tx1"/>
-                </a:solidFill>
-                <a:miter lim="800000"/>
-                <a:headEnd/>
-                <a:tailEnd/>
-              </a14:hiddenLine>
-            </a:ext>
-            <a:ext uri="{AF507438-7753-43e0-B8FC-AC1667EBCBE1}">
-              <a14:hiddenEffects xmlns="" xmlns:a14="http://schemas.microsoft.com/office/drawing/2010/main">
-                <a:effectLst>
-                  <a:outerShdw blurRad="63500" dist="38099" dir="2700000" algn="ctr" rotWithShape="0">
-                    <a:schemeClr val="bg2">
-                      <a:alpha val="74998"/>
-                    </a:schemeClr>
-                  </a:outerShdw>
-                </a:effectLst>
-              </a14:hiddenEffects>
-            </a:ext>
-          </a:extLst>
-        </p:spPr>
-        <p:txBody>
-          <a:bodyPr anchor="ctr"/>
+        </p:spPr>
+        <p:txBody>
+          <a:bodyPr vert="horz" lIns="68580" tIns="34290" rIns="68580" bIns="34290" rtlCol="0" anchor="ctr">
+            <a:normAutofit/>
+          </a:bodyPr>
           <a:lstStyle>
-            <a:lvl1pPr eaLnBrk="0" hangingPunct="0">
-              <a:defRPr sz="2400">
-                <a:solidFill>
-                  <a:schemeClr val="tx1"/>
-                </a:solidFill>
-                <a:latin typeface="Arial" pitchFamily="34" charset="0"/>
-                <a:ea typeface="ＭＳ Ｐゴシック" pitchFamily="34" charset="-128"/>
+            <a:lvl1pPr algn="l" defTabSz="914400" rtl="0" eaLnBrk="1" latinLnBrk="0" hangingPunct="1">
+              <a:lnSpc>
+                <a:spcPct val="90000"/>
+              </a:lnSpc>
+              <a:spcBef>
+                <a:spcPct val="0"/>
+              </a:spcBef>
+              <a:buNone/>
+              <a:defRPr sz="4400" kern="1200">
+                <a:solidFill>
+                  <a:schemeClr val="tx1"/>
+                </a:solidFill>
+                <a:latin typeface="+mj-lt"/>
+                <a:ea typeface="+mj-ea"/>
+                <a:cs typeface="+mj-cs"/>
               </a:defRPr>
             </a:lvl1pPr>
-            <a:lvl2pPr marL="742950" indent="-285750" eaLnBrk="0" hangingPunct="0">
-              <a:defRPr sz="2400">
-                <a:solidFill>
-                  <a:schemeClr val="tx1"/>
-                </a:solidFill>
-                <a:latin typeface="Arial" pitchFamily="34" charset="0"/>
-                <a:ea typeface="ＭＳ Ｐゴシック" pitchFamily="34" charset="-128"/>
-              </a:defRPr>
-            </a:lvl2pPr>
-            <a:lvl3pPr marL="1143000" indent="-228600" eaLnBrk="0" hangingPunct="0">
-              <a:defRPr sz="2400">
-                <a:solidFill>
-                  <a:schemeClr val="tx1"/>
-                </a:solidFill>
-                <a:latin typeface="Arial" pitchFamily="34" charset="0"/>
-                <a:ea typeface="ＭＳ Ｐゴシック" pitchFamily="34" charset="-128"/>
-              </a:defRPr>
-            </a:lvl3pPr>
-            <a:lvl4pPr marL="1600200" indent="-228600" eaLnBrk="0" hangingPunct="0">
-              <a:defRPr sz="2400">
-                <a:solidFill>
-                  <a:schemeClr val="tx1"/>
-                </a:solidFill>
-                <a:latin typeface="Arial" pitchFamily="34" charset="0"/>
-                <a:ea typeface="ＭＳ Ｐゴシック" pitchFamily="34" charset="-128"/>
-              </a:defRPr>
-            </a:lvl4pPr>
-            <a:lvl5pPr marL="2057400" indent="-228600" eaLnBrk="0" hangingPunct="0">
-              <a:defRPr sz="2400">
-                <a:solidFill>
-                  <a:schemeClr val="tx1"/>
-                </a:solidFill>
-                <a:latin typeface="Arial" pitchFamily="34" charset="0"/>
-                <a:ea typeface="ＭＳ Ｐゴシック" pitchFamily="34" charset="-128"/>
-              </a:defRPr>
-            </a:lvl5pPr>
-            <a:lvl6pPr marL="2514600" indent="-228600" eaLnBrk="0" fontAlgn="base" hangingPunct="0">
-              <a:spcBef>
-                <a:spcPct val="0"/>
-              </a:spcBef>
-              <a:spcAft>
-                <a:spcPct val="0"/>
-              </a:spcAft>
-              <a:defRPr sz="2400">
-                <a:solidFill>
-                  <a:schemeClr val="tx1"/>
-                </a:solidFill>
-                <a:latin typeface="Arial" pitchFamily="34" charset="0"/>
-                <a:ea typeface="ＭＳ Ｐゴシック" pitchFamily="34" charset="-128"/>
-              </a:defRPr>
-            </a:lvl6pPr>
-            <a:lvl7pPr marL="2971800" indent="-228600" eaLnBrk="0" fontAlgn="base" hangingPunct="0">
-              <a:spcBef>
-                <a:spcPct val="0"/>
-              </a:spcBef>
-              <a:spcAft>
-                <a:spcPct val="0"/>
-              </a:spcAft>
-              <a:defRPr sz="2400">
-                <a:solidFill>
-                  <a:schemeClr val="tx1"/>
-                </a:solidFill>
-                <a:latin typeface="Arial" pitchFamily="34" charset="0"/>
-                <a:ea typeface="ＭＳ Ｐゴシック" pitchFamily="34" charset="-128"/>
-              </a:defRPr>
-            </a:lvl7pPr>
-            <a:lvl8pPr marL="3429000" indent="-228600" eaLnBrk="0" fontAlgn="base" hangingPunct="0">
-              <a:spcBef>
-                <a:spcPct val="0"/>
-              </a:spcBef>
-              <a:spcAft>
-                <a:spcPct val="0"/>
-              </a:spcAft>
-              <a:defRPr sz="2400">
-                <a:solidFill>
-                  <a:schemeClr val="tx1"/>
-                </a:solidFill>
-                <a:latin typeface="Arial" pitchFamily="34" charset="0"/>
-                <a:ea typeface="ＭＳ Ｐゴシック" pitchFamily="34" charset="-128"/>
-              </a:defRPr>
-            </a:lvl8pPr>
-            <a:lvl9pPr marL="3886200" indent="-228600" eaLnBrk="0" fontAlgn="base" hangingPunct="0">
-              <a:spcBef>
-                <a:spcPct val="0"/>
-              </a:spcBef>
-              <a:spcAft>
-                <a:spcPct val="0"/>
-              </a:spcAft>
-              <a:defRPr sz="2400">
-                <a:solidFill>
-                  <a:schemeClr val="tx1"/>
-                </a:solidFill>
-                <a:latin typeface="Arial" pitchFamily="34" charset="0"/>
-                <a:ea typeface="ＭＳ Ｐゴシック" pitchFamily="34" charset="-128"/>
-              </a:defRPr>
-            </a:lvl9pPr>
           </a:lstStyle>
           <a:p>
-            <a:pPr eaLnBrk="1" hangingPunct="1">
-              <a:lnSpc>
-                <a:spcPct val="150000"/>
-              </a:lnSpc>
-              <a:defRPr/>
-            </a:pPr>
             <a:r>
-              <a:rPr lang="en-US" altLang="zh-TW" sz="3600" dirty="0" smtClean="0">
-                <a:solidFill>
-                  <a:srgbClr val="4D4D4D"/>
-                </a:solidFill>
-                <a:latin typeface="Georgia" pitchFamily="18" charset="0"/>
-                <a:ea typeface="PMingLiU" pitchFamily="18" charset="-120"/>
+              <a:rPr lang="en-US" sz="2100" dirty="0">
+                <a:latin typeface="Arial" panose="020B0604020202020204" pitchFamily="34" charset="0"/>
+                <a:cs typeface="Arial" panose="020B0604020202020204" pitchFamily="34" charset="0"/>
               </a:rPr>
-              <a:t>Data Summary</a:t>
+              <a:t>How to evaluate LLM agents?</a:t>
             </a:r>
-            <a:endParaRPr lang="en-US" altLang="zh-TW" sz="3600" dirty="0">
-              <a:solidFill>
-                <a:srgbClr val="4D4D4D"/>
-              </a:solidFill>
-              <a:latin typeface="Georgia" pitchFamily="18" charset="0"/>
-              <a:ea typeface="PMingLiU" pitchFamily="18" charset="-120"/>
-            </a:endParaRPr>
-          </a:p>
-        </p:txBody>
-      </p:sp>
-      <p:sp>
-        <p:nvSpPr>
-          <p:cNvPr id="3075" name="Content Placeholder 1"/>
-          <p:cNvSpPr>
-            <a:spLocks noGrp="1"/>
-          </p:cNvSpPr>
-          <p:nvPr>
-            <p:ph/>
-          </p:nvPr>
-        </p:nvSpPr>
+          </a:p>
+        </p:txBody>
+      </p:sp>
+      <p:pic>
+        <p:nvPicPr>
+          <p:cNvPr id="3" name="Picture 2">
+            <a:extLst>
+              <a:ext uri="{FF2B5EF4-FFF2-40B4-BE49-F238E27FC236}">
+                <a16:creationId xmlns:a16="http://schemas.microsoft.com/office/drawing/2014/main" id="{A8706946-9FB2-0F89-348E-E0658A375CD6}"/>
+              </a:ext>
+            </a:extLst>
+          </p:cNvPr>
+          <p:cNvPicPr>
+            <a:picLocks noChangeAspect="1"/>
+          </p:cNvPicPr>
+          <p:nvPr/>
+        </p:nvPicPr>
+        <p:blipFill>
+          <a:blip r:embed="rId3"/>
+          <a:stretch>
+            <a:fillRect/>
+          </a:stretch>
+        </p:blipFill>
         <p:spPr>
           <a:xfrm>
-            <a:off x="533400" y="1447800"/>
-            <a:ext cx="8229600" cy="4419600"/>
+            <a:off x="91857" y="1559516"/>
+            <a:ext cx="8672795" cy="3738968"/>
           </a:xfrm>
-        </p:spPr>
+          <a:prstGeom prst="rect">
+            <a:avLst/>
+          </a:prstGeom>
+        </p:spPr>
+      </p:pic>
+      <p:sp>
+        <p:nvSpPr>
+          <p:cNvPr id="2" name="Slide Number Placeholder 1">
+            <a:extLst>
+              <a:ext uri="{FF2B5EF4-FFF2-40B4-BE49-F238E27FC236}">
+                <a16:creationId xmlns:a16="http://schemas.microsoft.com/office/drawing/2014/main" id="{D4007C8D-6134-DC97-38D4-1FD47985D225}"/>
+              </a:ext>
+            </a:extLst>
+          </p:cNvPr>
+          <p:cNvSpPr>
+            <a:spLocks noGrp="1"/>
+          </p:cNvSpPr>
+          <p:nvPr>
+            <p:ph type="sldNum" sz="quarter" idx="12"/>
+          </p:nvPr>
+        </p:nvSpPr>
+        <p:spPr/>
         <p:txBody>
           <a:bodyPr/>
           <a:lstStyle/>
           <a:p>
-            <a:pPr eaLnBrk="1" hangingPunct="1">
-              <a:lnSpc>
-                <a:spcPct val="150000"/>
-              </a:lnSpc>
-              <a:buFont typeface="Wingdings" charset="0"/>
-              <a:buChar char="§"/>
-              <a:defRPr/>
-            </a:pPr>
-            <a:endParaRPr lang="en-US" altLang="zh-TW" sz="2000" dirty="0" smtClean="0">
-              <a:solidFill>
-                <a:srgbClr val="4D4D4D"/>
-              </a:solidFill>
-              <a:latin typeface="Georgia" charset="0"/>
-              <a:ea typeface="新細明體" charset="0"/>
-              <a:cs typeface="新細明體" charset="0"/>
-            </a:endParaRPr>
-          </a:p>
-        </p:txBody>
-      </p:sp>
-      <p:sp>
-        <p:nvSpPr>
-          <p:cNvPr id="2" name="Slide Number Placeholder 1"/>
-          <p:cNvSpPr>
-            <a:spLocks noGrp="1"/>
-          </p:cNvSpPr>
-          <p:nvPr>
-            <p:ph type="sldNum" sz="quarter" idx="12"/>
-          </p:nvPr>
-        </p:nvSpPr>
-        <p:spPr/>
-        <p:txBody>
-          <a:bodyPr/>
-          <a:lstStyle/>
-          <a:p>
-            <a:fld id="{B95760C2-38E4-496F-933D-2305F303D3F1}" type="slidenum">
-              <a:rPr lang="zh-TW" altLang="en-US" smtClean="0"/>
-              <a:pPr/>
+            <a:fld id="{09775F43-1499-4DA3-AD15-177EAD7511FA}" type="slidenum">
+              <a:rPr lang="en-US" smtClean="0"/>
               <a:t>9</a:t>
             </a:fld>
-            <a:endParaRPr lang="en-US" altLang="zh-TW"/>
+            <a:endParaRPr lang="en-US"/>
           </a:p>
         </p:txBody>
       </p:sp>
     </p:spTree>
     <p:extLst>
       <p:ext uri="{BB962C8B-B14F-4D97-AF65-F5344CB8AC3E}">
-        <p14:creationId xmlns:p14="http://schemas.microsoft.com/office/powerpoint/2010/main" val="461079532"/>
+        <p14:creationId xmlns:p14="http://schemas.microsoft.com/office/powerpoint/2010/main" val="2777066833"/>
       </p:ext>
     </p:extLst>
   </p:cSld>
@@ -10265,7 +11190,75 @@
   <p:timing>
     <p:tnLst>
       <p:par>
-        <p:cTn id="1" dur="indefinite" restart="never" nodeType="tmRoot"/>
+        <p:cTn id="1" dur="indefinite" restart="never" nodeType="tmRoot">
+          <p:childTnLst>
+            <p:seq concurrent="1" nextAc="seek">
+              <p:cTn id="2" dur="indefinite" nodeType="mainSeq">
+                <p:childTnLst>
+                  <p:par>
+                    <p:cTn id="3" fill="hold">
+                      <p:stCondLst>
+                        <p:cond delay="indefinite"/>
+                      </p:stCondLst>
+                      <p:childTnLst>
+                        <p:par>
+                          <p:cTn id="4" fill="hold">
+                            <p:stCondLst>
+                              <p:cond delay="0"/>
+                            </p:stCondLst>
+                            <p:childTnLst>
+                              <p:par>
+                                <p:cTn id="5" presetID="1" presetClass="entr" presetSubtype="0" fill="hold" nodeType="clickEffect">
+                                  <p:stCondLst>
+                                    <p:cond delay="0"/>
+                                  </p:stCondLst>
+                                  <p:childTnLst>
+                                    <p:set>
+                                      <p:cBhvr>
+                                        <p:cTn id="6" dur="1" fill="hold">
+                                          <p:stCondLst>
+                                            <p:cond delay="0"/>
+                                          </p:stCondLst>
+                                        </p:cTn>
+                                        <p:tgtEl>
+                                          <p:spTgt spid="3"/>
+                                        </p:tgtEl>
+                                        <p:attrNameLst>
+                                          <p:attrName>style.visibility</p:attrName>
+                                        </p:attrNameLst>
+                                      </p:cBhvr>
+                                      <p:to>
+                                        <p:strVal val="visible"/>
+                                      </p:to>
+                                    </p:set>
+                                  </p:childTnLst>
+                                </p:cTn>
+                              </p:par>
+                            </p:childTnLst>
+                          </p:cTn>
+                        </p:par>
+                      </p:childTnLst>
+                    </p:cTn>
+                  </p:par>
+                </p:childTnLst>
+              </p:cTn>
+              <p:prevCondLst>
+                <p:cond evt="onPrev" delay="0">
+                  <p:tgtEl>
+                    <p:sldTgt/>
+                  </p:tgtEl>
+                </p:cond>
+              </p:prevCondLst>
+              <p:nextCondLst>
+                <p:cond evt="onNext" delay="0">
+                  <p:tgtEl>
+                    <p:sldTgt/>
+                  </p:tgtEl>
+                </p:cond>
+              </p:nextCondLst>
+            </p:seq>
+          </p:childTnLst>
+        </p:cTn>
       </p:par>
     </p:tnLst>
   </p:timing>

--- a/Lectures/ProjPresentationTemplate-1.pptx
+++ b/Lectures/ProjPresentationTemplate-1.pptx
@@ -5,10 +5,10 @@
     <p:sldMasterId id="2147483648" r:id="rId1"/>
   </p:sldMasterIdLst>
   <p:notesMasterIdLst>
-    <p:notesMasterId r:id="rId17"/>
+    <p:notesMasterId r:id="rId18"/>
   </p:notesMasterIdLst>
   <p:handoutMasterIdLst>
-    <p:handoutMasterId r:id="rId18"/>
+    <p:handoutMasterId r:id="rId19"/>
   </p:handoutMasterIdLst>
   <p:sldIdLst>
     <p:sldId id="256" r:id="rId2"/>
@@ -26,6 +26,7 @@
     <p:sldId id="308" r:id="rId14"/>
     <p:sldId id="286" r:id="rId15"/>
     <p:sldId id="305" r:id="rId16"/>
+    <p:sldId id="979" r:id="rId17"/>
   </p:sldIdLst>
   <p:sldSz cx="9144000" cy="6858000" type="screen4x3"/>
   <p:notesSz cx="7010400" cy="9296400"/>
@@ -255,7 +256,7 @@
           <a:p>
             <a:fld id="{D244F014-9A02-4370-98AF-8A4593A02C65}" type="datetimeFigureOut">
               <a:rPr lang="en-US" smtClean="0"/>
-              <a:t>4/1/26</a:t>
+              <a:t>4/14/26</a:t>
             </a:fld>
             <a:endParaRPr lang="en-US"/>
           </a:p>
@@ -388,14 +389,14 @@
           <a:effectLst/>
           <a:extLst>
             <a:ext uri="{909E8E84-426E-40dd-AFC4-6F175D3DCCD1}">
-              <a14:hiddenFill xmlns:a14="http://schemas.microsoft.com/office/drawing/2010/main" xmlns="">
+              <a14:hiddenFill xmlns="" xmlns:a14="http://schemas.microsoft.com/office/drawing/2010/main">
                 <a:solidFill>
                   <a:schemeClr val="accent1"/>
                 </a:solidFill>
               </a14:hiddenFill>
             </a:ext>
             <a:ext uri="{91240B29-F687-4f45-9708-019B960494DF}">
-              <a14:hiddenLine xmlns:a14="http://schemas.microsoft.com/office/drawing/2010/main" xmlns="" w="9525">
+              <a14:hiddenLine xmlns="" xmlns:a14="http://schemas.microsoft.com/office/drawing/2010/main" w="9525">
                 <a:solidFill>
                   <a:schemeClr val="tx1"/>
                 </a:solidFill>
@@ -405,7 +406,7 @@
               </a14:hiddenLine>
             </a:ext>
             <a:ext uri="{AF507438-7753-43e0-B8FC-AC1667EBCBE1}">
-              <a14:hiddenEffects xmlns:a14="http://schemas.microsoft.com/office/drawing/2010/main" xmlns="">
+              <a14:hiddenEffects xmlns="" xmlns:a14="http://schemas.microsoft.com/office/drawing/2010/main">
                 <a:effectLst>
                   <a:outerShdw dist="35921" dir="2700000" algn="ctr" rotWithShape="0">
                     <a:schemeClr val="bg2"/>
@@ -458,14 +459,14 @@
           <a:effectLst/>
           <a:extLst>
             <a:ext uri="{909E8E84-426E-40dd-AFC4-6F175D3DCCD1}">
-              <a14:hiddenFill xmlns:a14="http://schemas.microsoft.com/office/drawing/2010/main" xmlns="">
+              <a14:hiddenFill xmlns="" xmlns:a14="http://schemas.microsoft.com/office/drawing/2010/main">
                 <a:solidFill>
                   <a:schemeClr val="accent1"/>
                 </a:solidFill>
               </a14:hiddenFill>
             </a:ext>
             <a:ext uri="{91240B29-F687-4f45-9708-019B960494DF}">
-              <a14:hiddenLine xmlns:a14="http://schemas.microsoft.com/office/drawing/2010/main" xmlns="" w="9525">
+              <a14:hiddenLine xmlns="" xmlns:a14="http://schemas.microsoft.com/office/drawing/2010/main" w="9525">
                 <a:solidFill>
                   <a:schemeClr val="tx1"/>
                 </a:solidFill>
@@ -475,7 +476,7 @@
               </a14:hiddenLine>
             </a:ext>
             <a:ext uri="{AF507438-7753-43e0-B8FC-AC1667EBCBE1}">
-              <a14:hiddenEffects xmlns:a14="http://schemas.microsoft.com/office/drawing/2010/main" xmlns="">
+              <a14:hiddenEffects xmlns="" xmlns:a14="http://schemas.microsoft.com/office/drawing/2010/main">
                 <a:effectLst>
                   <a:outerShdw dist="35921" dir="2700000" algn="ctr" rotWithShape="0">
                     <a:schemeClr val="bg2"/>
@@ -533,17 +534,17 @@
           <a:effectLst/>
           <a:extLst>
             <a:ext uri="{FAA26D3D-D897-4be2-8F04-BA451C77F1D7}">
-              <ma14:placeholderFlag xmlns:ma14="http://schemas.microsoft.com/office/mac/drawingml/2011/main" xmlns="" val="1"/>
+              <ma14:placeholderFlag xmlns="" xmlns:ma14="http://schemas.microsoft.com/office/mac/drawingml/2011/main" val="1"/>
             </a:ext>
             <a:ext uri="{909E8E84-426E-40dd-AFC4-6F175D3DCCD1}">
-              <a14:hiddenFill xmlns:a14="http://schemas.microsoft.com/office/drawing/2010/main" xmlns="">
+              <a14:hiddenFill xmlns="" xmlns:a14="http://schemas.microsoft.com/office/drawing/2010/main">
                 <a:solidFill>
                   <a:srgbClr val="FFFFFF"/>
                 </a:solidFill>
               </a14:hiddenFill>
             </a:ext>
             <a:ext uri="{AF507438-7753-43e0-B8FC-AC1667EBCBE1}">
-              <a14:hiddenEffects xmlns:a14="http://schemas.microsoft.com/office/drawing/2010/main" xmlns="">
+              <a14:hiddenEffects xmlns="" xmlns:a14="http://schemas.microsoft.com/office/drawing/2010/main">
                 <a:effectLst>
                   <a:outerShdw blurRad="63500" dist="38099" dir="2700000" algn="ctr" rotWithShape="0">
                     <a:srgbClr val="000000">
@@ -554,7 +555,7 @@
               </a14:hiddenEffects>
             </a:ext>
             <a:ext uri="{53640926-AAD7-44d8-BBD7-CCE9431645EC}">
-              <a14:shadowObscured xmlns:a14="http://schemas.microsoft.com/office/drawing/2010/main" xmlns="" val="1"/>
+              <a14:shadowObscured xmlns="" xmlns:a14="http://schemas.microsoft.com/office/drawing/2010/main" val="1"/>
             </a:ext>
           </a:extLst>
         </p:spPr>
@@ -584,14 +585,14 @@
           <a:effectLst/>
           <a:extLst>
             <a:ext uri="{909E8E84-426E-40dd-AFC4-6F175D3DCCD1}">
-              <a14:hiddenFill xmlns:a14="http://schemas.microsoft.com/office/drawing/2010/main" xmlns="">
+              <a14:hiddenFill xmlns="" xmlns:a14="http://schemas.microsoft.com/office/drawing/2010/main">
                 <a:solidFill>
                   <a:schemeClr val="accent1"/>
                 </a:solidFill>
               </a14:hiddenFill>
             </a:ext>
             <a:ext uri="{91240B29-F687-4f45-9708-019B960494DF}">
-              <a14:hiddenLine xmlns:a14="http://schemas.microsoft.com/office/drawing/2010/main" xmlns="" w="9525">
+              <a14:hiddenLine xmlns="" xmlns:a14="http://schemas.microsoft.com/office/drawing/2010/main" w="9525">
                 <a:solidFill>
                   <a:schemeClr val="tx1"/>
                 </a:solidFill>
@@ -601,7 +602,7 @@
               </a14:hiddenLine>
             </a:ext>
             <a:ext uri="{AF507438-7753-43e0-B8FC-AC1667EBCBE1}">
-              <a14:hiddenEffects xmlns:a14="http://schemas.microsoft.com/office/drawing/2010/main" xmlns="">
+              <a14:hiddenEffects xmlns="" xmlns:a14="http://schemas.microsoft.com/office/drawing/2010/main">
                 <a:effectLst>
                   <a:outerShdw dist="35921" dir="2700000" algn="ctr" rotWithShape="0">
                     <a:schemeClr val="bg2"/>
@@ -680,14 +681,14 @@
           <a:effectLst/>
           <a:extLst>
             <a:ext uri="{909E8E84-426E-40dd-AFC4-6F175D3DCCD1}">
-              <a14:hiddenFill xmlns:a14="http://schemas.microsoft.com/office/drawing/2010/main" xmlns="">
+              <a14:hiddenFill xmlns="" xmlns:a14="http://schemas.microsoft.com/office/drawing/2010/main">
                 <a:solidFill>
                   <a:schemeClr val="accent1"/>
                 </a:solidFill>
               </a14:hiddenFill>
             </a:ext>
             <a:ext uri="{91240B29-F687-4f45-9708-019B960494DF}">
-              <a14:hiddenLine xmlns:a14="http://schemas.microsoft.com/office/drawing/2010/main" xmlns="" w="9525">
+              <a14:hiddenLine xmlns="" xmlns:a14="http://schemas.microsoft.com/office/drawing/2010/main" w="9525">
                 <a:solidFill>
                   <a:schemeClr val="tx1"/>
                 </a:solidFill>
@@ -697,7 +698,7 @@
               </a14:hiddenLine>
             </a:ext>
             <a:ext uri="{AF507438-7753-43e0-B8FC-AC1667EBCBE1}">
-              <a14:hiddenEffects xmlns:a14="http://schemas.microsoft.com/office/drawing/2010/main" xmlns="">
+              <a14:hiddenEffects xmlns="" xmlns:a14="http://schemas.microsoft.com/office/drawing/2010/main">
                 <a:effectLst>
                   <a:outerShdw dist="35921" dir="2700000" algn="ctr" rotWithShape="0">
                     <a:schemeClr val="bg2"/>
@@ -750,14 +751,14 @@
           <a:effectLst/>
           <a:extLst>
             <a:ext uri="{909E8E84-426E-40dd-AFC4-6F175D3DCCD1}">
-              <a14:hiddenFill xmlns:a14="http://schemas.microsoft.com/office/drawing/2010/main" xmlns="">
+              <a14:hiddenFill xmlns="" xmlns:a14="http://schemas.microsoft.com/office/drawing/2010/main">
                 <a:solidFill>
                   <a:schemeClr val="accent1"/>
                 </a:solidFill>
               </a14:hiddenFill>
             </a:ext>
             <a:ext uri="{91240B29-F687-4f45-9708-019B960494DF}">
-              <a14:hiddenLine xmlns:a14="http://schemas.microsoft.com/office/drawing/2010/main" xmlns="" w="9525">
+              <a14:hiddenLine xmlns="" xmlns:a14="http://schemas.microsoft.com/office/drawing/2010/main" w="9525">
                 <a:solidFill>
                   <a:schemeClr val="tx1"/>
                 </a:solidFill>
@@ -767,7 +768,7 @@
               </a14:hiddenLine>
             </a:ext>
             <a:ext uri="{AF507438-7753-43e0-B8FC-AC1667EBCBE1}">
-              <a14:hiddenEffects xmlns:a14="http://schemas.microsoft.com/office/drawing/2010/main" xmlns="">
+              <a14:hiddenEffects xmlns="" xmlns:a14="http://schemas.microsoft.com/office/drawing/2010/main">
                 <a:effectLst>
                   <a:outerShdw dist="35921" dir="2700000" algn="ctr" rotWithShape="0">
                     <a:schemeClr val="bg2"/>
@@ -964,7 +965,7 @@
           <a:noFill/>
           <a:extLst>
             <a:ext uri="{AF507438-7753-43e0-B8FC-AC1667EBCBE1}">
-              <a14:hiddenEffects xmlns:a14="http://schemas.microsoft.com/office/drawing/2010/main" xmlns="">
+              <a14:hiddenEffects xmlns="" xmlns:a14="http://schemas.microsoft.com/office/drawing/2010/main">
                 <a:effectLst>
                   <a:outerShdw blurRad="63500" dist="38099" dir="2700000" algn="ctr" rotWithShape="0">
                     <a:schemeClr val="bg2">
@@ -1128,7 +1129,7 @@
           <a:noFill/>
           <a:extLst>
             <a:ext uri="{AF507438-7753-43e0-B8FC-AC1667EBCBE1}">
-              <a14:hiddenEffects xmlns:a14="http://schemas.microsoft.com/office/drawing/2010/main" xmlns="">
+              <a14:hiddenEffects xmlns="" xmlns:a14="http://schemas.microsoft.com/office/drawing/2010/main">
                 <a:effectLst>
                   <a:outerShdw blurRad="63500" dist="38099" dir="2700000" algn="ctr" rotWithShape="0">
                     <a:schemeClr val="bg2">
@@ -1304,7 +1305,7 @@
           <a:noFill/>
           <a:extLst>
             <a:ext uri="{AF507438-7753-43e0-B8FC-AC1667EBCBE1}">
-              <a14:hiddenEffects xmlns:a14="http://schemas.microsoft.com/office/drawing/2010/main" xmlns="">
+              <a14:hiddenEffects xmlns="" xmlns:a14="http://schemas.microsoft.com/office/drawing/2010/main">
                 <a:effectLst>
                   <a:outerShdw blurRad="63500" dist="38099" dir="2700000" algn="ctr" rotWithShape="0">
                     <a:schemeClr val="bg2">
@@ -1468,7 +1469,7 @@
           <a:noFill/>
           <a:extLst>
             <a:ext uri="{AF507438-7753-43e0-B8FC-AC1667EBCBE1}">
-              <a14:hiddenEffects xmlns:a14="http://schemas.microsoft.com/office/drawing/2010/main" xmlns="">
+              <a14:hiddenEffects xmlns="" xmlns:a14="http://schemas.microsoft.com/office/drawing/2010/main">
                 <a:effectLst>
                   <a:outerShdw blurRad="63500" dist="38099" dir="2700000" algn="ctr" rotWithShape="0">
                     <a:schemeClr val="bg2">
@@ -1539,7 +1540,7 @@
           <a:noFill/>
           <a:extLst>
             <a:ext uri="{AF507438-7753-43e0-B8FC-AC1667EBCBE1}">
-              <a14:hiddenEffects xmlns:a14="http://schemas.microsoft.com/office/drawing/2010/main" xmlns="">
+              <a14:hiddenEffects xmlns="" xmlns:a14="http://schemas.microsoft.com/office/drawing/2010/main">
                 <a:effectLst>
                   <a:outerShdw blurRad="63500" dist="38099" dir="2700000" algn="ctr" rotWithShape="0">
                     <a:schemeClr val="bg2">
@@ -1703,7 +1704,7 @@
           <a:noFill/>
           <a:extLst>
             <a:ext uri="{AF507438-7753-43e0-B8FC-AC1667EBCBE1}">
-              <a14:hiddenEffects xmlns:a14="http://schemas.microsoft.com/office/drawing/2010/main" xmlns="">
+              <a14:hiddenEffects xmlns="" xmlns:a14="http://schemas.microsoft.com/office/drawing/2010/main">
                 <a:effectLst>
                   <a:outerShdw blurRad="63500" dist="38099" dir="2700000" algn="ctr" rotWithShape="0">
                     <a:schemeClr val="bg2">
@@ -1774,7 +1775,7 @@
           <a:noFill/>
           <a:extLst>
             <a:ext uri="{AF507438-7753-43e0-B8FC-AC1667EBCBE1}">
-              <a14:hiddenEffects xmlns:a14="http://schemas.microsoft.com/office/drawing/2010/main" xmlns="">
+              <a14:hiddenEffects xmlns="" xmlns:a14="http://schemas.microsoft.com/office/drawing/2010/main">
                 <a:effectLst>
                   <a:outerShdw blurRad="63500" dist="38099" dir="2700000" algn="ctr" rotWithShape="0">
                     <a:schemeClr val="bg2">
@@ -1938,7 +1939,7 @@
           <a:noFill/>
           <a:extLst>
             <a:ext uri="{AF507438-7753-43e0-B8FC-AC1667EBCBE1}">
-              <a14:hiddenEffects xmlns:a14="http://schemas.microsoft.com/office/drawing/2010/main" xmlns="">
+              <a14:hiddenEffects xmlns="" xmlns:a14="http://schemas.microsoft.com/office/drawing/2010/main">
                 <a:effectLst>
                   <a:outerShdw blurRad="63500" dist="38099" dir="2700000" algn="ctr" rotWithShape="0">
                     <a:schemeClr val="bg2">
@@ -2009,7 +2010,7 @@
           <a:noFill/>
           <a:extLst>
             <a:ext uri="{AF507438-7753-43e0-B8FC-AC1667EBCBE1}">
-              <a14:hiddenEffects xmlns:a14="http://schemas.microsoft.com/office/drawing/2010/main" xmlns="">
+              <a14:hiddenEffects xmlns="" xmlns:a14="http://schemas.microsoft.com/office/drawing/2010/main">
                 <a:effectLst>
                   <a:outerShdw blurRad="63500" dist="38099" dir="2700000" algn="ctr" rotWithShape="0">
                     <a:schemeClr val="bg2">
@@ -2173,7 +2174,7 @@
           <a:noFill/>
           <a:extLst>
             <a:ext uri="{AF507438-7753-43e0-B8FC-AC1667EBCBE1}">
-              <a14:hiddenEffects xmlns:a14="http://schemas.microsoft.com/office/drawing/2010/main" xmlns="">
+              <a14:hiddenEffects xmlns="" xmlns:a14="http://schemas.microsoft.com/office/drawing/2010/main">
                 <a:effectLst>
                   <a:outerShdw blurRad="63500" dist="38099" dir="2700000" algn="ctr" rotWithShape="0">
                     <a:schemeClr val="bg2">
@@ -2425,7 +2426,7 @@
           <a:noFill/>
           <a:extLst>
             <a:ext uri="{AF507438-7753-43e0-B8FC-AC1667EBCBE1}">
-              <a14:hiddenEffects xmlns:a14="http://schemas.microsoft.com/office/drawing/2010/main" xmlns="">
+              <a14:hiddenEffects xmlns="" xmlns:a14="http://schemas.microsoft.com/office/drawing/2010/main">
                 <a:effectLst>
                   <a:outerShdw blurRad="63500" dist="38099" dir="2700000" algn="ctr" rotWithShape="0">
                     <a:schemeClr val="bg2">
@@ -2589,7 +2590,7 @@
           <a:noFill/>
           <a:extLst>
             <a:ext uri="{AF507438-7753-43e0-B8FC-AC1667EBCBE1}">
-              <a14:hiddenEffects xmlns:a14="http://schemas.microsoft.com/office/drawing/2010/main" xmlns="">
+              <a14:hiddenEffects xmlns="" xmlns:a14="http://schemas.microsoft.com/office/drawing/2010/main">
                 <a:effectLst>
                   <a:outerShdw blurRad="63500" dist="38099" dir="2700000" algn="ctr" rotWithShape="0">
                     <a:schemeClr val="bg2">
@@ -2664,7 +2665,7 @@
           <a:noFill/>
           <a:extLst>
             <a:ext uri="{AF507438-7753-43e0-B8FC-AC1667EBCBE1}">
-              <a14:hiddenEffects xmlns:a14="http://schemas.microsoft.com/office/drawing/2010/main" xmlns="">
+              <a14:hiddenEffects xmlns="" xmlns:a14="http://schemas.microsoft.com/office/drawing/2010/main">
                 <a:effectLst>
                   <a:outerShdw blurRad="63500" dist="38099" dir="2700000" algn="ctr" rotWithShape="0">
                     <a:schemeClr val="bg2">
@@ -2828,7 +2829,7 @@
           <a:noFill/>
           <a:extLst>
             <a:ext uri="{AF507438-7753-43e0-B8FC-AC1667EBCBE1}">
-              <a14:hiddenEffects xmlns:a14="http://schemas.microsoft.com/office/drawing/2010/main" xmlns="">
+              <a14:hiddenEffects xmlns="" xmlns:a14="http://schemas.microsoft.com/office/drawing/2010/main">
                 <a:effectLst>
                   <a:outerShdw blurRad="63500" dist="38099" dir="2700000" algn="ctr" rotWithShape="0">
                     <a:schemeClr val="bg2">
@@ -2999,7 +3000,7 @@
           <a:noFill/>
           <a:extLst>
             <a:ext uri="{AF507438-7753-43e0-B8FC-AC1667EBCBE1}">
-              <a14:hiddenEffects xmlns:a14="http://schemas.microsoft.com/office/drawing/2010/main" xmlns="">
+              <a14:hiddenEffects xmlns="" xmlns:a14="http://schemas.microsoft.com/office/drawing/2010/main">
                 <a:effectLst>
                   <a:outerShdw blurRad="63500" dist="38099" dir="2700000" algn="ctr" rotWithShape="0">
                     <a:schemeClr val="bg2">
@@ -3163,7 +3164,7 @@
           <a:noFill/>
           <a:extLst>
             <a:ext uri="{AF507438-7753-43e0-B8FC-AC1667EBCBE1}">
-              <a14:hiddenEffects xmlns:a14="http://schemas.microsoft.com/office/drawing/2010/main" xmlns="">
+              <a14:hiddenEffects xmlns="" xmlns:a14="http://schemas.microsoft.com/office/drawing/2010/main">
                 <a:effectLst>
                   <a:outerShdw blurRad="63500" dist="38099" dir="2700000" algn="ctr" rotWithShape="0">
                     <a:schemeClr val="bg2">
@@ -6031,17 +6032,17 @@
           <a:effectLst/>
           <a:extLst>
             <a:ext uri="{FAA26D3D-D897-4be2-8F04-BA451C77F1D7}">
-              <ma14:placeholderFlag xmlns:ma14="http://schemas.microsoft.com/office/mac/drawingml/2011/main" xmlns="" val="1"/>
+              <ma14:placeholderFlag xmlns="" xmlns:ma14="http://schemas.microsoft.com/office/mac/drawingml/2011/main" val="1"/>
             </a:ext>
             <a:ext uri="{909E8E84-426E-40dd-AFC4-6F175D3DCCD1}">
-              <a14:hiddenFill xmlns:a14="http://schemas.microsoft.com/office/drawing/2010/main" xmlns="">
+              <a14:hiddenFill xmlns="" xmlns:a14="http://schemas.microsoft.com/office/drawing/2010/main">
                 <a:solidFill>
                   <a:schemeClr val="accent1"/>
                 </a:solidFill>
               </a14:hiddenFill>
             </a:ext>
             <a:ext uri="{91240B29-F687-4f45-9708-019B960494DF}">
-              <a14:hiddenLine xmlns:a14="http://schemas.microsoft.com/office/drawing/2010/main" xmlns="" w="9525">
+              <a14:hiddenLine xmlns="" xmlns:a14="http://schemas.microsoft.com/office/drawing/2010/main" w="9525">
                 <a:solidFill>
                   <a:schemeClr val="tx1"/>
                 </a:solidFill>
@@ -6051,7 +6052,7 @@
               </a14:hiddenLine>
             </a:ext>
             <a:ext uri="{AF507438-7753-43e0-B8FC-AC1667EBCBE1}">
-              <a14:hiddenEffects xmlns:a14="http://schemas.microsoft.com/office/drawing/2010/main" xmlns="">
+              <a14:hiddenEffects xmlns="" xmlns:a14="http://schemas.microsoft.com/office/drawing/2010/main">
                 <a:effectLst>
                   <a:outerShdw blurRad="63500" dist="38099" dir="2700000" algn="ctr" rotWithShape="0">
                     <a:schemeClr val="bg2">
@@ -6104,17 +6105,17 @@
           <a:effectLst/>
           <a:extLst>
             <a:ext uri="{FAA26D3D-D897-4be2-8F04-BA451C77F1D7}">
-              <ma14:placeholderFlag xmlns:ma14="http://schemas.microsoft.com/office/mac/drawingml/2011/main" xmlns="" val="1"/>
+              <ma14:placeholderFlag xmlns="" xmlns:ma14="http://schemas.microsoft.com/office/mac/drawingml/2011/main" val="1"/>
             </a:ext>
             <a:ext uri="{909E8E84-426E-40dd-AFC4-6F175D3DCCD1}">
-              <a14:hiddenFill xmlns:a14="http://schemas.microsoft.com/office/drawing/2010/main" xmlns="">
+              <a14:hiddenFill xmlns="" xmlns:a14="http://schemas.microsoft.com/office/drawing/2010/main">
                 <a:solidFill>
                   <a:schemeClr val="accent1"/>
                 </a:solidFill>
               </a14:hiddenFill>
             </a:ext>
             <a:ext uri="{91240B29-F687-4f45-9708-019B960494DF}">
-              <a14:hiddenLine xmlns:a14="http://schemas.microsoft.com/office/drawing/2010/main" xmlns="" w="9525">
+              <a14:hiddenLine xmlns="" xmlns:a14="http://schemas.microsoft.com/office/drawing/2010/main" w="9525">
                 <a:solidFill>
                   <a:schemeClr val="tx1"/>
                 </a:solidFill>
@@ -6124,7 +6125,7 @@
               </a14:hiddenLine>
             </a:ext>
             <a:ext uri="{AF507438-7753-43e0-B8FC-AC1667EBCBE1}">
-              <a14:hiddenEffects xmlns:a14="http://schemas.microsoft.com/office/drawing/2010/main" xmlns="">
+              <a14:hiddenEffects xmlns="" xmlns:a14="http://schemas.microsoft.com/office/drawing/2010/main">
                 <a:effectLst>
                   <a:outerShdw blurRad="63500" dist="38099" dir="2700000" algn="ctr" rotWithShape="0">
                     <a:schemeClr val="bg2">
@@ -6205,14 +6206,14 @@
           <a:effectLst/>
           <a:extLst>
             <a:ext uri="{909E8E84-426E-40dd-AFC4-6F175D3DCCD1}">
-              <a14:hiddenFill xmlns:a14="http://schemas.microsoft.com/office/drawing/2010/main" xmlns="">
+              <a14:hiddenFill xmlns="" xmlns:a14="http://schemas.microsoft.com/office/drawing/2010/main">
                 <a:solidFill>
                   <a:schemeClr val="accent1"/>
                 </a:solidFill>
               </a14:hiddenFill>
             </a:ext>
             <a:ext uri="{91240B29-F687-4f45-9708-019B960494DF}">
-              <a14:hiddenLine xmlns:a14="http://schemas.microsoft.com/office/drawing/2010/main" xmlns="" w="9525">
+              <a14:hiddenLine xmlns="" xmlns:a14="http://schemas.microsoft.com/office/drawing/2010/main" w="9525">
                 <a:solidFill>
                   <a:schemeClr val="tx1"/>
                 </a:solidFill>
@@ -6222,7 +6223,7 @@
               </a14:hiddenLine>
             </a:ext>
             <a:ext uri="{AF507438-7753-43e0-B8FC-AC1667EBCBE1}">
-              <a14:hiddenEffects xmlns:a14="http://schemas.microsoft.com/office/drawing/2010/main" xmlns="">
+              <a14:hiddenEffects xmlns="" xmlns:a14="http://schemas.microsoft.com/office/drawing/2010/main">
                 <a:effectLst>
                   <a:outerShdw dist="35921" dir="2700000" algn="ctr" rotWithShape="0">
                     <a:schemeClr val="bg2"/>
@@ -6275,14 +6276,14 @@
           <a:effectLst/>
           <a:extLst>
             <a:ext uri="{909E8E84-426E-40dd-AFC4-6F175D3DCCD1}">
-              <a14:hiddenFill xmlns:a14="http://schemas.microsoft.com/office/drawing/2010/main" xmlns="">
+              <a14:hiddenFill xmlns="" xmlns:a14="http://schemas.microsoft.com/office/drawing/2010/main">
                 <a:solidFill>
                   <a:schemeClr val="accent1"/>
                 </a:solidFill>
               </a14:hiddenFill>
             </a:ext>
             <a:ext uri="{91240B29-F687-4f45-9708-019B960494DF}">
-              <a14:hiddenLine xmlns:a14="http://schemas.microsoft.com/office/drawing/2010/main" xmlns="" w="9525">
+              <a14:hiddenLine xmlns="" xmlns:a14="http://schemas.microsoft.com/office/drawing/2010/main" w="9525">
                 <a:solidFill>
                   <a:schemeClr val="tx1"/>
                 </a:solidFill>
@@ -6292,7 +6293,7 @@
               </a14:hiddenLine>
             </a:ext>
             <a:ext uri="{AF507438-7753-43e0-B8FC-AC1667EBCBE1}">
-              <a14:hiddenEffects xmlns:a14="http://schemas.microsoft.com/office/drawing/2010/main" xmlns="">
+              <a14:hiddenEffects xmlns="" xmlns:a14="http://schemas.microsoft.com/office/drawing/2010/main">
                 <a:effectLst>
                   <a:outerShdw dist="35921" dir="2700000" algn="ctr" rotWithShape="0">
                     <a:schemeClr val="bg2"/>
@@ -6345,14 +6346,14 @@
           <a:effectLst/>
           <a:extLst>
             <a:ext uri="{909E8E84-426E-40dd-AFC4-6F175D3DCCD1}">
-              <a14:hiddenFill xmlns:a14="http://schemas.microsoft.com/office/drawing/2010/main" xmlns="">
+              <a14:hiddenFill xmlns="" xmlns:a14="http://schemas.microsoft.com/office/drawing/2010/main">
                 <a:solidFill>
                   <a:schemeClr val="accent1"/>
                 </a:solidFill>
               </a14:hiddenFill>
             </a:ext>
             <a:ext uri="{91240B29-F687-4f45-9708-019B960494DF}">
-              <a14:hiddenLine xmlns:a14="http://schemas.microsoft.com/office/drawing/2010/main" xmlns="" w="9525">
+              <a14:hiddenLine xmlns="" xmlns:a14="http://schemas.microsoft.com/office/drawing/2010/main" w="9525">
                 <a:solidFill>
                   <a:schemeClr val="tx1"/>
                 </a:solidFill>
@@ -6362,7 +6363,7 @@
               </a14:hiddenLine>
             </a:ext>
             <a:ext uri="{AF507438-7753-43e0-B8FC-AC1667EBCBE1}">
-              <a14:hiddenEffects xmlns:a14="http://schemas.microsoft.com/office/drawing/2010/main" xmlns="">
+              <a14:hiddenEffects xmlns="" xmlns:a14="http://schemas.microsoft.com/office/drawing/2010/main">
                 <a:effectLst>
                   <a:outerShdw dist="35921" dir="2700000" algn="ctr" rotWithShape="0">
                     <a:schemeClr val="bg2"/>
@@ -6842,14 +6843,14 @@
           <a:effectLst/>
           <a:extLst>
             <a:ext uri="{909E8E84-426E-40dd-AFC4-6F175D3DCCD1}">
-              <a14:hiddenFill xmlns:a14="http://schemas.microsoft.com/office/drawing/2010/main" xmlns="">
+              <a14:hiddenFill xmlns="" xmlns:a14="http://schemas.microsoft.com/office/drawing/2010/main">
                 <a:solidFill>
                   <a:schemeClr val="accent1"/>
                 </a:solidFill>
               </a14:hiddenFill>
             </a:ext>
             <a:ext uri="{91240B29-F687-4f45-9708-019B960494DF}">
-              <a14:hiddenLine xmlns:a14="http://schemas.microsoft.com/office/drawing/2010/main" xmlns="" w="9525">
+              <a14:hiddenLine xmlns="" xmlns:a14="http://schemas.microsoft.com/office/drawing/2010/main" w="9525">
                 <a:solidFill>
                   <a:schemeClr val="tx1"/>
                 </a:solidFill>
@@ -6859,7 +6860,7 @@
               </a14:hiddenLine>
             </a:ext>
             <a:ext uri="{AF507438-7753-43e0-B8FC-AC1667EBCBE1}">
-              <a14:hiddenEffects xmlns:a14="http://schemas.microsoft.com/office/drawing/2010/main" xmlns="">
+              <a14:hiddenEffects xmlns="" xmlns:a14="http://schemas.microsoft.com/office/drawing/2010/main">
                 <a:effectLst>
                   <a:outerShdw blurRad="63500" dist="38099" dir="2700000" algn="ctr" rotWithShape="0">
                     <a:schemeClr val="bg2">
@@ -7002,14 +7003,14 @@
           <a:effectLst/>
           <a:extLst>
             <a:ext uri="{909E8E84-426E-40dd-AFC4-6F175D3DCCD1}">
-              <a14:hiddenFill xmlns:a14="http://schemas.microsoft.com/office/drawing/2010/main" xmlns="">
+              <a14:hiddenFill xmlns="" xmlns:a14="http://schemas.microsoft.com/office/drawing/2010/main">
                 <a:solidFill>
                   <a:schemeClr val="accent1"/>
                 </a:solidFill>
               </a14:hiddenFill>
             </a:ext>
             <a:ext uri="{91240B29-F687-4f45-9708-019B960494DF}">
-              <a14:hiddenLine xmlns:a14="http://schemas.microsoft.com/office/drawing/2010/main" xmlns="" w="9525">
+              <a14:hiddenLine xmlns="" xmlns:a14="http://schemas.microsoft.com/office/drawing/2010/main" w="9525">
                 <a:solidFill>
                   <a:schemeClr val="tx1"/>
                 </a:solidFill>
@@ -7019,7 +7020,7 @@
               </a14:hiddenLine>
             </a:ext>
             <a:ext uri="{AF507438-7753-43e0-B8FC-AC1667EBCBE1}">
-              <a14:hiddenEffects xmlns:a14="http://schemas.microsoft.com/office/drawing/2010/main" xmlns="">
+              <a14:hiddenEffects xmlns="" xmlns:a14="http://schemas.microsoft.com/office/drawing/2010/main">
                 <a:effectLst>
                   <a:outerShdw blurRad="63500" dist="38099" dir="2700000" algn="ctr" rotWithShape="0">
                     <a:schemeClr val="bg2">
@@ -7162,14 +7163,14 @@
           <a:effectLst/>
           <a:extLst>
             <a:ext uri="{909E8E84-426E-40dd-AFC4-6F175D3DCCD1}">
-              <a14:hiddenFill xmlns:a14="http://schemas.microsoft.com/office/drawing/2010/main" xmlns="">
+              <a14:hiddenFill xmlns="" xmlns:a14="http://schemas.microsoft.com/office/drawing/2010/main">
                 <a:solidFill>
                   <a:schemeClr val="accent1"/>
                 </a:solidFill>
               </a14:hiddenFill>
             </a:ext>
             <a:ext uri="{91240B29-F687-4f45-9708-019B960494DF}">
-              <a14:hiddenLine xmlns:a14="http://schemas.microsoft.com/office/drawing/2010/main" xmlns="" w="9525">
+              <a14:hiddenLine xmlns="" xmlns:a14="http://schemas.microsoft.com/office/drawing/2010/main" w="9525">
                 <a:solidFill>
                   <a:schemeClr val="tx1"/>
                 </a:solidFill>
@@ -7179,7 +7180,7 @@
               </a14:hiddenLine>
             </a:ext>
             <a:ext uri="{AF507438-7753-43e0-B8FC-AC1667EBCBE1}">
-              <a14:hiddenEffects xmlns:a14="http://schemas.microsoft.com/office/drawing/2010/main" xmlns="">
+              <a14:hiddenEffects xmlns="" xmlns:a14="http://schemas.microsoft.com/office/drawing/2010/main">
                 <a:effectLst>
                   <a:outerShdw blurRad="63500" dist="38099" dir="2700000" algn="ctr" rotWithShape="0">
                     <a:schemeClr val="bg2">
@@ -8088,14 +8089,14 @@
           <a:effectLst/>
           <a:extLst>
             <a:ext uri="{909E8E84-426E-40dd-AFC4-6F175D3DCCD1}">
-              <a14:hiddenFill xmlns:a14="http://schemas.microsoft.com/office/drawing/2010/main" xmlns="">
+              <a14:hiddenFill xmlns="" xmlns:a14="http://schemas.microsoft.com/office/drawing/2010/main">
                 <a:solidFill>
                   <a:schemeClr val="accent1"/>
                 </a:solidFill>
               </a14:hiddenFill>
             </a:ext>
             <a:ext uri="{91240B29-F687-4f45-9708-019B960494DF}">
-              <a14:hiddenLine xmlns:a14="http://schemas.microsoft.com/office/drawing/2010/main" xmlns="" w="9525">
+              <a14:hiddenLine xmlns="" xmlns:a14="http://schemas.microsoft.com/office/drawing/2010/main" w="9525">
                 <a:solidFill>
                   <a:schemeClr val="tx1"/>
                 </a:solidFill>
@@ -8105,7 +8106,7 @@
               </a14:hiddenLine>
             </a:ext>
             <a:ext uri="{AF507438-7753-43e0-B8FC-AC1667EBCBE1}">
-              <a14:hiddenEffects xmlns:a14="http://schemas.microsoft.com/office/drawing/2010/main" xmlns="">
+              <a14:hiddenEffects xmlns="" xmlns:a14="http://schemas.microsoft.com/office/drawing/2010/main">
                 <a:effectLst>
                   <a:outerShdw blurRad="63500" dist="38099" dir="2700000" algn="ctr" rotWithShape="0">
                     <a:schemeClr val="bg2">
@@ -8362,14 +8363,14 @@
           <a:effectLst/>
           <a:extLst>
             <a:ext uri="{909E8E84-426E-40dd-AFC4-6F175D3DCCD1}">
-              <a14:hiddenFill xmlns:a14="http://schemas.microsoft.com/office/drawing/2010/main" xmlns="">
+              <a14:hiddenFill xmlns="" xmlns:a14="http://schemas.microsoft.com/office/drawing/2010/main">
                 <a:solidFill>
                   <a:schemeClr val="accent1"/>
                 </a:solidFill>
               </a14:hiddenFill>
             </a:ext>
             <a:ext uri="{91240B29-F687-4f45-9708-019B960494DF}">
-              <a14:hiddenLine xmlns:a14="http://schemas.microsoft.com/office/drawing/2010/main" xmlns="" w="9525">
+              <a14:hiddenLine xmlns="" xmlns:a14="http://schemas.microsoft.com/office/drawing/2010/main" w="9525">
                 <a:solidFill>
                   <a:schemeClr val="tx1"/>
                 </a:solidFill>
@@ -8379,7 +8380,7 @@
               </a14:hiddenLine>
             </a:ext>
             <a:ext uri="{AF507438-7753-43e0-B8FC-AC1667EBCBE1}">
-              <a14:hiddenEffects xmlns:a14="http://schemas.microsoft.com/office/drawing/2010/main" xmlns="">
+              <a14:hiddenEffects xmlns="" xmlns:a14="http://schemas.microsoft.com/office/drawing/2010/main">
                 <a:effectLst>
                   <a:outerShdw blurRad="63500" dist="38099" dir="2700000" algn="ctr" rotWithShape="0">
                     <a:schemeClr val="bg2">
@@ -8636,14 +8637,14 @@
           <a:effectLst/>
           <a:extLst>
             <a:ext uri="{909E8E84-426E-40dd-AFC4-6F175D3DCCD1}">
-              <a14:hiddenFill xmlns:a14="http://schemas.microsoft.com/office/drawing/2010/main" xmlns="">
+              <a14:hiddenFill xmlns="" xmlns:a14="http://schemas.microsoft.com/office/drawing/2010/main">
                 <a:solidFill>
                   <a:schemeClr val="accent1"/>
                 </a:solidFill>
               </a14:hiddenFill>
             </a:ext>
             <a:ext uri="{91240B29-F687-4f45-9708-019B960494DF}">
-              <a14:hiddenLine xmlns:a14="http://schemas.microsoft.com/office/drawing/2010/main" xmlns="" w="9525">
+              <a14:hiddenLine xmlns="" xmlns:a14="http://schemas.microsoft.com/office/drawing/2010/main" w="9525">
                 <a:solidFill>
                   <a:schemeClr val="tx1"/>
                 </a:solidFill>
@@ -8653,7 +8654,7 @@
               </a14:hiddenLine>
             </a:ext>
             <a:ext uri="{AF507438-7753-43e0-B8FC-AC1667EBCBE1}">
-              <a14:hiddenEffects xmlns:a14="http://schemas.microsoft.com/office/drawing/2010/main" xmlns="">
+              <a14:hiddenEffects xmlns="" xmlns:a14="http://schemas.microsoft.com/office/drawing/2010/main">
                 <a:effectLst>
                   <a:outerShdw blurRad="63500" dist="38099" dir="2700000" algn="ctr" rotWithShape="0">
                     <a:schemeClr val="bg2">
@@ -8910,14 +8911,14 @@
           <a:effectLst/>
           <a:extLst>
             <a:ext uri="{909E8E84-426E-40dd-AFC4-6F175D3DCCD1}">
-              <a14:hiddenFill xmlns:a14="http://schemas.microsoft.com/office/drawing/2010/main" xmlns="">
+              <a14:hiddenFill xmlns="" xmlns:a14="http://schemas.microsoft.com/office/drawing/2010/main">
                 <a:solidFill>
                   <a:schemeClr val="accent1"/>
                 </a:solidFill>
               </a14:hiddenFill>
             </a:ext>
             <a:ext uri="{91240B29-F687-4f45-9708-019B960494DF}">
-              <a14:hiddenLine xmlns:a14="http://schemas.microsoft.com/office/drawing/2010/main" xmlns="" w="9525">
+              <a14:hiddenLine xmlns="" xmlns:a14="http://schemas.microsoft.com/office/drawing/2010/main" w="9525">
                 <a:solidFill>
                   <a:schemeClr val="tx1"/>
                 </a:solidFill>
@@ -8927,7 +8928,7 @@
               </a14:hiddenLine>
             </a:ext>
             <a:ext uri="{AF507438-7753-43e0-B8FC-AC1667EBCBE1}">
-              <a14:hiddenEffects xmlns:a14="http://schemas.microsoft.com/office/drawing/2010/main" xmlns="">
+              <a14:hiddenEffects xmlns="" xmlns:a14="http://schemas.microsoft.com/office/drawing/2010/main">
                 <a:effectLst>
                   <a:outerShdw blurRad="63500" dist="38099" dir="2700000" algn="ctr" rotWithShape="0">
                     <a:schemeClr val="bg2">
@@ -8982,14 +8983,14 @@
           </a:ln>
           <a:extLst>
             <a:ext uri="{909E8E84-426E-40dd-AFC4-6F175D3DCCD1}">
-              <a14:hiddenFill xmlns:a14="http://schemas.microsoft.com/office/drawing/2010/main" xmlns="">
+              <a14:hiddenFill xmlns="" xmlns:a14="http://schemas.microsoft.com/office/drawing/2010/main">
                 <a:solidFill>
                   <a:srgbClr val="FFFFFF"/>
                 </a:solidFill>
               </a14:hiddenFill>
             </a:ext>
             <a:ext uri="{91240B29-F687-4f45-9708-019B960494DF}">
-              <a14:hiddenLine xmlns:a14="http://schemas.microsoft.com/office/drawing/2010/main" xmlns="" w="9525">
+              <a14:hiddenLine xmlns="" xmlns:a14="http://schemas.microsoft.com/office/drawing/2010/main" w="9525">
                 <a:solidFill>
                   <a:srgbClr val="000000"/>
                 </a:solidFill>
@@ -9196,14 +9197,14 @@
           <a:effectLst/>
           <a:extLst>
             <a:ext uri="{909E8E84-426E-40dd-AFC4-6F175D3DCCD1}">
-              <a14:hiddenFill xmlns:a14="http://schemas.microsoft.com/office/drawing/2010/main" xmlns="">
+              <a14:hiddenFill xmlns="" xmlns:a14="http://schemas.microsoft.com/office/drawing/2010/main">
                 <a:solidFill>
                   <a:schemeClr val="accent1"/>
                 </a:solidFill>
               </a14:hiddenFill>
             </a:ext>
             <a:ext uri="{91240B29-F687-4f45-9708-019B960494DF}">
-              <a14:hiddenLine xmlns:a14="http://schemas.microsoft.com/office/drawing/2010/main" xmlns="" w="9525">
+              <a14:hiddenLine xmlns="" xmlns:a14="http://schemas.microsoft.com/office/drawing/2010/main" w="9525">
                 <a:solidFill>
                   <a:schemeClr val="tx1"/>
                 </a:solidFill>
@@ -9213,7 +9214,7 @@
               </a14:hiddenLine>
             </a:ext>
             <a:ext uri="{AF507438-7753-43e0-B8FC-AC1667EBCBE1}">
-              <a14:hiddenEffects xmlns:a14="http://schemas.microsoft.com/office/drawing/2010/main" xmlns="">
+              <a14:hiddenEffects xmlns="" xmlns:a14="http://schemas.microsoft.com/office/drawing/2010/main">
                 <a:effectLst>
                   <a:outerShdw blurRad="63500" dist="38099" dir="2700000" algn="ctr" rotWithShape="0">
                     <a:schemeClr val="bg2">
@@ -9268,14 +9269,14 @@
           </a:ln>
           <a:extLst>
             <a:ext uri="{909E8E84-426E-40dd-AFC4-6F175D3DCCD1}">
-              <a14:hiddenFill xmlns:a14="http://schemas.microsoft.com/office/drawing/2010/main" xmlns="">
+              <a14:hiddenFill xmlns="" xmlns:a14="http://schemas.microsoft.com/office/drawing/2010/main">
                 <a:solidFill>
                   <a:srgbClr val="FFFFFF"/>
                 </a:solidFill>
               </a14:hiddenFill>
             </a:ext>
             <a:ext uri="{91240B29-F687-4f45-9708-019B960494DF}">
-              <a14:hiddenLine xmlns:a14="http://schemas.microsoft.com/office/drawing/2010/main" xmlns="" w="9525">
+              <a14:hiddenLine xmlns="" xmlns:a14="http://schemas.microsoft.com/office/drawing/2010/main" w="9525">
                 <a:solidFill>
                   <a:srgbClr val="000000"/>
                 </a:solidFill>
@@ -9438,6 +9439,102 @@
     <p:extLst>
       <p:ext uri="{BB962C8B-B14F-4D97-AF65-F5344CB8AC3E}">
         <p14:creationId xmlns:p14="http://schemas.microsoft.com/office/powerpoint/2010/main" val="2208056341"/>
+      </p:ext>
+    </p:extLst>
+  </p:cSld>
+  <p:clrMapOvr>
+    <a:masterClrMapping/>
+  </p:clrMapOvr>
+</p:sld>
+</file>
+
+<file path=ppt/slides/slide16.xml><?xml version="1.0" encoding="utf-8"?>
+<p:sld xmlns:a="http://schemas.openxmlformats.org/drawingml/2006/main" xmlns:r="http://schemas.openxmlformats.org/officeDocument/2006/relationships" xmlns:p="http://schemas.openxmlformats.org/presentationml/2006/main">
+  <p:cSld>
+    <p:spTree>
+      <p:nvGrpSpPr>
+        <p:cNvPr id="1" name=""/>
+        <p:cNvGrpSpPr/>
+        <p:nvPr/>
+      </p:nvGrpSpPr>
+      <p:grpSpPr>
+        <a:xfrm>
+          <a:off x="0" y="0"/>
+          <a:ext cx="0" cy="0"/>
+          <a:chOff x="0" y="0"/>
+          <a:chExt cx="0" cy="0"/>
+        </a:xfrm>
+      </p:grpSpPr>
+      <p:sp>
+        <p:nvSpPr>
+          <p:cNvPr id="2" name="Content Placeholder 1">
+            <a:extLst>
+              <a:ext uri="{FF2B5EF4-FFF2-40B4-BE49-F238E27FC236}">
+                <a16:creationId xmlns:a16="http://schemas.microsoft.com/office/drawing/2014/main" id="{1053C763-E66F-F7F4-4B98-39A6333D4FEE}"/>
+              </a:ext>
+            </a:extLst>
+          </p:cNvPr>
+          <p:cNvSpPr>
+            <a:spLocks noGrp="1"/>
+          </p:cNvSpPr>
+          <p:nvPr>
+            <p:ph/>
+          </p:nvPr>
+        </p:nvSpPr>
+        <p:spPr/>
+        <p:txBody>
+          <a:bodyPr/>
+          <a:lstStyle/>
+          <a:p>
+            <a:r>
+              <a:rPr lang="en-US" dirty="0"/>
+              <a:t>A page on who did what </a:t>
+            </a:r>
+            <a:r>
+              <a:rPr lang="en-US"/>
+              <a:t>in your </a:t>
+            </a:r>
+            <a:r>
+              <a:rPr lang="en-US" dirty="0"/>
+              <a:t>team</a:t>
+            </a:r>
+          </a:p>
+        </p:txBody>
+      </p:sp>
+      <p:sp>
+        <p:nvSpPr>
+          <p:cNvPr id="3" name="Slide Number Placeholder 2">
+            <a:extLst>
+              <a:ext uri="{FF2B5EF4-FFF2-40B4-BE49-F238E27FC236}">
+                <a16:creationId xmlns:a16="http://schemas.microsoft.com/office/drawing/2014/main" id="{AECCCC63-EEEE-9848-8EFD-C25BC3A8E7FD}"/>
+              </a:ext>
+            </a:extLst>
+          </p:cNvPr>
+          <p:cNvSpPr>
+            <a:spLocks noGrp="1"/>
+          </p:cNvSpPr>
+          <p:nvPr>
+            <p:ph type="sldNum" sz="quarter" idx="12"/>
+          </p:nvPr>
+        </p:nvSpPr>
+        <p:spPr/>
+        <p:txBody>
+          <a:bodyPr/>
+          <a:lstStyle/>
+          <a:p>
+            <a:fld id="{B95760C2-38E4-496F-933D-2305F303D3F1}" type="slidenum">
+              <a:rPr lang="zh-TW" altLang="en-US" smtClean="0"/>
+              <a:pPr/>
+              <a:t>16</a:t>
+            </a:fld>
+            <a:endParaRPr lang="en-US" altLang="zh-TW"/>
+          </a:p>
+        </p:txBody>
+      </p:sp>
+    </p:spTree>
+    <p:extLst>
+      <p:ext uri="{BB962C8B-B14F-4D97-AF65-F5344CB8AC3E}">
+        <p14:creationId xmlns:p14="http://schemas.microsoft.com/office/powerpoint/2010/main" val="2188113236"/>
       </p:ext>
     </p:extLst>
   </p:cSld>
@@ -9487,14 +9584,14 @@
           <a:effectLst/>
           <a:extLst>
             <a:ext uri="{909E8E84-426E-40dd-AFC4-6F175D3DCCD1}">
-              <a14:hiddenFill xmlns:a14="http://schemas.microsoft.com/office/drawing/2010/main" xmlns="">
+              <a14:hiddenFill xmlns="" xmlns:a14="http://schemas.microsoft.com/office/drawing/2010/main">
                 <a:solidFill>
                   <a:schemeClr val="accent1"/>
                 </a:solidFill>
               </a14:hiddenFill>
             </a:ext>
             <a:ext uri="{91240B29-F687-4f45-9708-019B960494DF}">
-              <a14:hiddenLine xmlns:a14="http://schemas.microsoft.com/office/drawing/2010/main" xmlns="" w="9525">
+              <a14:hiddenLine xmlns="" xmlns:a14="http://schemas.microsoft.com/office/drawing/2010/main" w="9525">
                 <a:solidFill>
                   <a:schemeClr val="tx1"/>
                 </a:solidFill>
@@ -9504,7 +9601,7 @@
               </a14:hiddenLine>
             </a:ext>
             <a:ext uri="{AF507438-7753-43e0-B8FC-AC1667EBCBE1}">
-              <a14:hiddenEffects xmlns:a14="http://schemas.microsoft.com/office/drawing/2010/main" xmlns="">
+              <a14:hiddenEffects xmlns="" xmlns:a14="http://schemas.microsoft.com/office/drawing/2010/main">
                 <a:effectLst>
                   <a:outerShdw blurRad="63500" dist="38099" dir="2700000" algn="ctr" rotWithShape="0">
                     <a:schemeClr val="bg2">
@@ -9719,14 +9816,14 @@
           <a:effectLst/>
           <a:extLst>
             <a:ext uri="{909E8E84-426E-40dd-AFC4-6F175D3DCCD1}">
-              <a14:hiddenFill xmlns:a14="http://schemas.microsoft.com/office/drawing/2010/main" xmlns="">
+              <a14:hiddenFill xmlns="" xmlns:a14="http://schemas.microsoft.com/office/drawing/2010/main">
                 <a:solidFill>
                   <a:schemeClr val="accent1"/>
                 </a:solidFill>
               </a14:hiddenFill>
             </a:ext>
             <a:ext uri="{91240B29-F687-4f45-9708-019B960494DF}">
-              <a14:hiddenLine xmlns:a14="http://schemas.microsoft.com/office/drawing/2010/main" xmlns="" w="9525">
+              <a14:hiddenLine xmlns="" xmlns:a14="http://schemas.microsoft.com/office/drawing/2010/main" w="9525">
                 <a:solidFill>
                   <a:schemeClr val="tx1"/>
                 </a:solidFill>
@@ -9736,7 +9833,7 @@
               </a14:hiddenLine>
             </a:ext>
             <a:ext uri="{AF507438-7753-43e0-B8FC-AC1667EBCBE1}">
-              <a14:hiddenEffects xmlns:a14="http://schemas.microsoft.com/office/drawing/2010/main" xmlns="">
+              <a14:hiddenEffects xmlns="" xmlns:a14="http://schemas.microsoft.com/office/drawing/2010/main">
                 <a:effectLst>
                   <a:outerShdw blurRad="63500" dist="38099" dir="2700000" algn="ctr" rotWithShape="0">
                     <a:schemeClr val="bg2">
@@ -9927,14 +10024,14 @@
           <a:effectLst/>
           <a:extLst>
             <a:ext uri="{909E8E84-426E-40dd-AFC4-6F175D3DCCD1}">
-              <a14:hiddenFill xmlns:a14="http://schemas.microsoft.com/office/drawing/2010/main" xmlns="">
+              <a14:hiddenFill xmlns="" xmlns:a14="http://schemas.microsoft.com/office/drawing/2010/main">
                 <a:solidFill>
                   <a:schemeClr val="accent1"/>
                 </a:solidFill>
               </a14:hiddenFill>
             </a:ext>
             <a:ext uri="{91240B29-F687-4f45-9708-019B960494DF}">
-              <a14:hiddenLine xmlns:a14="http://schemas.microsoft.com/office/drawing/2010/main" xmlns="" w="9525">
+              <a14:hiddenLine xmlns="" xmlns:a14="http://schemas.microsoft.com/office/drawing/2010/main" w="9525">
                 <a:solidFill>
                   <a:schemeClr val="tx1"/>
                 </a:solidFill>
@@ -9944,7 +10041,7 @@
               </a14:hiddenLine>
             </a:ext>
             <a:ext uri="{AF507438-7753-43e0-B8FC-AC1667EBCBE1}">
-              <a14:hiddenEffects xmlns:a14="http://schemas.microsoft.com/office/drawing/2010/main" xmlns="">
+              <a14:hiddenEffects xmlns="" xmlns:a14="http://schemas.microsoft.com/office/drawing/2010/main">
                 <a:effectLst>
                   <a:outerShdw blurRad="63500" dist="38099" dir="2700000" algn="ctr" rotWithShape="0">
                     <a:schemeClr val="bg2">
@@ -10049,14 +10146,14 @@
           <a:effectLst/>
           <a:extLst>
             <a:ext uri="{909E8E84-426E-40dd-AFC4-6F175D3DCCD1}">
-              <a14:hiddenFill xmlns:a14="http://schemas.microsoft.com/office/drawing/2010/main" xmlns="">
+              <a14:hiddenFill xmlns="" xmlns:a14="http://schemas.microsoft.com/office/drawing/2010/main">
                 <a:solidFill>
                   <a:schemeClr val="accent1"/>
                 </a:solidFill>
               </a14:hiddenFill>
             </a:ext>
             <a:ext uri="{91240B29-F687-4f45-9708-019B960494DF}">
-              <a14:hiddenLine xmlns:a14="http://schemas.microsoft.com/office/drawing/2010/main" xmlns="" w="9525">
+              <a14:hiddenLine xmlns="" xmlns:a14="http://schemas.microsoft.com/office/drawing/2010/main" w="9525">
                 <a:solidFill>
                   <a:schemeClr val="tx1"/>
                 </a:solidFill>
@@ -10066,7 +10163,7 @@
               </a14:hiddenLine>
             </a:ext>
             <a:ext uri="{AF507438-7753-43e0-B8FC-AC1667EBCBE1}">
-              <a14:hiddenEffects xmlns:a14="http://schemas.microsoft.com/office/drawing/2010/main" xmlns="">
+              <a14:hiddenEffects xmlns="" xmlns:a14="http://schemas.microsoft.com/office/drawing/2010/main">
                 <a:effectLst>
                   <a:outerShdw blurRad="63500" dist="38099" dir="2700000" algn="ctr" rotWithShape="0">
                     <a:schemeClr val="bg2">
@@ -10281,14 +10378,14 @@
           <a:effectLst/>
           <a:extLst>
             <a:ext uri="{909E8E84-426E-40dd-AFC4-6F175D3DCCD1}">
-              <a14:hiddenFill xmlns:a14="http://schemas.microsoft.com/office/drawing/2010/main" xmlns="">
+              <a14:hiddenFill xmlns="" xmlns:a14="http://schemas.microsoft.com/office/drawing/2010/main">
                 <a:solidFill>
                   <a:schemeClr val="accent1"/>
                 </a:solidFill>
               </a14:hiddenFill>
             </a:ext>
             <a:ext uri="{91240B29-F687-4f45-9708-019B960494DF}">
-              <a14:hiddenLine xmlns:a14="http://schemas.microsoft.com/office/drawing/2010/main" xmlns="" w="9525">
+              <a14:hiddenLine xmlns="" xmlns:a14="http://schemas.microsoft.com/office/drawing/2010/main" w="9525">
                 <a:solidFill>
                   <a:schemeClr val="tx1"/>
                 </a:solidFill>
@@ -10298,7 +10395,7 @@
               </a14:hiddenLine>
             </a:ext>
             <a:ext uri="{AF507438-7753-43e0-B8FC-AC1667EBCBE1}">
-              <a14:hiddenEffects xmlns:a14="http://schemas.microsoft.com/office/drawing/2010/main" xmlns="">
+              <a14:hiddenEffects xmlns="" xmlns:a14="http://schemas.microsoft.com/office/drawing/2010/main">
                 <a:effectLst>
                   <a:outerShdw blurRad="63500" dist="38099" dir="2700000" algn="ctr" rotWithShape="0">
                     <a:schemeClr val="bg2">
@@ -10518,14 +10615,14 @@
           <a:effectLst/>
           <a:extLst>
             <a:ext uri="{909E8E84-426E-40dd-AFC4-6F175D3DCCD1}">
-              <a14:hiddenFill xmlns:a14="http://schemas.microsoft.com/office/drawing/2010/main" xmlns="">
+              <a14:hiddenFill xmlns="" xmlns:a14="http://schemas.microsoft.com/office/drawing/2010/main">
                 <a:solidFill>
                   <a:schemeClr val="accent1"/>
                 </a:solidFill>
               </a14:hiddenFill>
             </a:ext>
             <a:ext uri="{91240B29-F687-4f45-9708-019B960494DF}">
-              <a14:hiddenLine xmlns:a14="http://schemas.microsoft.com/office/drawing/2010/main" xmlns="" w="9525">
+              <a14:hiddenLine xmlns="" xmlns:a14="http://schemas.microsoft.com/office/drawing/2010/main" w="9525">
                 <a:solidFill>
                   <a:schemeClr val="tx1"/>
                 </a:solidFill>
@@ -10535,7 +10632,7 @@
               </a14:hiddenLine>
             </a:ext>
             <a:ext uri="{AF507438-7753-43e0-B8FC-AC1667EBCBE1}">
-              <a14:hiddenEffects xmlns:a14="http://schemas.microsoft.com/office/drawing/2010/main" xmlns="">
+              <a14:hiddenEffects xmlns="" xmlns:a14="http://schemas.microsoft.com/office/drawing/2010/main">
                 <a:effectLst>
                   <a:outerShdw blurRad="63500" dist="38099" dir="2700000" algn="ctr" rotWithShape="0">
                     <a:schemeClr val="bg2">
@@ -10697,7 +10794,7 @@
           <a:noFill/>
           <a:extLst>
             <a:ext uri="{909E8E84-426E-40dd-AFC4-6F175D3DCCD1}">
-              <a14:hiddenFill xmlns:a14="http://schemas.microsoft.com/office/drawing/2010/main" xmlns="">
+              <a14:hiddenFill xmlns="" xmlns:a14="http://schemas.microsoft.com/office/drawing/2010/main">
                 <a:solidFill>
                   <a:srgbClr val="FFFFFF"/>
                 </a:solidFill>
@@ -10736,7 +10833,7 @@
           <a:noFill/>
           <a:extLst>
             <a:ext uri="{909E8E84-426E-40dd-AFC4-6F175D3DCCD1}">
-              <a14:hiddenFill xmlns:a14="http://schemas.microsoft.com/office/drawing/2010/main" xmlns="">
+              <a14:hiddenFill xmlns="" xmlns:a14="http://schemas.microsoft.com/office/drawing/2010/main">
                 <a:solidFill>
                   <a:srgbClr val="FFFFFF"/>
                 </a:solidFill>
@@ -10809,14 +10906,14 @@
           <a:effectLst/>
           <a:extLst>
             <a:ext uri="{909E8E84-426E-40dd-AFC4-6F175D3DCCD1}">
-              <a14:hiddenFill xmlns:a14="http://schemas.microsoft.com/office/drawing/2010/main" xmlns="">
+              <a14:hiddenFill xmlns="" xmlns:a14="http://schemas.microsoft.com/office/drawing/2010/main">
                 <a:solidFill>
                   <a:schemeClr val="accent1"/>
                 </a:solidFill>
               </a14:hiddenFill>
             </a:ext>
             <a:ext uri="{91240B29-F687-4f45-9708-019B960494DF}">
-              <a14:hiddenLine xmlns:a14="http://schemas.microsoft.com/office/drawing/2010/main" xmlns="" w="9525">
+              <a14:hiddenLine xmlns="" xmlns:a14="http://schemas.microsoft.com/office/drawing/2010/main" w="9525">
                 <a:solidFill>
                   <a:schemeClr val="tx1"/>
                 </a:solidFill>
@@ -10826,7 +10923,7 @@
               </a14:hiddenLine>
             </a:ext>
             <a:ext uri="{AF507438-7753-43e0-B8FC-AC1667EBCBE1}">
-              <a14:hiddenEffects xmlns:a14="http://schemas.microsoft.com/office/drawing/2010/main" xmlns="">
+              <a14:hiddenEffects xmlns="" xmlns:a14="http://schemas.microsoft.com/office/drawing/2010/main">
                 <a:effectLst>
                   <a:outerShdw blurRad="63500" dist="38099" dir="2700000" algn="ctr" rotWithShape="0">
                     <a:schemeClr val="bg2">
